--- a/SpringIntoQC_Presentation.pptx
+++ b/SpringIntoQC_Presentation.pptx
@@ -14,6 +14,8 @@
     <p:sldId id="262" r:id="rId13"/>
     <p:sldId id="263" r:id="rId14"/>
     <p:sldId id="264" r:id="rId15"/>
+    <p:sldId id="265" r:id="rId16"/>
+    <p:sldId id="266" r:id="rId17"/>
   </p:sldIdLst>
   <p:sldSz cx="12188952" cy="6858000" type="screen4x3"/>
   <p:notesSz cx="6858000" cy="9144000"/>
@@ -3403,6 +3405,2190 @@
 </p:sld>
 </file>
 
+<file path=ppt/slides/slide10.xml><?xml version="1.0" encoding="utf-8"?>
+<p:sld xmlns:a="http://schemas.openxmlformats.org/drawingml/2006/main" xmlns:p="http://schemas.openxmlformats.org/presentationml/2006/main" xmlns:r="http://schemas.openxmlformats.org/officeDocument/2006/relationships">
+  <p:cSld>
+    <p:spTree>
+      <p:nvGrpSpPr>
+        <p:cNvPr id="1" name=""/>
+        <p:cNvGrpSpPr/>
+        <p:nvPr/>
+      </p:nvGrpSpPr>
+      <p:grpSpPr/>
+      <p:sp>
+        <p:nvSpPr>
+          <p:cNvPr id="2" name="Rectangle 1"/>
+          <p:cNvSpPr/>
+          <p:nvPr/>
+        </p:nvSpPr>
+        <p:spPr>
+          <a:xfrm>
+            <a:off x="0" y="0"/>
+            <a:ext cx="12188952" cy="6858000"/>
+          </a:xfrm>
+          <a:prstGeom prst="rect">
+            <a:avLst/>
+          </a:prstGeom>
+          <a:solidFill>
+            <a:srgbClr val="F4F4F4"/>
+          </a:solidFill>
+          <a:ln>
+            <a:noFill/>
+          </a:ln>
+        </p:spPr>
+        <p:style>
+          <a:lnRef idx="1">
+            <a:schemeClr val="accent1"/>
+          </a:lnRef>
+          <a:fillRef idx="3">
+            <a:schemeClr val="accent1"/>
+          </a:fillRef>
+          <a:effectRef idx="2">
+            <a:schemeClr val="accent1"/>
+          </a:effectRef>
+          <a:fontRef idx="minor">
+            <a:schemeClr val="lt1"/>
+          </a:fontRef>
+        </p:style>
+        <p:txBody>
+          <a:bodyPr rtlCol="0" anchor="ctr"/>
+          <a:lstStyle/>
+          <a:p>
+            <a:pPr algn="ctr"/>
+          </a:p>
+        </p:txBody>
+      </p:sp>
+      <p:sp>
+        <p:nvSpPr>
+          <p:cNvPr id="3" name="Rectangle 2"/>
+          <p:cNvSpPr/>
+          <p:nvPr/>
+        </p:nvSpPr>
+        <p:spPr>
+          <a:xfrm>
+            <a:off x="0" y="0"/>
+            <a:ext cx="12188952" cy="1234440"/>
+          </a:xfrm>
+          <a:prstGeom prst="rect">
+            <a:avLst/>
+          </a:prstGeom>
+          <a:solidFill>
+            <a:srgbClr val="1A5C38"/>
+          </a:solidFill>
+          <a:ln>
+            <a:noFill/>
+          </a:ln>
+        </p:spPr>
+        <p:style>
+          <a:lnRef idx="1">
+            <a:schemeClr val="accent1"/>
+          </a:lnRef>
+          <a:fillRef idx="3">
+            <a:schemeClr val="accent1"/>
+          </a:fillRef>
+          <a:effectRef idx="2">
+            <a:schemeClr val="accent1"/>
+          </a:effectRef>
+          <a:fontRef idx="minor">
+            <a:schemeClr val="lt1"/>
+          </a:fontRef>
+        </p:style>
+        <p:txBody>
+          <a:bodyPr rtlCol="0" anchor="ctr"/>
+          <a:lstStyle/>
+          <a:p>
+            <a:pPr algn="ctr"/>
+          </a:p>
+        </p:txBody>
+      </p:sp>
+      <p:sp>
+        <p:nvSpPr>
+          <p:cNvPr id="4" name="Rectangle 3"/>
+          <p:cNvSpPr/>
+          <p:nvPr/>
+        </p:nvSpPr>
+        <p:spPr>
+          <a:xfrm>
+            <a:off x="0" y="1234440"/>
+            <a:ext cx="12188952" cy="73152"/>
+          </a:xfrm>
+          <a:prstGeom prst="rect">
+            <a:avLst/>
+          </a:prstGeom>
+          <a:solidFill>
+            <a:srgbClr val="D4A017"/>
+          </a:solidFill>
+          <a:ln>
+            <a:noFill/>
+          </a:ln>
+        </p:spPr>
+        <p:style>
+          <a:lnRef idx="1">
+            <a:schemeClr val="accent1"/>
+          </a:lnRef>
+          <a:fillRef idx="3">
+            <a:schemeClr val="accent1"/>
+          </a:fillRef>
+          <a:effectRef idx="2">
+            <a:schemeClr val="accent1"/>
+          </a:effectRef>
+          <a:fontRef idx="minor">
+            <a:schemeClr val="lt1"/>
+          </a:fontRef>
+        </p:style>
+        <p:txBody>
+          <a:bodyPr rtlCol="0" anchor="ctr"/>
+          <a:lstStyle/>
+          <a:p>
+            <a:pPr algn="ctr"/>
+          </a:p>
+        </p:txBody>
+      </p:sp>
+      <p:sp>
+        <p:nvSpPr>
+          <p:cNvPr id="5" name="TextBox 4"/>
+          <p:cNvSpPr txBox="1"/>
+          <p:nvPr/>
+        </p:nvSpPr>
+        <p:spPr>
+          <a:xfrm>
+            <a:off x="320040" y="137160"/>
+            <a:ext cx="10972800" cy="777240"/>
+          </a:xfrm>
+          <a:prstGeom prst="rect">
+            <a:avLst/>
+          </a:prstGeom>
+          <a:noFill/>
+        </p:spPr>
+        <p:txBody>
+          <a:bodyPr wrap="square">
+            <a:spAutoFit/>
+          </a:bodyPr>
+          <a:lstStyle/>
+          <a:p>
+            <a:pPr algn="l"/>
+            <a:r>
+              <a:rPr sz="2800" b="1" i="0">
+                <a:solidFill>
+                  <a:srgbClr val="FFFFFF"/>
+                </a:solidFill>
+              </a:rPr>
+              <a:t>Staffing &amp; Budget</a:t>
+            </a:r>
+          </a:p>
+        </p:txBody>
+      </p:sp>
+      <p:sp>
+        <p:nvSpPr>
+          <p:cNvPr id="6" name="TextBox 5"/>
+          <p:cNvSpPr txBox="1"/>
+          <p:nvPr/>
+        </p:nvSpPr>
+        <p:spPr>
+          <a:xfrm>
+            <a:off x="320040" y="822960"/>
+            <a:ext cx="10972800" cy="411480"/>
+          </a:xfrm>
+          <a:prstGeom prst="rect">
+            <a:avLst/>
+          </a:prstGeom>
+          <a:noFill/>
+        </p:spPr>
+        <p:txBody>
+          <a:bodyPr wrap="square">
+            <a:spAutoFit/>
+          </a:bodyPr>
+          <a:lstStyle/>
+          <a:p>
+            <a:pPr algn="l"/>
+            <a:r>
+              <a:rPr sz="1400" b="0" i="0">
+                <a:solidFill>
+                  <a:srgbClr val="D4A017"/>
+                </a:solidFill>
+              </a:rPr>
+              <a:t>Minimal New Investment — Maximum Leverage of Existing Resources</a:t>
+            </a:r>
+          </a:p>
+        </p:txBody>
+      </p:sp>
+      <p:sp>
+        <p:nvSpPr>
+          <p:cNvPr id="7" name="Rectangle 6"/>
+          <p:cNvSpPr/>
+          <p:nvPr/>
+        </p:nvSpPr>
+        <p:spPr>
+          <a:xfrm>
+            <a:off x="320040" y="1463040"/>
+            <a:ext cx="5486400" cy="384048"/>
+          </a:xfrm>
+          <a:prstGeom prst="rect">
+            <a:avLst/>
+          </a:prstGeom>
+          <a:solidFill>
+            <a:srgbClr val="1A5C38"/>
+          </a:solidFill>
+          <a:ln>
+            <a:noFill/>
+          </a:ln>
+        </p:spPr>
+        <p:style>
+          <a:lnRef idx="1">
+            <a:schemeClr val="accent1"/>
+          </a:lnRef>
+          <a:fillRef idx="3">
+            <a:schemeClr val="accent1"/>
+          </a:fillRef>
+          <a:effectRef idx="2">
+            <a:schemeClr val="accent1"/>
+          </a:effectRef>
+          <a:fontRef idx="minor">
+            <a:schemeClr val="lt1"/>
+          </a:fontRef>
+        </p:style>
+        <p:txBody>
+          <a:bodyPr rtlCol="0" anchor="ctr"/>
+          <a:lstStyle/>
+          <a:p>
+            <a:pPr algn="ctr"/>
+          </a:p>
+        </p:txBody>
+      </p:sp>
+      <p:sp>
+        <p:nvSpPr>
+          <p:cNvPr id="8" name="TextBox 7"/>
+          <p:cNvSpPr txBox="1"/>
+          <p:nvPr/>
+        </p:nvSpPr>
+        <p:spPr>
+          <a:xfrm>
+            <a:off x="457200" y="1517904"/>
+            <a:ext cx="5303520" cy="320040"/>
+          </a:xfrm>
+          <a:prstGeom prst="rect">
+            <a:avLst/>
+          </a:prstGeom>
+          <a:noFill/>
+        </p:spPr>
+        <p:txBody>
+          <a:bodyPr wrap="square">
+            <a:spAutoFit/>
+          </a:bodyPr>
+          <a:lstStyle/>
+          <a:p>
+            <a:pPr algn="l"/>
+            <a:r>
+              <a:rPr sz="1400" b="1" i="0">
+                <a:solidFill>
+                  <a:srgbClr val="FFFFFF"/>
+                </a:solidFill>
+              </a:rPr>
+              <a:t>Staffing — Redeployment Model</a:t>
+            </a:r>
+          </a:p>
+        </p:txBody>
+      </p:sp>
+      <p:sp>
+        <p:nvSpPr>
+          <p:cNvPr id="9" name="TextBox 8"/>
+          <p:cNvSpPr txBox="1"/>
+          <p:nvPr/>
+        </p:nvSpPr>
+        <p:spPr>
+          <a:xfrm>
+            <a:off x="411479" y="1901952"/>
+            <a:ext cx="5303520" cy="3639312"/>
+          </a:xfrm>
+          <a:prstGeom prst="rect">
+            <a:avLst/>
+          </a:prstGeom>
+          <a:noFill/>
+        </p:spPr>
+        <p:txBody>
+          <a:bodyPr wrap="square">
+            <a:spAutoFit/>
+          </a:bodyPr>
+          <a:lstStyle/>
+          <a:p>
+            <a:pPr>
+              <a:spcAft>
+                <a:spcPts val="500"/>
+              </a:spcAft>
+            </a:pPr>
+            <a:r>
+              <a:rPr sz="1300">
+                <a:solidFill>
+                  <a:srgbClr val="2B2B2B"/>
+                </a:solidFill>
+              </a:rPr>
+              <a:t>• No new hires required</a:t>
+            </a:r>
+          </a:p>
+          <a:p>
+            <a:pPr>
+              <a:spcAft>
+                <a:spcPts val="500"/>
+              </a:spcAft>
+            </a:pPr>
+            <a:r>
+              <a:rPr sz="1300">
+                <a:solidFill>
+                  <a:srgbClr val="2B2B2B"/>
+                </a:solidFill>
+              </a:rPr>
+              <a:t>• Hunt staff transition to handoff roles as each age group finishes</a:t>
+            </a:r>
+          </a:p>
+          <a:p>
+            <a:pPr>
+              <a:spcAft>
+                <a:spcPts val="500"/>
+              </a:spcAft>
+            </a:pPr>
+            <a:r>
+              <a:rPr sz="1300">
+                <a:solidFill>
+                  <a:srgbClr val="2B2B2B"/>
+                </a:solidFill>
+              </a:rPr>
+              <a:t>• Entrance staff distribute punch/bingo cards at check-in (existing role)</a:t>
+            </a:r>
+          </a:p>
+          <a:p>
+            <a:pPr>
+              <a:spcAft>
+                <a:spcPts val="500"/>
+              </a:spcAft>
+            </a:pPr>
+            <a:r>
+              <a:rPr sz="1300">
+                <a:solidFill>
+                  <a:srgbClr val="2B2B2B"/>
+                </a:solidFill>
+              </a:rPr>
+              <a:t>• 2 staff pre-hide golden eggs before gates open (~30 min task)</a:t>
+            </a:r>
+          </a:p>
+          <a:p>
+            <a:pPr>
+              <a:spcAft>
+                <a:spcPts val="500"/>
+              </a:spcAft>
+            </a:pPr>
+            <a:r>
+              <a:rPr sz="1300">
+                <a:solidFill>
+                  <a:srgbClr val="2B2B2B"/>
+                </a:solidFill>
+              </a:rPr>
+              <a:t>• Emcee folds race schedule &amp; prize drawing into existing script</a:t>
+            </a:r>
+          </a:p>
+          <a:p>
+            <a:pPr>
+              <a:spcAft>
+                <a:spcPts val="500"/>
+              </a:spcAft>
+            </a:pPr>
+            <a:r>
+              <a:rPr sz="1300">
+                <a:solidFill>
+                  <a:srgbClr val="2B2B2B"/>
+                </a:solidFill>
+              </a:rPr>
+              <a:t>• Event supervisor oversees layout flow, card system &amp; handoff timing</a:t>
+            </a:r>
+          </a:p>
+          <a:p>
+            <a:pPr>
+              <a:spcAft>
+                <a:spcPts val="500"/>
+              </a:spcAft>
+            </a:pPr>
+            <a:r>
+              <a:rPr sz="1300">
+                <a:solidFill>
+                  <a:srgbClr val="2B2B2B"/>
+                </a:solidFill>
+              </a:rPr>
+              <a:t>• Assumption: current staffing levels cover expanded entrance &amp; hunt operations</a:t>
+            </a:r>
+          </a:p>
+        </p:txBody>
+      </p:sp>
+      <p:sp>
+        <p:nvSpPr>
+          <p:cNvPr id="10" name="Rectangle 9"/>
+          <p:cNvSpPr/>
+          <p:nvPr/>
+        </p:nvSpPr>
+        <p:spPr>
+          <a:xfrm>
+            <a:off x="5989320" y="1463040"/>
+            <a:ext cx="5897880" cy="4114800"/>
+          </a:xfrm>
+          <a:prstGeom prst="rect">
+            <a:avLst/>
+          </a:prstGeom>
+          <a:solidFill>
+            <a:srgbClr val="FFFFFF"/>
+          </a:solidFill>
+          <a:ln>
+            <a:noFill/>
+          </a:ln>
+        </p:spPr>
+        <p:style>
+          <a:lnRef idx="1">
+            <a:schemeClr val="accent1"/>
+          </a:lnRef>
+          <a:fillRef idx="3">
+            <a:schemeClr val="accent1"/>
+          </a:fillRef>
+          <a:effectRef idx="2">
+            <a:schemeClr val="accent1"/>
+          </a:effectRef>
+          <a:fontRef idx="minor">
+            <a:schemeClr val="lt1"/>
+          </a:fontRef>
+        </p:style>
+        <p:txBody>
+          <a:bodyPr rtlCol="0" anchor="ctr"/>
+          <a:lstStyle/>
+          <a:p>
+            <a:pPr algn="ctr"/>
+          </a:p>
+        </p:txBody>
+      </p:sp>
+      <p:sp>
+        <p:nvSpPr>
+          <p:cNvPr id="11" name="Rectangle 10"/>
+          <p:cNvSpPr/>
+          <p:nvPr/>
+        </p:nvSpPr>
+        <p:spPr>
+          <a:xfrm>
+            <a:off x="5989320" y="1463040"/>
+            <a:ext cx="5897880" cy="384048"/>
+          </a:xfrm>
+          <a:prstGeom prst="rect">
+            <a:avLst/>
+          </a:prstGeom>
+          <a:solidFill>
+            <a:srgbClr val="1A5C38"/>
+          </a:solidFill>
+          <a:ln>
+            <a:noFill/>
+          </a:ln>
+        </p:spPr>
+        <p:style>
+          <a:lnRef idx="1">
+            <a:schemeClr val="accent1"/>
+          </a:lnRef>
+          <a:fillRef idx="3">
+            <a:schemeClr val="accent1"/>
+          </a:fillRef>
+          <a:effectRef idx="2">
+            <a:schemeClr val="accent1"/>
+          </a:effectRef>
+          <a:fontRef idx="minor">
+            <a:schemeClr val="lt1"/>
+          </a:fontRef>
+        </p:style>
+        <p:txBody>
+          <a:bodyPr rtlCol="0" anchor="ctr"/>
+          <a:lstStyle/>
+          <a:p>
+            <a:pPr algn="ctr"/>
+          </a:p>
+        </p:txBody>
+      </p:sp>
+      <p:sp>
+        <p:nvSpPr>
+          <p:cNvPr id="12" name="TextBox 11"/>
+          <p:cNvSpPr txBox="1"/>
+          <p:nvPr/>
+        </p:nvSpPr>
+        <p:spPr>
+          <a:xfrm>
+            <a:off x="6126480" y="1508760"/>
+            <a:ext cx="5669280" cy="320040"/>
+          </a:xfrm>
+          <a:prstGeom prst="rect">
+            <a:avLst/>
+          </a:prstGeom>
+          <a:noFill/>
+        </p:spPr>
+        <p:txBody>
+          <a:bodyPr wrap="square">
+            <a:spAutoFit/>
+          </a:bodyPr>
+          <a:lstStyle/>
+          <a:p>
+            <a:pPr algn="l"/>
+            <a:r>
+              <a:rPr sz="1400" b="1" i="0">
+                <a:solidFill>
+                  <a:srgbClr val="FFFFFF"/>
+                </a:solidFill>
+              </a:rPr>
+              <a:t>Budget — Enhancement Cost</a:t>
+            </a:r>
+          </a:p>
+        </p:txBody>
+      </p:sp>
+      <p:sp>
+        <p:nvSpPr>
+          <p:cNvPr id="13" name="Rectangle 12"/>
+          <p:cNvSpPr/>
+          <p:nvPr/>
+        </p:nvSpPr>
+        <p:spPr>
+          <a:xfrm>
+            <a:off x="5989320" y="1965960"/>
+            <a:ext cx="5897880" cy="347472"/>
+          </a:xfrm>
+          <a:prstGeom prst="rect">
+            <a:avLst/>
+          </a:prstGeom>
+          <a:solidFill>
+            <a:srgbClr val="FFFFFF"/>
+          </a:solidFill>
+          <a:ln>
+            <a:noFill/>
+          </a:ln>
+        </p:spPr>
+        <p:style>
+          <a:lnRef idx="1">
+            <a:schemeClr val="accent1"/>
+          </a:lnRef>
+          <a:fillRef idx="3">
+            <a:schemeClr val="accent1"/>
+          </a:fillRef>
+          <a:effectRef idx="2">
+            <a:schemeClr val="accent1"/>
+          </a:effectRef>
+          <a:fontRef idx="minor">
+            <a:schemeClr val="lt1"/>
+          </a:fontRef>
+        </p:style>
+        <p:txBody>
+          <a:bodyPr rtlCol="0" anchor="ctr"/>
+          <a:lstStyle/>
+          <a:p>
+            <a:pPr algn="ctr"/>
+          </a:p>
+        </p:txBody>
+      </p:sp>
+      <p:sp>
+        <p:nvSpPr>
+          <p:cNvPr id="14" name="TextBox 13"/>
+          <p:cNvSpPr txBox="1"/>
+          <p:nvPr/>
+        </p:nvSpPr>
+        <p:spPr>
+          <a:xfrm>
+            <a:off x="6126480" y="2020824"/>
+            <a:ext cx="4114800" cy="274320"/>
+          </a:xfrm>
+          <a:prstGeom prst="rect">
+            <a:avLst/>
+          </a:prstGeom>
+          <a:noFill/>
+        </p:spPr>
+        <p:txBody>
+          <a:bodyPr wrap="square">
+            <a:spAutoFit/>
+          </a:bodyPr>
+          <a:lstStyle/>
+          <a:p>
+            <a:pPr algn="l"/>
+            <a:r>
+              <a:rPr sz="1100" b="0" i="0">
+                <a:solidFill>
+                  <a:srgbClr val="2B2B2B"/>
+                </a:solidFill>
+              </a:rPr>
+              <a:t>Directional signage (6–8 signs, entrances &amp; loop)</a:t>
+            </a:r>
+          </a:p>
+        </p:txBody>
+      </p:sp>
+      <p:sp>
+        <p:nvSpPr>
+          <p:cNvPr id="15" name="TextBox 14"/>
+          <p:cNvSpPr txBox="1"/>
+          <p:nvPr/>
+        </p:nvSpPr>
+        <p:spPr>
+          <a:xfrm>
+            <a:off x="9921240" y="2020824"/>
+            <a:ext cx="1828800" cy="274320"/>
+          </a:xfrm>
+          <a:prstGeom prst="rect">
+            <a:avLst/>
+          </a:prstGeom>
+          <a:noFill/>
+        </p:spPr>
+        <p:txBody>
+          <a:bodyPr wrap="square">
+            <a:spAutoFit/>
+          </a:bodyPr>
+          <a:lstStyle/>
+          <a:p>
+            <a:pPr algn="r"/>
+            <a:r>
+              <a:rPr sz="1100" b="0" i="0">
+                <a:solidFill>
+                  <a:srgbClr val="2B2B2B"/>
+                </a:solidFill>
+              </a:rPr>
+              <a:t>$150 – $350</a:t>
+            </a:r>
+          </a:p>
+        </p:txBody>
+      </p:sp>
+      <p:sp>
+        <p:nvSpPr>
+          <p:cNvPr id="16" name="Rectangle 15"/>
+          <p:cNvSpPr/>
+          <p:nvPr/>
+        </p:nvSpPr>
+        <p:spPr>
+          <a:xfrm>
+            <a:off x="5989320" y="2313432"/>
+            <a:ext cx="5897880" cy="347472"/>
+          </a:xfrm>
+          <a:prstGeom prst="rect">
+            <a:avLst/>
+          </a:prstGeom>
+          <a:solidFill>
+            <a:srgbClr val="F4F4F4"/>
+          </a:solidFill>
+          <a:ln>
+            <a:noFill/>
+          </a:ln>
+        </p:spPr>
+        <p:style>
+          <a:lnRef idx="1">
+            <a:schemeClr val="accent1"/>
+          </a:lnRef>
+          <a:fillRef idx="3">
+            <a:schemeClr val="accent1"/>
+          </a:fillRef>
+          <a:effectRef idx="2">
+            <a:schemeClr val="accent1"/>
+          </a:effectRef>
+          <a:fontRef idx="minor">
+            <a:schemeClr val="lt1"/>
+          </a:fontRef>
+        </p:style>
+        <p:txBody>
+          <a:bodyPr rtlCol="0" anchor="ctr"/>
+          <a:lstStyle/>
+          <a:p>
+            <a:pPr algn="ctr"/>
+          </a:p>
+        </p:txBody>
+      </p:sp>
+      <p:sp>
+        <p:nvSpPr>
+          <p:cNvPr id="17" name="TextBox 16"/>
+          <p:cNvSpPr txBox="1"/>
+          <p:nvPr/>
+        </p:nvSpPr>
+        <p:spPr>
+          <a:xfrm>
+            <a:off x="6126480" y="2368296"/>
+            <a:ext cx="4114800" cy="274320"/>
+          </a:xfrm>
+          <a:prstGeom prst="rect">
+            <a:avLst/>
+          </a:prstGeom>
+          <a:noFill/>
+        </p:spPr>
+        <p:txBody>
+          <a:bodyPr wrap="square">
+            <a:spAutoFit/>
+          </a:bodyPr>
+          <a:lstStyle/>
+          <a:p>
+            <a:pPr algn="l"/>
+            <a:r>
+              <a:rPr sz="1100" b="0" i="0">
+                <a:solidFill>
+                  <a:srgbClr val="2B2B2B"/>
+                </a:solidFill>
+              </a:rPr>
+              <a:t>Punch + bingo cards (printed, ~500 qty)</a:t>
+            </a:r>
+          </a:p>
+        </p:txBody>
+      </p:sp>
+      <p:sp>
+        <p:nvSpPr>
+          <p:cNvPr id="18" name="TextBox 17"/>
+          <p:cNvSpPr txBox="1"/>
+          <p:nvPr/>
+        </p:nvSpPr>
+        <p:spPr>
+          <a:xfrm>
+            <a:off x="9921240" y="2368296"/>
+            <a:ext cx="1828800" cy="274320"/>
+          </a:xfrm>
+          <a:prstGeom prst="rect">
+            <a:avLst/>
+          </a:prstGeom>
+          <a:noFill/>
+        </p:spPr>
+        <p:txBody>
+          <a:bodyPr wrap="square">
+            <a:spAutoFit/>
+          </a:bodyPr>
+          <a:lstStyle/>
+          <a:p>
+            <a:pPr algn="r"/>
+            <a:r>
+              <a:rPr sz="1100" b="0" i="0">
+                <a:solidFill>
+                  <a:srgbClr val="2B2B2B"/>
+                </a:solidFill>
+              </a:rPr>
+              <a:t>$80 – $150</a:t>
+            </a:r>
+          </a:p>
+        </p:txBody>
+      </p:sp>
+      <p:sp>
+        <p:nvSpPr>
+          <p:cNvPr id="19" name="Rectangle 18"/>
+          <p:cNvSpPr/>
+          <p:nvPr/>
+        </p:nvSpPr>
+        <p:spPr>
+          <a:xfrm>
+            <a:off x="5989320" y="2660904"/>
+            <a:ext cx="5897880" cy="347472"/>
+          </a:xfrm>
+          <a:prstGeom prst="rect">
+            <a:avLst/>
+          </a:prstGeom>
+          <a:solidFill>
+            <a:srgbClr val="FFFFFF"/>
+          </a:solidFill>
+          <a:ln>
+            <a:noFill/>
+          </a:ln>
+        </p:spPr>
+        <p:style>
+          <a:lnRef idx="1">
+            <a:schemeClr val="accent1"/>
+          </a:lnRef>
+          <a:fillRef idx="3">
+            <a:schemeClr val="accent1"/>
+          </a:fillRef>
+          <a:effectRef idx="2">
+            <a:schemeClr val="accent1"/>
+          </a:effectRef>
+          <a:fontRef idx="minor">
+            <a:schemeClr val="lt1"/>
+          </a:fontRef>
+        </p:style>
+        <p:txBody>
+          <a:bodyPr rtlCol="0" anchor="ctr"/>
+          <a:lstStyle/>
+          <a:p>
+            <a:pPr algn="ctr"/>
+          </a:p>
+        </p:txBody>
+      </p:sp>
+      <p:sp>
+        <p:nvSpPr>
+          <p:cNvPr id="20" name="TextBox 19"/>
+          <p:cNvSpPr txBox="1"/>
+          <p:nvPr/>
+        </p:nvSpPr>
+        <p:spPr>
+          <a:xfrm>
+            <a:off x="6126480" y="2715768"/>
+            <a:ext cx="4114800" cy="274320"/>
+          </a:xfrm>
+          <a:prstGeom prst="rect">
+            <a:avLst/>
+          </a:prstGeom>
+          <a:noFill/>
+        </p:spPr>
+        <p:txBody>
+          <a:bodyPr wrap="square">
+            <a:spAutoFit/>
+          </a:bodyPr>
+          <a:lstStyle/>
+          <a:p>
+            <a:pPr algn="l"/>
+            <a:r>
+              <a:rPr sz="1100" b="0" i="0">
+                <a:solidFill>
+                  <a:srgbClr val="2B2B2B"/>
+                </a:solidFill>
+              </a:rPr>
+              <a:t>Golden egg tokens (bulk + bonus ticket inserts)</a:t>
+            </a:r>
+          </a:p>
+        </p:txBody>
+      </p:sp>
+      <p:sp>
+        <p:nvSpPr>
+          <p:cNvPr id="21" name="TextBox 20"/>
+          <p:cNvSpPr txBox="1"/>
+          <p:nvPr/>
+        </p:nvSpPr>
+        <p:spPr>
+          <a:xfrm>
+            <a:off x="9921240" y="2715768"/>
+            <a:ext cx="1828800" cy="274320"/>
+          </a:xfrm>
+          <a:prstGeom prst="rect">
+            <a:avLst/>
+          </a:prstGeom>
+          <a:noFill/>
+        </p:spPr>
+        <p:txBody>
+          <a:bodyPr wrap="square">
+            <a:spAutoFit/>
+          </a:bodyPr>
+          <a:lstStyle/>
+          <a:p>
+            <a:pPr algn="r"/>
+            <a:r>
+              <a:rPr sz="1100" b="0" i="0">
+                <a:solidFill>
+                  <a:srgbClr val="2B2B2B"/>
+                </a:solidFill>
+              </a:rPr>
+              <a:t>$40 – $75</a:t>
+            </a:r>
+          </a:p>
+        </p:txBody>
+      </p:sp>
+      <p:sp>
+        <p:nvSpPr>
+          <p:cNvPr id="22" name="Rectangle 21"/>
+          <p:cNvSpPr/>
+          <p:nvPr/>
+        </p:nvSpPr>
+        <p:spPr>
+          <a:xfrm>
+            <a:off x="5989320" y="3008376"/>
+            <a:ext cx="5897880" cy="347472"/>
+          </a:xfrm>
+          <a:prstGeom prst="rect">
+            <a:avLst/>
+          </a:prstGeom>
+          <a:solidFill>
+            <a:srgbClr val="F4F4F4"/>
+          </a:solidFill>
+          <a:ln>
+            <a:noFill/>
+          </a:ln>
+        </p:spPr>
+        <p:style>
+          <a:lnRef idx="1">
+            <a:schemeClr val="accent1"/>
+          </a:lnRef>
+          <a:fillRef idx="3">
+            <a:schemeClr val="accent1"/>
+          </a:fillRef>
+          <a:effectRef idx="2">
+            <a:schemeClr val="accent1"/>
+          </a:effectRef>
+          <a:fontRef idx="minor">
+            <a:schemeClr val="lt1"/>
+          </a:fontRef>
+        </p:style>
+        <p:txBody>
+          <a:bodyPr rtlCol="0" anchor="ctr"/>
+          <a:lstStyle/>
+          <a:p>
+            <a:pPr algn="ctr"/>
+          </a:p>
+        </p:txBody>
+      </p:sp>
+      <p:sp>
+        <p:nvSpPr>
+          <p:cNvPr id="23" name="TextBox 22"/>
+          <p:cNvSpPr txBox="1"/>
+          <p:nvPr/>
+        </p:nvSpPr>
+        <p:spPr>
+          <a:xfrm>
+            <a:off x="6126480" y="3063240"/>
+            <a:ext cx="4114800" cy="274320"/>
+          </a:xfrm>
+          <a:prstGeom prst="rect">
+            <a:avLst/>
+          </a:prstGeom>
+          <a:noFill/>
+        </p:spPr>
+        <p:txBody>
+          <a:bodyPr wrap="square">
+            <a:spAutoFit/>
+          </a:bodyPr>
+          <a:lstStyle/>
+          <a:p>
+            <a:pPr algn="l"/>
+            <a:r>
+              <a:rPr sz="1100" b="0" i="0">
+                <a:solidFill>
+                  <a:srgbClr val="2B2B2B"/>
+                </a:solidFill>
+              </a:rPr>
+              <a:t>Prize package — sponsor-funded (assumption)</a:t>
+            </a:r>
+          </a:p>
+        </p:txBody>
+      </p:sp>
+      <p:sp>
+        <p:nvSpPr>
+          <p:cNvPr id="24" name="TextBox 23"/>
+          <p:cNvSpPr txBox="1"/>
+          <p:nvPr/>
+        </p:nvSpPr>
+        <p:spPr>
+          <a:xfrm>
+            <a:off x="9921240" y="3063240"/>
+            <a:ext cx="1828800" cy="274320"/>
+          </a:xfrm>
+          <a:prstGeom prst="rect">
+            <a:avLst/>
+          </a:prstGeom>
+          <a:noFill/>
+        </p:spPr>
+        <p:txBody>
+          <a:bodyPr wrap="square">
+            <a:spAutoFit/>
+          </a:bodyPr>
+          <a:lstStyle/>
+          <a:p>
+            <a:pPr algn="r"/>
+            <a:r>
+              <a:rPr sz="1100" b="0" i="0">
+                <a:solidFill>
+                  <a:srgbClr val="2B2B2B"/>
+                </a:solidFill>
+              </a:rPr>
+              <a:t>$0</a:t>
+            </a:r>
+          </a:p>
+        </p:txBody>
+      </p:sp>
+      <p:sp>
+        <p:nvSpPr>
+          <p:cNvPr id="25" name="Rectangle 24"/>
+          <p:cNvSpPr/>
+          <p:nvPr/>
+        </p:nvSpPr>
+        <p:spPr>
+          <a:xfrm>
+            <a:off x="5989320" y="3355848"/>
+            <a:ext cx="5897880" cy="347472"/>
+          </a:xfrm>
+          <a:prstGeom prst="rect">
+            <a:avLst/>
+          </a:prstGeom>
+          <a:solidFill>
+            <a:srgbClr val="FFFFFF"/>
+          </a:solidFill>
+          <a:ln>
+            <a:noFill/>
+          </a:ln>
+        </p:spPr>
+        <p:style>
+          <a:lnRef idx="1">
+            <a:schemeClr val="accent1"/>
+          </a:lnRef>
+          <a:fillRef idx="3">
+            <a:schemeClr val="accent1"/>
+          </a:fillRef>
+          <a:effectRef idx="2">
+            <a:schemeClr val="accent1"/>
+          </a:effectRef>
+          <a:fontRef idx="minor">
+            <a:schemeClr val="lt1"/>
+          </a:fontRef>
+        </p:style>
+        <p:txBody>
+          <a:bodyPr rtlCol="0" anchor="ctr"/>
+          <a:lstStyle/>
+          <a:p>
+            <a:pPr algn="ctr"/>
+          </a:p>
+        </p:txBody>
+      </p:sp>
+      <p:sp>
+        <p:nvSpPr>
+          <p:cNvPr id="26" name="TextBox 25"/>
+          <p:cNvSpPr txBox="1"/>
+          <p:nvPr/>
+        </p:nvSpPr>
+        <p:spPr>
+          <a:xfrm>
+            <a:off x="6126480" y="3410712"/>
+            <a:ext cx="4114800" cy="274320"/>
+          </a:xfrm>
+          <a:prstGeom prst="rect">
+            <a:avLst/>
+          </a:prstGeom>
+          <a:noFill/>
+        </p:spPr>
+        <p:txBody>
+          <a:bodyPr wrap="square">
+            <a:spAutoFit/>
+          </a:bodyPr>
+          <a:lstStyle/>
+          <a:p>
+            <a:pPr algn="l"/>
+            <a:r>
+              <a:rPr sz="1100" b="0" i="0">
+                <a:solidFill>
+                  <a:srgbClr val="2B2B2B"/>
+                </a:solidFill>
+              </a:rPr>
+              <a:t>Emcee script update</a:t>
+            </a:r>
+          </a:p>
+        </p:txBody>
+      </p:sp>
+      <p:sp>
+        <p:nvSpPr>
+          <p:cNvPr id="27" name="TextBox 26"/>
+          <p:cNvSpPr txBox="1"/>
+          <p:nvPr/>
+        </p:nvSpPr>
+        <p:spPr>
+          <a:xfrm>
+            <a:off x="9921240" y="3410712"/>
+            <a:ext cx="1828800" cy="274320"/>
+          </a:xfrm>
+          <a:prstGeom prst="rect">
+            <a:avLst/>
+          </a:prstGeom>
+          <a:noFill/>
+        </p:spPr>
+        <p:txBody>
+          <a:bodyPr wrap="square">
+            <a:spAutoFit/>
+          </a:bodyPr>
+          <a:lstStyle/>
+          <a:p>
+            <a:pPr algn="r"/>
+            <a:r>
+              <a:rPr sz="1100" b="0" i="0">
+                <a:solidFill>
+                  <a:srgbClr val="2B2B2B"/>
+                </a:solidFill>
+              </a:rPr>
+              <a:t>$0</a:t>
+            </a:r>
+          </a:p>
+        </p:txBody>
+      </p:sp>
+      <p:sp>
+        <p:nvSpPr>
+          <p:cNvPr id="28" name="Rectangle 27"/>
+          <p:cNvSpPr/>
+          <p:nvPr/>
+        </p:nvSpPr>
+        <p:spPr>
+          <a:xfrm>
+            <a:off x="5989320" y="3703320"/>
+            <a:ext cx="5897880" cy="347472"/>
+          </a:xfrm>
+          <a:prstGeom prst="rect">
+            <a:avLst/>
+          </a:prstGeom>
+          <a:solidFill>
+            <a:srgbClr val="F4F4F4"/>
+          </a:solidFill>
+          <a:ln>
+            <a:noFill/>
+          </a:ln>
+        </p:spPr>
+        <p:style>
+          <a:lnRef idx="1">
+            <a:schemeClr val="accent1"/>
+          </a:lnRef>
+          <a:fillRef idx="3">
+            <a:schemeClr val="accent1"/>
+          </a:fillRef>
+          <a:effectRef idx="2">
+            <a:schemeClr val="accent1"/>
+          </a:effectRef>
+          <a:fontRef idx="minor">
+            <a:schemeClr val="lt1"/>
+          </a:fontRef>
+        </p:style>
+        <p:txBody>
+          <a:bodyPr rtlCol="0" anchor="ctr"/>
+          <a:lstStyle/>
+          <a:p>
+            <a:pPr algn="ctr"/>
+          </a:p>
+        </p:txBody>
+      </p:sp>
+      <p:sp>
+        <p:nvSpPr>
+          <p:cNvPr id="29" name="TextBox 28"/>
+          <p:cNvSpPr txBox="1"/>
+          <p:nvPr/>
+        </p:nvSpPr>
+        <p:spPr>
+          <a:xfrm>
+            <a:off x="6126480" y="3758183"/>
+            <a:ext cx="4114800" cy="274320"/>
+          </a:xfrm>
+          <a:prstGeom prst="rect">
+            <a:avLst/>
+          </a:prstGeom>
+          <a:noFill/>
+        </p:spPr>
+        <p:txBody>
+          <a:bodyPr wrap="square">
+            <a:spAutoFit/>
+          </a:bodyPr>
+          <a:lstStyle/>
+          <a:p>
+            <a:pPr algn="l"/>
+            <a:r>
+              <a:rPr sz="1100" b="0" i="0">
+                <a:solidFill>
+                  <a:srgbClr val="2B2B2B"/>
+                </a:solidFill>
+              </a:rPr>
+              <a:t>Staff overtime (if applicable)</a:t>
+            </a:r>
+          </a:p>
+        </p:txBody>
+      </p:sp>
+      <p:sp>
+        <p:nvSpPr>
+          <p:cNvPr id="30" name="TextBox 29"/>
+          <p:cNvSpPr txBox="1"/>
+          <p:nvPr/>
+        </p:nvSpPr>
+        <p:spPr>
+          <a:xfrm>
+            <a:off x="9921240" y="3758183"/>
+            <a:ext cx="1828800" cy="274320"/>
+          </a:xfrm>
+          <a:prstGeom prst="rect">
+            <a:avLst/>
+          </a:prstGeom>
+          <a:noFill/>
+        </p:spPr>
+        <p:txBody>
+          <a:bodyPr wrap="square">
+            <a:spAutoFit/>
+          </a:bodyPr>
+          <a:lstStyle/>
+          <a:p>
+            <a:pPr algn="r"/>
+            <a:r>
+              <a:rPr sz="1100" b="0" i="0">
+                <a:solidFill>
+                  <a:srgbClr val="2B2B2B"/>
+                </a:solidFill>
+              </a:rPr>
+              <a:t>$0 – $420*</a:t>
+            </a:r>
+          </a:p>
+        </p:txBody>
+      </p:sp>
+      <p:sp>
+        <p:nvSpPr>
+          <p:cNvPr id="31" name="Rectangle 30"/>
+          <p:cNvSpPr/>
+          <p:nvPr/>
+        </p:nvSpPr>
+        <p:spPr>
+          <a:xfrm>
+            <a:off x="5989320" y="4050791"/>
+            <a:ext cx="5897880" cy="347472"/>
+          </a:xfrm>
+          <a:prstGeom prst="rect">
+            <a:avLst/>
+          </a:prstGeom>
+          <a:solidFill>
+            <a:srgbClr val="E8F5E9"/>
+          </a:solidFill>
+          <a:ln>
+            <a:noFill/>
+          </a:ln>
+        </p:spPr>
+        <p:style>
+          <a:lnRef idx="1">
+            <a:schemeClr val="accent1"/>
+          </a:lnRef>
+          <a:fillRef idx="3">
+            <a:schemeClr val="accent1"/>
+          </a:fillRef>
+          <a:effectRef idx="2">
+            <a:schemeClr val="accent1"/>
+          </a:effectRef>
+          <a:fontRef idx="minor">
+            <a:schemeClr val="lt1"/>
+          </a:fontRef>
+        </p:style>
+        <p:txBody>
+          <a:bodyPr rtlCol="0" anchor="ctr"/>
+          <a:lstStyle/>
+          <a:p>
+            <a:pPr algn="ctr"/>
+          </a:p>
+        </p:txBody>
+      </p:sp>
+      <p:sp>
+        <p:nvSpPr>
+          <p:cNvPr id="32" name="TextBox 31"/>
+          <p:cNvSpPr txBox="1"/>
+          <p:nvPr/>
+        </p:nvSpPr>
+        <p:spPr>
+          <a:xfrm>
+            <a:off x="6126480" y="4105655"/>
+            <a:ext cx="4114800" cy="274320"/>
+          </a:xfrm>
+          <a:prstGeom prst="rect">
+            <a:avLst/>
+          </a:prstGeom>
+          <a:noFill/>
+        </p:spPr>
+        <p:txBody>
+          <a:bodyPr wrap="square">
+            <a:spAutoFit/>
+          </a:bodyPr>
+          <a:lstStyle/>
+          <a:p>
+            <a:pPr algn="l"/>
+            <a:r>
+              <a:rPr sz="1300" b="1" i="0">
+                <a:solidFill>
+                  <a:srgbClr val="1A5C38"/>
+                </a:solidFill>
+              </a:rPr>
+              <a:t>TOTAL ESTIMATED COST</a:t>
+            </a:r>
+          </a:p>
+        </p:txBody>
+      </p:sp>
+      <p:sp>
+        <p:nvSpPr>
+          <p:cNvPr id="33" name="TextBox 32"/>
+          <p:cNvSpPr txBox="1"/>
+          <p:nvPr/>
+        </p:nvSpPr>
+        <p:spPr>
+          <a:xfrm>
+            <a:off x="9921240" y="4105655"/>
+            <a:ext cx="1828800" cy="274320"/>
+          </a:xfrm>
+          <a:prstGeom prst="rect">
+            <a:avLst/>
+          </a:prstGeom>
+          <a:noFill/>
+        </p:spPr>
+        <p:txBody>
+          <a:bodyPr wrap="square">
+            <a:spAutoFit/>
+          </a:bodyPr>
+          <a:lstStyle/>
+          <a:p>
+            <a:pPr algn="r"/>
+            <a:r>
+              <a:rPr sz="1300" b="1" i="0">
+                <a:solidFill>
+                  <a:srgbClr val="1A5C38"/>
+                </a:solidFill>
+              </a:rPr>
+              <a:t>$270 – $995</a:t>
+            </a:r>
+          </a:p>
+        </p:txBody>
+      </p:sp>
+      <p:sp>
+        <p:nvSpPr>
+          <p:cNvPr id="34" name="TextBox 33"/>
+          <p:cNvSpPr txBox="1"/>
+          <p:nvPr/>
+        </p:nvSpPr>
+        <p:spPr>
+          <a:xfrm>
+            <a:off x="5989320" y="4526280"/>
+            <a:ext cx="5852160" cy="347472"/>
+          </a:xfrm>
+          <a:prstGeom prst="rect">
+            <a:avLst/>
+          </a:prstGeom>
+          <a:noFill/>
+        </p:spPr>
+        <p:txBody>
+          <a:bodyPr wrap="square">
+            <a:spAutoFit/>
+          </a:bodyPr>
+          <a:lstStyle/>
+          <a:p>
+            <a:pPr algn="l"/>
+            <a:r>
+              <a:rPr sz="1000" b="0" i="1">
+                <a:solidFill>
+                  <a:srgbClr val="555555"/>
+                </a:solidFill>
+              </a:rPr>
+              <a:t>* Hunt staff transitioning to handoff roles = no additional hours if within scheduled shift</a:t>
+            </a:r>
+          </a:p>
+        </p:txBody>
+      </p:sp>
+      <p:sp>
+        <p:nvSpPr>
+          <p:cNvPr id="35" name="Rectangle 34"/>
+          <p:cNvSpPr/>
+          <p:nvPr/>
+        </p:nvSpPr>
+        <p:spPr>
+          <a:xfrm>
+            <a:off x="320040" y="5715000"/>
+            <a:ext cx="11521440" cy="777240"/>
+          </a:xfrm>
+          <a:prstGeom prst="rect">
+            <a:avLst/>
+          </a:prstGeom>
+          <a:solidFill>
+            <a:srgbClr val="E8F5E9"/>
+          </a:solidFill>
+          <a:ln>
+            <a:noFill/>
+          </a:ln>
+        </p:spPr>
+        <p:style>
+          <a:lnRef idx="1">
+            <a:schemeClr val="accent1"/>
+          </a:lnRef>
+          <a:fillRef idx="3">
+            <a:schemeClr val="accent1"/>
+          </a:fillRef>
+          <a:effectRef idx="2">
+            <a:schemeClr val="accent1"/>
+          </a:effectRef>
+          <a:fontRef idx="minor">
+            <a:schemeClr val="lt1"/>
+          </a:fontRef>
+        </p:style>
+        <p:txBody>
+          <a:bodyPr rtlCol="0" anchor="ctr"/>
+          <a:lstStyle/>
+          <a:p>
+            <a:pPr algn="ctr"/>
+          </a:p>
+        </p:txBody>
+      </p:sp>
+      <p:sp>
+        <p:nvSpPr>
+          <p:cNvPr id="36" name="TextBox 35"/>
+          <p:cNvSpPr txBox="1"/>
+          <p:nvPr/>
+        </p:nvSpPr>
+        <p:spPr>
+          <a:xfrm>
+            <a:off x="502920" y="5779008"/>
+            <a:ext cx="11155680" cy="594360"/>
+          </a:xfrm>
+          <a:prstGeom prst="rect">
+            <a:avLst/>
+          </a:prstGeom>
+          <a:noFill/>
+        </p:spPr>
+        <p:txBody>
+          <a:bodyPr wrap="square">
+            <a:spAutoFit/>
+          </a:bodyPr>
+          <a:lstStyle/>
+          <a:p>
+            <a:pPr algn="ctr"/>
+            <a:r>
+              <a:rPr sz="1200" b="0" i="0">
+                <a:solidFill>
+                  <a:srgbClr val="1A5C38"/>
+                </a:solidFill>
+              </a:rPr>
+              <a:t>Revenue Opportunity: Sponsor branding across the prize package, signage, and punch/bingo cards valued at $500–$2,000. Enhancement is potentially cost-neutral or better.</a:t>
+            </a:r>
+          </a:p>
+        </p:txBody>
+      </p:sp>
+    </p:spTree>
+  </p:cSld>
+  <p:clrMapOvr>
+    <a:masterClrMapping/>
+  </p:clrMapOvr>
+</p:sld>
+</file>
+
+<file path=ppt/slides/slide11.xml><?xml version="1.0" encoding="utf-8"?>
+<p:sld xmlns:a="http://schemas.openxmlformats.org/drawingml/2006/main" xmlns:p="http://schemas.openxmlformats.org/presentationml/2006/main" xmlns:r="http://schemas.openxmlformats.org/officeDocument/2006/relationships">
+  <p:cSld>
+    <p:spTree>
+      <p:nvGrpSpPr>
+        <p:cNvPr id="1" name=""/>
+        <p:cNvGrpSpPr/>
+        <p:nvPr/>
+      </p:nvGrpSpPr>
+      <p:grpSpPr/>
+      <p:sp>
+        <p:nvSpPr>
+          <p:cNvPr id="2" name="Rectangle 1"/>
+          <p:cNvSpPr/>
+          <p:nvPr/>
+        </p:nvSpPr>
+        <p:spPr>
+          <a:xfrm>
+            <a:off x="0" y="0"/>
+            <a:ext cx="12188952" cy="6858000"/>
+          </a:xfrm>
+          <a:prstGeom prst="rect">
+            <a:avLst/>
+          </a:prstGeom>
+          <a:solidFill>
+            <a:srgbClr val="1A5C38"/>
+          </a:solidFill>
+          <a:ln>
+            <a:noFill/>
+          </a:ln>
+        </p:spPr>
+        <p:style>
+          <a:lnRef idx="1">
+            <a:schemeClr val="accent1"/>
+          </a:lnRef>
+          <a:fillRef idx="3">
+            <a:schemeClr val="accent1"/>
+          </a:fillRef>
+          <a:effectRef idx="2">
+            <a:schemeClr val="accent1"/>
+          </a:effectRef>
+          <a:fontRef idx="minor">
+            <a:schemeClr val="lt1"/>
+          </a:fontRef>
+        </p:style>
+        <p:txBody>
+          <a:bodyPr rtlCol="0" anchor="ctr"/>
+          <a:lstStyle/>
+          <a:p>
+            <a:pPr algn="ctr"/>
+          </a:p>
+        </p:txBody>
+      </p:sp>
+      <p:sp>
+        <p:nvSpPr>
+          <p:cNvPr id="3" name="Rectangle 2"/>
+          <p:cNvSpPr/>
+          <p:nvPr/>
+        </p:nvSpPr>
+        <p:spPr>
+          <a:xfrm>
+            <a:off x="0" y="1325880"/>
+            <a:ext cx="12188952" cy="64008"/>
+          </a:xfrm>
+          <a:prstGeom prst="rect">
+            <a:avLst/>
+          </a:prstGeom>
+          <a:solidFill>
+            <a:srgbClr val="D4A017"/>
+          </a:solidFill>
+          <a:ln>
+            <a:noFill/>
+          </a:ln>
+        </p:spPr>
+        <p:style>
+          <a:lnRef idx="1">
+            <a:schemeClr val="accent1"/>
+          </a:lnRef>
+          <a:fillRef idx="3">
+            <a:schemeClr val="accent1"/>
+          </a:fillRef>
+          <a:effectRef idx="2">
+            <a:schemeClr val="accent1"/>
+          </a:effectRef>
+          <a:fontRef idx="minor">
+            <a:schemeClr val="lt1"/>
+          </a:fontRef>
+        </p:style>
+        <p:txBody>
+          <a:bodyPr rtlCol="0" anchor="ctr"/>
+          <a:lstStyle/>
+          <a:p>
+            <a:pPr algn="ctr"/>
+          </a:p>
+        </p:txBody>
+      </p:sp>
+      <p:sp>
+        <p:nvSpPr>
+          <p:cNvPr id="4" name="Rectangle 3"/>
+          <p:cNvSpPr/>
+          <p:nvPr/>
+        </p:nvSpPr>
+        <p:spPr>
+          <a:xfrm>
+            <a:off x="0" y="5486400"/>
+            <a:ext cx="12188952" cy="64008"/>
+          </a:xfrm>
+          <a:prstGeom prst="rect">
+            <a:avLst/>
+          </a:prstGeom>
+          <a:solidFill>
+            <a:srgbClr val="D4A017"/>
+          </a:solidFill>
+          <a:ln>
+            <a:noFill/>
+          </a:ln>
+        </p:spPr>
+        <p:style>
+          <a:lnRef idx="1">
+            <a:schemeClr val="accent1"/>
+          </a:lnRef>
+          <a:fillRef idx="3">
+            <a:schemeClr val="accent1"/>
+          </a:fillRef>
+          <a:effectRef idx="2">
+            <a:schemeClr val="accent1"/>
+          </a:effectRef>
+          <a:fontRef idx="minor">
+            <a:schemeClr val="lt1"/>
+          </a:fontRef>
+        </p:style>
+        <p:txBody>
+          <a:bodyPr rtlCol="0" anchor="ctr"/>
+          <a:lstStyle/>
+          <a:p>
+            <a:pPr algn="ctr"/>
+          </a:p>
+        </p:txBody>
+      </p:sp>
+      <p:sp>
+        <p:nvSpPr>
+          <p:cNvPr id="5" name="TextBox 4"/>
+          <p:cNvSpPr txBox="1"/>
+          <p:nvPr/>
+        </p:nvSpPr>
+        <p:spPr>
+          <a:xfrm>
+            <a:off x="457200" y="182880"/>
+            <a:ext cx="11247120" cy="1005840"/>
+          </a:xfrm>
+          <a:prstGeom prst="rect">
+            <a:avLst/>
+          </a:prstGeom>
+          <a:noFill/>
+        </p:spPr>
+        <p:txBody>
+          <a:bodyPr wrap="square">
+            <a:spAutoFit/>
+          </a:bodyPr>
+          <a:lstStyle/>
+          <a:p>
+            <a:pPr algn="ctr"/>
+            <a:r>
+              <a:rPr sz="3200" b="1" i="0">
+                <a:solidFill>
+                  <a:srgbClr val="FFFFFF"/>
+                </a:solidFill>
+              </a:rPr>
+              <a:t>Final Recommendation</a:t>
+            </a:r>
+          </a:p>
+        </p:txBody>
+      </p:sp>
+      <p:sp>
+        <p:nvSpPr>
+          <p:cNvPr id="6" name="TextBox 5"/>
+          <p:cNvSpPr txBox="1"/>
+          <p:nvPr/>
+        </p:nvSpPr>
+        <p:spPr>
+          <a:xfrm>
+            <a:off x="457200" y="1554480"/>
+            <a:ext cx="11247120" cy="548640"/>
+          </a:xfrm>
+          <a:prstGeom prst="rect">
+            <a:avLst/>
+          </a:prstGeom>
+          <a:noFill/>
+        </p:spPr>
+        <p:txBody>
+          <a:bodyPr wrap="square">
+            <a:spAutoFit/>
+          </a:bodyPr>
+          <a:lstStyle/>
+          <a:p>
+            <a:pPr algn="ctr"/>
+            <a:r>
+              <a:rPr sz="1600" b="0" i="1">
+                <a:solidFill>
+                  <a:srgbClr val="D4A017"/>
+                </a:solidFill>
+              </a:rPr>
+              <a:t>Implement two targeted, connected enhancements for Spring Into QC 2027:</a:t>
+            </a:r>
+          </a:p>
+        </p:txBody>
+      </p:sp>
+      <p:sp>
+        <p:nvSpPr>
+          <p:cNvPr id="7" name="Rectangle 6"/>
+          <p:cNvSpPr/>
+          <p:nvPr/>
+        </p:nvSpPr>
+        <p:spPr>
+          <a:xfrm>
+            <a:off x="365760" y="2240280"/>
+            <a:ext cx="5577840" cy="2834640"/>
+          </a:xfrm>
+          <a:prstGeom prst="rect">
+            <a:avLst/>
+          </a:prstGeom>
+          <a:solidFill>
+            <a:srgbClr val="226B45"/>
+          </a:solidFill>
+          <a:ln>
+            <a:noFill/>
+          </a:ln>
+        </p:spPr>
+        <p:style>
+          <a:lnRef idx="1">
+            <a:schemeClr val="accent1"/>
+          </a:lnRef>
+          <a:fillRef idx="3">
+            <a:schemeClr val="accent1"/>
+          </a:fillRef>
+          <a:effectRef idx="2">
+            <a:schemeClr val="accent1"/>
+          </a:effectRef>
+          <a:fontRef idx="minor">
+            <a:schemeClr val="lt1"/>
+          </a:fontRef>
+        </p:style>
+        <p:txBody>
+          <a:bodyPr rtlCol="0" anchor="ctr"/>
+          <a:lstStyle/>
+          <a:p>
+            <a:pPr algn="ctr"/>
+          </a:p>
+        </p:txBody>
+      </p:sp>
+      <p:sp>
+        <p:nvSpPr>
+          <p:cNvPr id="8" name="TextBox 7"/>
+          <p:cNvSpPr txBox="1"/>
+          <p:nvPr/>
+        </p:nvSpPr>
+        <p:spPr>
+          <a:xfrm>
+            <a:off x="502920" y="2331720"/>
+            <a:ext cx="502920" cy="548640"/>
+          </a:xfrm>
+          <a:prstGeom prst="rect">
+            <a:avLst/>
+          </a:prstGeom>
+          <a:noFill/>
+        </p:spPr>
+        <p:txBody>
+          <a:bodyPr wrap="square">
+            <a:spAutoFit/>
+          </a:bodyPr>
+          <a:lstStyle/>
+          <a:p>
+            <a:pPr algn="ctr"/>
+            <a:r>
+              <a:rPr sz="2800" b="1" i="0">
+                <a:solidFill>
+                  <a:srgbClr val="D4A017"/>
+                </a:solidFill>
+              </a:rPr>
+              <a:t>1</a:t>
+            </a:r>
+          </a:p>
+        </p:txBody>
+      </p:sp>
+      <p:sp>
+        <p:nvSpPr>
+          <p:cNvPr id="9" name="TextBox 8"/>
+          <p:cNvSpPr txBox="1"/>
+          <p:nvPr/>
+        </p:nvSpPr>
+        <p:spPr>
+          <a:xfrm>
+            <a:off x="1051560" y="2395728"/>
+            <a:ext cx="4754880" cy="457200"/>
+          </a:xfrm>
+          <a:prstGeom prst="rect">
+            <a:avLst/>
+          </a:prstGeom>
+          <a:noFill/>
+        </p:spPr>
+        <p:txBody>
+          <a:bodyPr wrap="square">
+            <a:spAutoFit/>
+          </a:bodyPr>
+          <a:lstStyle/>
+          <a:p>
+            <a:pPr algn="l"/>
+            <a:r>
+              <a:rPr sz="1700" b="1" i="0">
+                <a:solidFill>
+                  <a:srgbClr val="FFFFFF"/>
+                </a:solidFill>
+              </a:rPr>
+              <a:t>Redesign the Journey</a:t>
+            </a:r>
+          </a:p>
+        </p:txBody>
+      </p:sp>
+      <p:sp>
+        <p:nvSpPr>
+          <p:cNvPr id="10" name="TextBox 9"/>
+          <p:cNvSpPr txBox="1"/>
+          <p:nvPr/>
+        </p:nvSpPr>
+        <p:spPr>
+          <a:xfrm>
+            <a:off x="548640" y="2926080"/>
+            <a:ext cx="5257800" cy="2011680"/>
+          </a:xfrm>
+          <a:prstGeom prst="rect">
+            <a:avLst/>
+          </a:prstGeom>
+          <a:noFill/>
+        </p:spPr>
+        <p:txBody>
+          <a:bodyPr wrap="square">
+            <a:spAutoFit/>
+          </a:bodyPr>
+          <a:lstStyle/>
+          <a:p>
+            <a:pPr algn="l"/>
+            <a:r>
+              <a:rPr sz="1300" b="0" i="0">
+                <a:solidFill>
+                  <a:srgbClr val="F4F4F4"/>
+                </a:solidFill>
+              </a:rPr>
+              <a:t>Restructure the site into a guided circular path — controlled entrances, a central egg hunt, and periphery attractions on the return route — so every family passes every vendor and activity before the exit.</a:t>
+            </a:r>
+          </a:p>
+        </p:txBody>
+      </p:sp>
+      <p:sp>
+        <p:nvSpPr>
+          <p:cNvPr id="11" name="Rectangle 10"/>
+          <p:cNvSpPr/>
+          <p:nvPr/>
+        </p:nvSpPr>
+        <p:spPr>
+          <a:xfrm>
+            <a:off x="6172200" y="2240280"/>
+            <a:ext cx="5577840" cy="2834640"/>
+          </a:xfrm>
+          <a:prstGeom prst="rect">
+            <a:avLst/>
+          </a:prstGeom>
+          <a:solidFill>
+            <a:srgbClr val="226B45"/>
+          </a:solidFill>
+          <a:ln>
+            <a:noFill/>
+          </a:ln>
+        </p:spPr>
+        <p:style>
+          <a:lnRef idx="1">
+            <a:schemeClr val="accent1"/>
+          </a:lnRef>
+          <a:fillRef idx="3">
+            <a:schemeClr val="accent1"/>
+          </a:fillRef>
+          <a:effectRef idx="2">
+            <a:schemeClr val="accent1"/>
+          </a:effectRef>
+          <a:fontRef idx="minor">
+            <a:schemeClr val="lt1"/>
+          </a:fontRef>
+        </p:style>
+        <p:txBody>
+          <a:bodyPr rtlCol="0" anchor="ctr"/>
+          <a:lstStyle/>
+          <a:p>
+            <a:pPr algn="ctr"/>
+          </a:p>
+        </p:txBody>
+      </p:sp>
+      <p:sp>
+        <p:nvSpPr>
+          <p:cNvPr id="12" name="TextBox 11"/>
+          <p:cNvSpPr txBox="1"/>
+          <p:nvPr/>
+        </p:nvSpPr>
+        <p:spPr>
+          <a:xfrm>
+            <a:off x="6309360" y="2331720"/>
+            <a:ext cx="502920" cy="548640"/>
+          </a:xfrm>
+          <a:prstGeom prst="rect">
+            <a:avLst/>
+          </a:prstGeom>
+          <a:noFill/>
+        </p:spPr>
+        <p:txBody>
+          <a:bodyPr wrap="square">
+            <a:spAutoFit/>
+          </a:bodyPr>
+          <a:lstStyle/>
+          <a:p>
+            <a:pPr algn="ctr"/>
+            <a:r>
+              <a:rPr sz="2800" b="1" i="0">
+                <a:solidFill>
+                  <a:srgbClr val="D4A017"/>
+                </a:solidFill>
+              </a:rPr>
+              <a:t>2</a:t>
+            </a:r>
+          </a:p>
+        </p:txBody>
+      </p:sp>
+      <p:sp>
+        <p:nvSpPr>
+          <p:cNvPr id="13" name="TextBox 12"/>
+          <p:cNvSpPr txBox="1"/>
+          <p:nvPr/>
+        </p:nvSpPr>
+        <p:spPr>
+          <a:xfrm>
+            <a:off x="6858000" y="2395728"/>
+            <a:ext cx="4754880" cy="457200"/>
+          </a:xfrm>
+          <a:prstGeom prst="rect">
+            <a:avLst/>
+          </a:prstGeom>
+          <a:noFill/>
+        </p:spPr>
+        <p:txBody>
+          <a:bodyPr wrap="square">
+            <a:spAutoFit/>
+          </a:bodyPr>
+          <a:lstStyle/>
+          <a:p>
+            <a:pPr algn="l"/>
+            <a:r>
+              <a:rPr sz="1700" b="1" i="0">
+                <a:solidFill>
+                  <a:srgbClr val="FFFFFF"/>
+                </a:solidFill>
+              </a:rPr>
+              <a:t>Gamify Retention</a:t>
+            </a:r>
+          </a:p>
+        </p:txBody>
+      </p:sp>
+      <p:sp>
+        <p:nvSpPr>
+          <p:cNvPr id="14" name="TextBox 13"/>
+          <p:cNvSpPr txBox="1"/>
+          <p:nvPr/>
+        </p:nvSpPr>
+        <p:spPr>
+          <a:xfrm>
+            <a:off x="6355080" y="2926080"/>
+            <a:ext cx="5257800" cy="2011680"/>
+          </a:xfrm>
+          <a:prstGeom prst="rect">
+            <a:avLst/>
+          </a:prstGeom>
+          <a:noFill/>
+        </p:spPr>
+        <p:txBody>
+          <a:bodyPr wrap="square">
+            <a:spAutoFit/>
+          </a:bodyPr>
+          <a:lstStyle/>
+          <a:p>
+            <a:pPr algn="l"/>
+            <a:r>
+              <a:rPr sz="1300" b="0" i="0">
+                <a:solidFill>
+                  <a:srgbClr val="F4F4F4"/>
+                </a:solidFill>
+              </a:rPr>
+              <a:t>Expand the existing raffle into a layered system: an early-announced Grand Prize Drawing, a combined punch/bingo card, hidden golden eggs, and a race bracket bonus — all built on what's already running.</a:t>
+            </a:r>
+          </a:p>
+        </p:txBody>
+      </p:sp>
+      <p:sp>
+        <p:nvSpPr>
+          <p:cNvPr id="15" name="TextBox 14"/>
+          <p:cNvSpPr txBox="1"/>
+          <p:nvPr/>
+        </p:nvSpPr>
+        <p:spPr>
+          <a:xfrm>
+            <a:off x="365760" y="5074920"/>
+            <a:ext cx="11430000" cy="320040"/>
+          </a:xfrm>
+          <a:prstGeom prst="rect">
+            <a:avLst/>
+          </a:prstGeom>
+          <a:noFill/>
+        </p:spPr>
+        <p:txBody>
+          <a:bodyPr wrap="square">
+            <a:spAutoFit/>
+          </a:bodyPr>
+          <a:lstStyle/>
+          <a:p>
+            <a:pPr algn="ctr"/>
+            <a:r>
+              <a:rPr sz="1100" b="0" i="1">
+                <a:solidFill>
+                  <a:srgbClr val="D4A017"/>
+                </a:solidFill>
+              </a:rPr>
+              <a:t>Looking ahead: a formalized family feedback loop is a natural next step for future seasons.</a:t>
+            </a:r>
+          </a:p>
+        </p:txBody>
+      </p:sp>
+      <p:sp>
+        <p:nvSpPr>
+          <p:cNvPr id="16" name="Rectangle 15"/>
+          <p:cNvSpPr/>
+          <p:nvPr/>
+        </p:nvSpPr>
+        <p:spPr>
+          <a:xfrm>
+            <a:off x="365760" y="5394960"/>
+            <a:ext cx="11430000" cy="73152"/>
+          </a:xfrm>
+          <a:prstGeom prst="rect">
+            <a:avLst/>
+          </a:prstGeom>
+          <a:solidFill>
+            <a:srgbClr val="226B45"/>
+          </a:solidFill>
+          <a:ln>
+            <a:noFill/>
+          </a:ln>
+        </p:spPr>
+        <p:style>
+          <a:lnRef idx="1">
+            <a:schemeClr val="accent1"/>
+          </a:lnRef>
+          <a:fillRef idx="3">
+            <a:schemeClr val="accent1"/>
+          </a:fillRef>
+          <a:effectRef idx="2">
+            <a:schemeClr val="accent1"/>
+          </a:effectRef>
+          <a:fontRef idx="minor">
+            <a:schemeClr val="lt1"/>
+          </a:fontRef>
+        </p:style>
+        <p:txBody>
+          <a:bodyPr rtlCol="0" anchor="ctr"/>
+          <a:lstStyle/>
+          <a:p>
+            <a:pPr algn="ctr"/>
+          </a:p>
+        </p:txBody>
+      </p:sp>
+      <p:sp>
+        <p:nvSpPr>
+          <p:cNvPr id="17" name="TextBox 16"/>
+          <p:cNvSpPr txBox="1"/>
+          <p:nvPr/>
+        </p:nvSpPr>
+        <p:spPr>
+          <a:xfrm>
+            <a:off x="365760" y="5577840"/>
+            <a:ext cx="2011680" cy="411480"/>
+          </a:xfrm>
+          <a:prstGeom prst="rect">
+            <a:avLst/>
+          </a:prstGeom>
+          <a:noFill/>
+        </p:spPr>
+        <p:txBody>
+          <a:bodyPr wrap="square">
+            <a:spAutoFit/>
+          </a:bodyPr>
+          <a:lstStyle/>
+          <a:p>
+            <a:pPr algn="l"/>
+            <a:r>
+              <a:rPr sz="1100" b="1" i="0">
+                <a:solidFill>
+                  <a:srgbClr val="D4A017"/>
+                </a:solidFill>
+              </a:rPr>
+              <a:t>SUCCESS METRICS</a:t>
+            </a:r>
+          </a:p>
+        </p:txBody>
+      </p:sp>
+      <p:sp>
+        <p:nvSpPr>
+          <p:cNvPr id="18" name="TextBox 17"/>
+          <p:cNvSpPr txBox="1"/>
+          <p:nvPr/>
+        </p:nvSpPr>
+        <p:spPr>
+          <a:xfrm>
+            <a:off x="2468880" y="5559552"/>
+            <a:ext cx="2194560" cy="566928"/>
+          </a:xfrm>
+          <a:prstGeom prst="rect">
+            <a:avLst/>
+          </a:prstGeom>
+          <a:noFill/>
+        </p:spPr>
+        <p:txBody>
+          <a:bodyPr wrap="square">
+            <a:spAutoFit/>
+          </a:bodyPr>
+          <a:lstStyle/>
+          <a:p>
+            <a:pPr algn="ctr"/>
+            <a:r>
+              <a:rPr sz="1100" b="0" i="0">
+                <a:solidFill>
+                  <a:srgbClr val="FFFFFF"/>
+                </a:solidFill>
+              </a:rPr>
+              <a:t>Dwell time
+(target: +45 min)</a:t>
+            </a:r>
+          </a:p>
+        </p:txBody>
+      </p:sp>
+      <p:sp>
+        <p:nvSpPr>
+          <p:cNvPr id="19" name="TextBox 18"/>
+          <p:cNvSpPr txBox="1"/>
+          <p:nvPr/>
+        </p:nvSpPr>
+        <p:spPr>
+          <a:xfrm>
+            <a:off x="4800600" y="5559552"/>
+            <a:ext cx="2194560" cy="566928"/>
+          </a:xfrm>
+          <a:prstGeom prst="rect">
+            <a:avLst/>
+          </a:prstGeom>
+          <a:noFill/>
+        </p:spPr>
+        <p:txBody>
+          <a:bodyPr wrap="square">
+            <a:spAutoFit/>
+          </a:bodyPr>
+          <a:lstStyle/>
+          <a:p>
+            <a:pPr algn="ctr"/>
+            <a:r>
+              <a:rPr sz="1100" b="0" i="0">
+                <a:solidFill>
+                  <a:srgbClr val="FFFFFF"/>
+                </a:solidFill>
+              </a:rPr>
+              <a:t>Card completion &amp;
+raffle submission rate</a:t>
+            </a:r>
+          </a:p>
+        </p:txBody>
+      </p:sp>
+      <p:sp>
+        <p:nvSpPr>
+          <p:cNvPr id="20" name="TextBox 19"/>
+          <p:cNvSpPr txBox="1"/>
+          <p:nvPr/>
+        </p:nvSpPr>
+        <p:spPr>
+          <a:xfrm>
+            <a:off x="7132320" y="5559552"/>
+            <a:ext cx="2194560" cy="566928"/>
+          </a:xfrm>
+          <a:prstGeom prst="rect">
+            <a:avLst/>
+          </a:prstGeom>
+          <a:noFill/>
+        </p:spPr>
+        <p:txBody>
+          <a:bodyPr wrap="square">
+            <a:spAutoFit/>
+          </a:bodyPr>
+          <a:lstStyle/>
+          <a:p>
+            <a:pPr algn="ctr"/>
+            <a:r>
+              <a:rPr sz="1100" b="0" i="0">
+                <a:solidFill>
+                  <a:srgbClr val="FFFFFF"/>
+                </a:solidFill>
+              </a:rPr>
+              <a:t>Vendor satisfaction
+survey scores</a:t>
+            </a:r>
+          </a:p>
+        </p:txBody>
+      </p:sp>
+      <p:sp>
+        <p:nvSpPr>
+          <p:cNvPr id="21" name="TextBox 20"/>
+          <p:cNvSpPr txBox="1"/>
+          <p:nvPr/>
+        </p:nvSpPr>
+        <p:spPr>
+          <a:xfrm>
+            <a:off x="9464040" y="5559552"/>
+            <a:ext cx="2194560" cy="566928"/>
+          </a:xfrm>
+          <a:prstGeom prst="rect">
+            <a:avLst/>
+          </a:prstGeom>
+          <a:noFill/>
+        </p:spPr>
+        <p:txBody>
+          <a:bodyPr wrap="square">
+            <a:spAutoFit/>
+          </a:bodyPr>
+          <a:lstStyle/>
+          <a:p>
+            <a:pPr algn="ctr"/>
+            <a:r>
+              <a:rPr sz="1100" b="0" i="0">
+                <a:solidFill>
+                  <a:srgbClr val="FFFFFF"/>
+                </a:solidFill>
+              </a:rPr>
+              <a:t>Sponsor revenue
+generated</a:t>
+            </a:r>
+          </a:p>
+        </p:txBody>
+      </p:sp>
+    </p:spTree>
+  </p:cSld>
+  <p:clrMapOvr>
+    <a:masterClrMapping/>
+  </p:clrMapOvr>
+</p:sld>
+</file>
+
 <file path=ppt/slides/slide2.xml><?xml version="1.0" encoding="utf-8"?>
 <p:sld xmlns:a="http://schemas.openxmlformats.org/drawingml/2006/main" xmlns:p="http://schemas.openxmlformats.org/presentationml/2006/main" xmlns:r="http://schemas.openxmlformats.org/officeDocument/2006/relationships">
   <p:cSld>
@@ -5113,6 +7299,21 @@
                   <a:srgbClr val="2B2B2B"/>
                 </a:solidFill>
               </a:rPr>
+              <a:t>• 3,500+ attendees at the most recent Spring Into QC</a:t>
+            </a:r>
+          </a:p>
+          <a:p>
+            <a:pPr>
+              <a:spcAft>
+                <a:spcPts val="500"/>
+              </a:spcAft>
+            </a:pPr>
+            <a:r>
+              <a:rPr sz="1300">
+                <a:solidFill>
+                  <a:srgbClr val="2B2B2B"/>
+                </a:solidFill>
+              </a:rPr>
               <a:t>• Families arrive with one goal: the egg hunt</a:t>
             </a:r>
           </a:p>
@@ -6750,7 +8951,7 @@
         <p:spPr>
           <a:xfrm>
             <a:off x="320040" y="1828800"/>
-            <a:ext cx="5486400" cy="4434840"/>
+            <a:ext cx="5486400" cy="4023360"/>
           </a:xfrm>
           <a:prstGeom prst="rect">
             <a:avLst/>
@@ -7257,7 +9458,7 @@
                   <a:srgbClr val="1A5C38"/>
                 </a:solidFill>
               </a:rPr>
-              <a:t>Community Demographics</a:t>
+              <a:t>Attendance &amp; Vendors</a:t>
             </a:r>
           </a:p>
         </p:txBody>
@@ -7291,7 +9492,7 @@
                   <a:srgbClr val="2B2B2B"/>
                 </a:solidFill>
               </a:rPr>
-              <a:t>~95K residents · 6.2% annual growth · $141,978 median HH income · avg HH size 3.41</a:t>
+              <a:t>3,500+ attendees · vendor booths 10'x10' · fees $75–$125 per booth</a:t>
             </a:r>
           </a:p>
         </p:txBody>
@@ -7368,7 +9569,7 @@
                   <a:srgbClr val="1A5C38"/>
                 </a:solidFill>
               </a:rPr>
-              <a:t>Town Strategic Vision</a:t>
+              <a:t>Community Demographics</a:t>
             </a:r>
           </a:p>
         </p:txBody>
@@ -7402,7 +9603,7 @@
                   <a:srgbClr val="2B2B2B"/>
                 </a:solidFill>
               </a:rPr>
-              <a:t>"Convenience of the city, comfort of the country" · FY26 priority: Quality of Lifestyle</a:t>
+              <a:t>~95K residents · 6.2% annual growth · $141,978 median HH income · avg HH size ~3.4</a:t>
             </a:r>
           </a:p>
         </p:txBody>
@@ -7479,7 +9680,7 @@
                   <a:srgbClr val="1A5C38"/>
                 </a:solidFill>
               </a:rPr>
-              <a:t>Vendor Contact</a:t>
+              <a:t>Town Strategic Vision</a:t>
             </a:r>
           </a:p>
         </p:txBody>
@@ -7513,7 +9714,7 @@
                   <a:srgbClr val="2B2B2B"/>
                 </a:solidFill>
               </a:rPr>
-              <a:t>McKinna Evans · mckinna.evans@queencreekaz.gov · 480-358-3723</a:t>
+              <a:t>"Convenience of the city, comfort of the country" · FY26 priority: Quality of Lifestyle</a:t>
             </a:r>
           </a:p>
         </p:txBody>
@@ -7563,7 +9764,229 @@
       </p:sp>
       <p:sp>
         <p:nvSpPr>
-          <p:cNvPr id="31" name="Rectangle 30"/>
+          <p:cNvPr id="31" name="TextBox 30"/>
+          <p:cNvSpPr txBox="1"/>
+          <p:nvPr/>
+        </p:nvSpPr>
+        <p:spPr>
+          <a:xfrm>
+            <a:off x="457200" y="4626864"/>
+            <a:ext cx="1645920" cy="256032"/>
+          </a:xfrm>
+          <a:prstGeom prst="rect">
+            <a:avLst/>
+          </a:prstGeom>
+          <a:noFill/>
+        </p:spPr>
+        <p:txBody>
+          <a:bodyPr wrap="square">
+            <a:spAutoFit/>
+          </a:bodyPr>
+          <a:lstStyle/>
+          <a:p>
+            <a:pPr algn="l"/>
+            <a:r>
+              <a:rPr sz="1000" b="1" i="0">
+                <a:solidFill>
+                  <a:srgbClr val="1A5C38"/>
+                </a:solidFill>
+              </a:rPr>
+              <a:t>Town Survey Precedent</a:t>
+            </a:r>
+          </a:p>
+        </p:txBody>
+      </p:sp>
+      <p:sp>
+        <p:nvSpPr>
+          <p:cNvPr id="32" name="TextBox 31"/>
+          <p:cNvSpPr txBox="1"/>
+          <p:nvPr/>
+        </p:nvSpPr>
+        <p:spPr>
+          <a:xfrm>
+            <a:off x="2148840" y="4626864"/>
+            <a:ext cx="3520440" cy="329184"/>
+          </a:xfrm>
+          <a:prstGeom prst="rect">
+            <a:avLst/>
+          </a:prstGeom>
+          <a:noFill/>
+        </p:spPr>
+        <p:txBody>
+          <a:bodyPr wrap="square">
+            <a:spAutoFit/>
+          </a:bodyPr>
+          <a:lstStyle/>
+          <a:p>
+            <a:pPr algn="l"/>
+            <a:r>
+              <a:rPr sz="1000" b="0" i="0">
+                <a:solidFill>
+                  <a:srgbClr val="2B2B2B"/>
+                </a:solidFill>
+              </a:rPr>
+              <a:t>Town already runs resident surveys via QR code / online link (2025 Citizen Survey)</a:t>
+            </a:r>
+          </a:p>
+        </p:txBody>
+      </p:sp>
+      <p:sp>
+        <p:nvSpPr>
+          <p:cNvPr id="33" name="Rectangle 32"/>
+          <p:cNvSpPr/>
+          <p:nvPr/>
+        </p:nvSpPr>
+        <p:spPr>
+          <a:xfrm>
+            <a:off x="411480" y="4974336"/>
+            <a:ext cx="5303520" cy="18288"/>
+          </a:xfrm>
+          <a:prstGeom prst="rect">
+            <a:avLst/>
+          </a:prstGeom>
+          <a:solidFill>
+            <a:srgbClr val="F4F4F4"/>
+          </a:solidFill>
+          <a:ln>
+            <a:noFill/>
+          </a:ln>
+        </p:spPr>
+        <p:style>
+          <a:lnRef idx="1">
+            <a:schemeClr val="accent1"/>
+          </a:lnRef>
+          <a:fillRef idx="3">
+            <a:schemeClr val="accent1"/>
+          </a:fillRef>
+          <a:effectRef idx="2">
+            <a:schemeClr val="accent1"/>
+          </a:effectRef>
+          <a:fontRef idx="minor">
+            <a:schemeClr val="lt1"/>
+          </a:fontRef>
+        </p:style>
+        <p:txBody>
+          <a:bodyPr rtlCol="0" anchor="ctr"/>
+          <a:lstStyle/>
+          <a:p>
+            <a:pPr algn="ctr"/>
+          </a:p>
+        </p:txBody>
+      </p:sp>
+      <p:sp>
+        <p:nvSpPr>
+          <p:cNvPr id="34" name="TextBox 33"/>
+          <p:cNvSpPr txBox="1"/>
+          <p:nvPr/>
+        </p:nvSpPr>
+        <p:spPr>
+          <a:xfrm>
+            <a:off x="457200" y="5010912"/>
+            <a:ext cx="1645920" cy="256032"/>
+          </a:xfrm>
+          <a:prstGeom prst="rect">
+            <a:avLst/>
+          </a:prstGeom>
+          <a:noFill/>
+        </p:spPr>
+        <p:txBody>
+          <a:bodyPr wrap="square">
+            <a:spAutoFit/>
+          </a:bodyPr>
+          <a:lstStyle/>
+          <a:p>
+            <a:pPr algn="l"/>
+            <a:r>
+              <a:rPr sz="1000" b="1" i="0">
+                <a:solidFill>
+                  <a:srgbClr val="1A5C38"/>
+                </a:solidFill>
+              </a:rPr>
+              <a:t>Vendor/Sponsor Contact</a:t>
+            </a:r>
+          </a:p>
+        </p:txBody>
+      </p:sp>
+      <p:sp>
+        <p:nvSpPr>
+          <p:cNvPr id="35" name="TextBox 34"/>
+          <p:cNvSpPr txBox="1"/>
+          <p:nvPr/>
+        </p:nvSpPr>
+        <p:spPr>
+          <a:xfrm>
+            <a:off x="2148840" y="5010912"/>
+            <a:ext cx="3520440" cy="329184"/>
+          </a:xfrm>
+          <a:prstGeom prst="rect">
+            <a:avLst/>
+          </a:prstGeom>
+          <a:noFill/>
+        </p:spPr>
+        <p:txBody>
+          <a:bodyPr wrap="square">
+            <a:spAutoFit/>
+          </a:bodyPr>
+          <a:lstStyle/>
+          <a:p>
+            <a:pPr algn="l"/>
+            <a:r>
+              <a:rPr sz="1000" b="0" i="0">
+                <a:solidFill>
+                  <a:srgbClr val="2B2B2B"/>
+                </a:solidFill>
+              </a:rPr>
+              <a:t>Erica Perez · Erica.Perez@QueenCreek.org · 480-358-3719</a:t>
+            </a:r>
+          </a:p>
+        </p:txBody>
+      </p:sp>
+      <p:sp>
+        <p:nvSpPr>
+          <p:cNvPr id="36" name="Rectangle 35"/>
+          <p:cNvSpPr/>
+          <p:nvPr/>
+        </p:nvSpPr>
+        <p:spPr>
+          <a:xfrm>
+            <a:off x="411480" y="5358383"/>
+            <a:ext cx="5303520" cy="18288"/>
+          </a:xfrm>
+          <a:prstGeom prst="rect">
+            <a:avLst/>
+          </a:prstGeom>
+          <a:solidFill>
+            <a:srgbClr val="F4F4F4"/>
+          </a:solidFill>
+          <a:ln>
+            <a:noFill/>
+          </a:ln>
+        </p:spPr>
+        <p:style>
+          <a:lnRef idx="1">
+            <a:schemeClr val="accent1"/>
+          </a:lnRef>
+          <a:fillRef idx="3">
+            <a:schemeClr val="accent1"/>
+          </a:fillRef>
+          <a:effectRef idx="2">
+            <a:schemeClr val="accent1"/>
+          </a:effectRef>
+          <a:fontRef idx="minor">
+            <a:schemeClr val="lt1"/>
+          </a:fontRef>
+        </p:style>
+        <p:txBody>
+          <a:bodyPr rtlCol="0" anchor="ctr"/>
+          <a:lstStyle/>
+          <a:p>
+            <a:pPr algn="ctr"/>
+          </a:p>
+        </p:txBody>
+      </p:sp>
+      <p:sp>
+        <p:nvSpPr>
+          <p:cNvPr id="37" name="Rectangle 36"/>
           <p:cNvSpPr/>
           <p:nvPr/>
         </p:nvSpPr>
@@ -7606,7 +10029,7 @@
       </p:sp>
       <p:sp>
         <p:nvSpPr>
-          <p:cNvPr id="32" name="TextBox 31"/>
+          <p:cNvPr id="38" name="TextBox 37"/>
           <p:cNvSpPr txBox="1"/>
           <p:nvPr/>
         </p:nvSpPr>
@@ -7640,14 +10063,14 @@
       </p:sp>
       <p:sp>
         <p:nvSpPr>
-          <p:cNvPr id="33" name="Rectangle 32"/>
+          <p:cNvPr id="39" name="Rectangle 38"/>
           <p:cNvSpPr/>
           <p:nvPr/>
         </p:nvSpPr>
         <p:spPr>
           <a:xfrm>
             <a:off x="6080760" y="1828800"/>
-            <a:ext cx="5806440" cy="4434840"/>
+            <a:ext cx="5806440" cy="4023360"/>
           </a:xfrm>
           <a:prstGeom prst="rect">
             <a:avLst/>
@@ -7683,7 +10106,7 @@
       </p:sp>
       <p:sp>
         <p:nvSpPr>
-          <p:cNvPr id="34" name="TextBox 33"/>
+          <p:cNvPr id="40" name="TextBox 39"/>
           <p:cNvSpPr txBox="1"/>
           <p:nvPr/>
         </p:nvSpPr>
@@ -7717,7 +10140,7 @@
       </p:sp>
       <p:sp>
         <p:nvSpPr>
-          <p:cNvPr id="35" name="TextBox 34"/>
+          <p:cNvPr id="41" name="TextBox 40"/>
           <p:cNvSpPr txBox="1"/>
           <p:nvPr/>
         </p:nvSpPr>
@@ -7751,7 +10174,7 @@
       </p:sp>
       <p:sp>
         <p:nvSpPr>
-          <p:cNvPr id="36" name="Rectangle 35"/>
+          <p:cNvPr id="42" name="Rectangle 41"/>
           <p:cNvSpPr/>
           <p:nvPr/>
         </p:nvSpPr>
@@ -7794,7 +10217,7 @@
       </p:sp>
       <p:sp>
         <p:nvSpPr>
-          <p:cNvPr id="37" name="TextBox 36"/>
+          <p:cNvPr id="43" name="TextBox 42"/>
           <p:cNvSpPr txBox="1"/>
           <p:nvPr/>
         </p:nvSpPr>
@@ -7828,7 +10251,7 @@
       </p:sp>
       <p:sp>
         <p:nvSpPr>
-          <p:cNvPr id="38" name="TextBox 37"/>
+          <p:cNvPr id="44" name="TextBox 43"/>
           <p:cNvSpPr txBox="1"/>
           <p:nvPr/>
         </p:nvSpPr>
@@ -7862,7 +10285,7 @@
       </p:sp>
       <p:sp>
         <p:nvSpPr>
-          <p:cNvPr id="39" name="Rectangle 38"/>
+          <p:cNvPr id="45" name="Rectangle 44"/>
           <p:cNvSpPr/>
           <p:nvPr/>
         </p:nvSpPr>
@@ -7905,7 +10328,7 @@
       </p:sp>
       <p:sp>
         <p:nvSpPr>
-          <p:cNvPr id="40" name="TextBox 39"/>
+          <p:cNvPr id="46" name="TextBox 45"/>
           <p:cNvSpPr txBox="1"/>
           <p:nvPr/>
         </p:nvSpPr>
@@ -7939,7 +10362,7 @@
       </p:sp>
       <p:sp>
         <p:nvSpPr>
-          <p:cNvPr id="41" name="TextBox 40"/>
+          <p:cNvPr id="47" name="TextBox 46"/>
           <p:cNvSpPr txBox="1"/>
           <p:nvPr/>
         </p:nvSpPr>
@@ -7973,7 +10396,7 @@
       </p:sp>
       <p:sp>
         <p:nvSpPr>
-          <p:cNvPr id="42" name="Rectangle 41"/>
+          <p:cNvPr id="48" name="Rectangle 47"/>
           <p:cNvSpPr/>
           <p:nvPr/>
         </p:nvSpPr>
@@ -8016,7 +10439,7 @@
       </p:sp>
       <p:sp>
         <p:nvSpPr>
-          <p:cNvPr id="43" name="TextBox 42"/>
+          <p:cNvPr id="49" name="TextBox 48"/>
           <p:cNvSpPr txBox="1"/>
           <p:nvPr/>
         </p:nvSpPr>
@@ -8050,7 +10473,7 @@
       </p:sp>
       <p:sp>
         <p:nvSpPr>
-          <p:cNvPr id="44" name="TextBox 43"/>
+          <p:cNvPr id="50" name="TextBox 49"/>
           <p:cNvSpPr txBox="1"/>
           <p:nvPr/>
         </p:nvSpPr>
@@ -8084,7 +10507,7 @@
       </p:sp>
       <p:sp>
         <p:nvSpPr>
-          <p:cNvPr id="45" name="Rectangle 44"/>
+          <p:cNvPr id="51" name="Rectangle 50"/>
           <p:cNvSpPr/>
           <p:nvPr/>
         </p:nvSpPr>
@@ -8127,7 +10550,7 @@
       </p:sp>
       <p:sp>
         <p:nvSpPr>
-          <p:cNvPr id="46" name="TextBox 45"/>
+          <p:cNvPr id="52" name="TextBox 51"/>
           <p:cNvSpPr txBox="1"/>
           <p:nvPr/>
         </p:nvSpPr>
@@ -8161,7 +10584,7 @@
       </p:sp>
       <p:sp>
         <p:nvSpPr>
-          <p:cNvPr id="47" name="TextBox 46"/>
+          <p:cNvPr id="53" name="TextBox 52"/>
           <p:cNvSpPr txBox="1"/>
           <p:nvPr/>
         </p:nvSpPr>
@@ -8195,7 +10618,7 @@
       </p:sp>
       <p:sp>
         <p:nvSpPr>
-          <p:cNvPr id="48" name="Rectangle 47"/>
+          <p:cNvPr id="54" name="Rectangle 53"/>
           <p:cNvSpPr/>
           <p:nvPr/>
         </p:nvSpPr>
@@ -8238,7 +10661,7 @@
       </p:sp>
       <p:sp>
         <p:nvSpPr>
-          <p:cNvPr id="49" name="TextBox 48"/>
+          <p:cNvPr id="55" name="TextBox 54"/>
           <p:cNvSpPr txBox="1"/>
           <p:nvPr/>
         </p:nvSpPr>
@@ -8272,7 +10695,7 @@
       </p:sp>
       <p:sp>
         <p:nvSpPr>
-          <p:cNvPr id="50" name="TextBox 49"/>
+          <p:cNvPr id="56" name="TextBox 55"/>
           <p:cNvSpPr txBox="1"/>
           <p:nvPr/>
         </p:nvSpPr>
@@ -8306,7 +10729,7 @@
       </p:sp>
       <p:sp>
         <p:nvSpPr>
-          <p:cNvPr id="51" name="Rectangle 50"/>
+          <p:cNvPr id="57" name="Rectangle 56"/>
           <p:cNvSpPr/>
           <p:nvPr/>
         </p:nvSpPr>
@@ -8349,7 +10772,84 @@
       </p:sp>
       <p:sp>
         <p:nvSpPr>
-          <p:cNvPr id="52" name="Rectangle 51"/>
+          <p:cNvPr id="58" name="Rectangle 57"/>
+          <p:cNvSpPr/>
+          <p:nvPr/>
+        </p:nvSpPr>
+        <p:spPr>
+          <a:xfrm>
+            <a:off x="320040" y="5925312"/>
+            <a:ext cx="11521440" cy="402336"/>
+          </a:xfrm>
+          <a:prstGeom prst="rect">
+            <a:avLst/>
+          </a:prstGeom>
+          <a:solidFill>
+            <a:srgbClr val="FDF0C8"/>
+          </a:solidFill>
+          <a:ln>
+            <a:noFill/>
+          </a:ln>
+        </p:spPr>
+        <p:style>
+          <a:lnRef idx="1">
+            <a:schemeClr val="accent1"/>
+          </a:lnRef>
+          <a:fillRef idx="3">
+            <a:schemeClr val="accent1"/>
+          </a:fillRef>
+          <a:effectRef idx="2">
+            <a:schemeClr val="accent1"/>
+          </a:effectRef>
+          <a:fontRef idx="minor">
+            <a:schemeClr val="lt1"/>
+          </a:fontRef>
+        </p:style>
+        <p:txBody>
+          <a:bodyPr rtlCol="0" anchor="ctr"/>
+          <a:lstStyle/>
+          <a:p>
+            <a:pPr algn="ctr"/>
+          </a:p>
+        </p:txBody>
+      </p:sp>
+      <p:sp>
+        <p:nvSpPr>
+          <p:cNvPr id="59" name="TextBox 58"/>
+          <p:cNvSpPr txBox="1"/>
+          <p:nvPr/>
+        </p:nvSpPr>
+        <p:spPr>
+          <a:xfrm>
+            <a:off x="457200" y="5971032"/>
+            <a:ext cx="11247120" cy="329184"/>
+          </a:xfrm>
+          <a:prstGeom prst="rect">
+            <a:avLst/>
+          </a:prstGeom>
+          <a:noFill/>
+        </p:spPr>
+        <p:txBody>
+          <a:bodyPr wrap="square">
+            <a:spAutoFit/>
+          </a:bodyPr>
+          <a:lstStyle/>
+          <a:p>
+            <a:pPr algn="ctr"/>
+            <a:r>
+              <a:rPr sz="1000" b="1" i="1">
+                <a:solidFill>
+                  <a:srgbClr val="7A5500"/>
+                </a:solidFill>
+              </a:rPr>
+              <a:t>THE DATA GAP: We don't yet know the specific reasons families leave early. Beyond this proposal, a natural next step is a formalized feedback mechanism — built on the QR/online survey method the Town already uses for resident surveys.</a:t>
+            </a:r>
+          </a:p>
+        </p:txBody>
+      </p:sp>
+      <p:sp>
+        <p:nvSpPr>
+          <p:cNvPr id="60" name="Rectangle 59"/>
           <p:cNvSpPr/>
           <p:nvPr/>
         </p:nvSpPr>
@@ -8392,7 +10892,7 @@
       </p:sp>
       <p:sp>
         <p:nvSpPr>
-          <p:cNvPr id="53" name="TextBox 52"/>
+          <p:cNvPr id="61" name="TextBox 60"/>
           <p:cNvSpPr txBox="1"/>
           <p:nvPr/>
         </p:nvSpPr>
@@ -8419,7 +10919,7 @@
                   <a:srgbClr val="1A5C38"/>
                 </a:solidFill>
               </a:rPr>
-              <a:t>Sources: queencreekaz.gov/springintoQC  ·  Queen Creek Independent  ·  Queen Creek Chamber of Commerce  ·  Hoodline (2025)  ·  worldpopulationreview.com  ·  queencreekaz.gov/government (Strategic Plan)  ·  U.S. Census / uscitydata.com</a:t>
+              <a:t>Sources: queencreekaz.gov/springintoQC  ·  Queen Creek Independent  ·  Queen Creek Chamber of Commerce  ·  Hoodline (2025)  ·  worldpopulationreview.com  ·  datausa.io  ·  census.gov/quickfacts  ·  queencreekaz.gov/government (Strategic Plan)  ·  queencreekaz.gov/FrontierFamilyPark</a:t>
             </a:r>
           </a:p>
         </p:txBody>
@@ -8634,7 +11134,7 @@
                   <a:srgbClr val="D4A017"/>
                 </a:solidFill>
               </a:rPr>
-              <a:t>Two Connected Fixes — Low Cost, High Impact</a:t>
+              <a:t>Two Connected Pillars — Low Cost, High Impact</a:t>
             </a:r>
           </a:p>
         </p:txBody>
@@ -8725,7 +11225,84 @@
         <p:spPr>
           <a:xfrm>
             <a:off x="320040" y="2286000"/>
-            <a:ext cx="5440680" cy="4206240"/>
+            <a:ext cx="5486400" cy="365760"/>
+          </a:xfrm>
+          <a:prstGeom prst="rect">
+            <a:avLst/>
+          </a:prstGeom>
+          <a:solidFill>
+            <a:srgbClr val="1A5C38"/>
+          </a:solidFill>
+          <a:ln>
+            <a:noFill/>
+          </a:ln>
+        </p:spPr>
+        <p:style>
+          <a:lnRef idx="1">
+            <a:schemeClr val="accent1"/>
+          </a:lnRef>
+          <a:fillRef idx="3">
+            <a:schemeClr val="accent1"/>
+          </a:fillRef>
+          <a:effectRef idx="2">
+            <a:schemeClr val="accent1"/>
+          </a:effectRef>
+          <a:fontRef idx="minor">
+            <a:schemeClr val="lt1"/>
+          </a:fontRef>
+        </p:style>
+        <p:txBody>
+          <a:bodyPr rtlCol="0" anchor="ctr"/>
+          <a:lstStyle/>
+          <a:p>
+            <a:pPr algn="ctr"/>
+          </a:p>
+        </p:txBody>
+      </p:sp>
+      <p:sp>
+        <p:nvSpPr>
+          <p:cNvPr id="10" name="TextBox 9"/>
+          <p:cNvSpPr txBox="1"/>
+          <p:nvPr/>
+        </p:nvSpPr>
+        <p:spPr>
+          <a:xfrm>
+            <a:off x="457200" y="2331720"/>
+            <a:ext cx="5257800" cy="274320"/>
+          </a:xfrm>
+          <a:prstGeom prst="rect">
+            <a:avLst/>
+          </a:prstGeom>
+          <a:noFill/>
+        </p:spPr>
+        <p:txBody>
+          <a:bodyPr wrap="square">
+            <a:spAutoFit/>
+          </a:bodyPr>
+          <a:lstStyle/>
+          <a:p>
+            <a:pPr algn="l"/>
+            <a:r>
+              <a:rPr sz="1200" b="1" i="0">
+                <a:solidFill>
+                  <a:srgbClr val="D4A017"/>
+                </a:solidFill>
+              </a:rPr>
+              <a:t>PILLAR 1</a:t>
+            </a:r>
+          </a:p>
+        </p:txBody>
+      </p:sp>
+      <p:sp>
+        <p:nvSpPr>
+          <p:cNvPr id="11" name="Rectangle 10"/>
+          <p:cNvSpPr/>
+          <p:nvPr/>
+        </p:nvSpPr>
+        <p:spPr>
+          <a:xfrm>
+            <a:off x="320040" y="2651760"/>
+            <a:ext cx="5486400" cy="3566160"/>
           </a:xfrm>
           <a:prstGeom prst="rect">
             <a:avLst/>
@@ -8761,20 +11338,88 @@
       </p:sp>
       <p:sp>
         <p:nvSpPr>
-          <p:cNvPr id="10" name="Rectangle 9"/>
+          <p:cNvPr id="12" name="TextBox 11"/>
+          <p:cNvSpPr txBox="1"/>
+          <p:nvPr/>
+        </p:nvSpPr>
+        <p:spPr>
+          <a:xfrm>
+            <a:off x="457200" y="2788920"/>
+            <a:ext cx="5212080" cy="457200"/>
+          </a:xfrm>
+          <a:prstGeom prst="rect">
+            <a:avLst/>
+          </a:prstGeom>
+          <a:noFill/>
+        </p:spPr>
+        <p:txBody>
+          <a:bodyPr wrap="square">
+            <a:spAutoFit/>
+          </a:bodyPr>
+          <a:lstStyle/>
+          <a:p>
+            <a:pPr algn="l"/>
+            <a:r>
+              <a:rPr sz="1900" b="1" i="0">
+                <a:solidFill>
+                  <a:srgbClr val="2B2B2B"/>
+                </a:solidFill>
+              </a:rPr>
+              <a:t>Redesign the Journey</a:t>
+            </a:r>
+          </a:p>
+        </p:txBody>
+      </p:sp>
+      <p:sp>
+        <p:nvSpPr>
+          <p:cNvPr id="13" name="TextBox 12"/>
+          <p:cNvSpPr txBox="1"/>
+          <p:nvPr/>
+        </p:nvSpPr>
+        <p:spPr>
+          <a:xfrm>
+            <a:off x="457200" y="3337560"/>
+            <a:ext cx="5212080" cy="2743200"/>
+          </a:xfrm>
+          <a:prstGeom prst="rect">
+            <a:avLst/>
+          </a:prstGeom>
+          <a:noFill/>
+        </p:spPr>
+        <p:txBody>
+          <a:bodyPr wrap="square">
+            <a:spAutoFit/>
+          </a:bodyPr>
+          <a:lstStyle/>
+          <a:p>
+            <a:pPr algn="l"/>
+            <a:r>
+              <a:rPr sz="1400" b="0" i="0">
+                <a:solidFill>
+                  <a:srgbClr val="555555"/>
+                </a:solidFill>
+              </a:rPr>
+              <a:t>Restructure the site into one guided circular path — controlled entrances, a central egg hunt, and vendors and races woven directly into the route.</a:t>
+            </a:r>
+          </a:p>
+        </p:txBody>
+      </p:sp>
+      <p:sp>
+        <p:nvSpPr>
+          <p:cNvPr id="14" name="Rectangle 13"/>
           <p:cNvSpPr/>
           <p:nvPr/>
         </p:nvSpPr>
         <p:spPr>
           <a:xfrm>
-            <a:off x="320040" y="2286000"/>
-            <a:ext cx="5440680" cy="457200"/>
+            <a:off x="6355079" y="2286000"/>
+            <a:ext cx="5486400" cy="365760"/>
           </a:xfrm>
           <a:prstGeom prst="rect">
             <a:avLst/>
           </a:prstGeom>
           <a:solidFill>
-            <a:srgbClr val="1A5C38"/>
+            <a:srgbClr val="B03A2E"/>
           </a:solidFill>
           <a:ln>
             <a:noFill/>
@@ -8804,14 +11449,14 @@
       </p:sp>
       <p:sp>
         <p:nvSpPr>
-          <p:cNvPr id="11" name="TextBox 10"/>
-          <p:cNvSpPr txBox="1"/>
-          <p:nvPr/>
-        </p:nvSpPr>
-        <p:spPr>
-          <a:xfrm>
-            <a:off x="457200" y="2331720"/>
-            <a:ext cx="5166360" cy="384048"/>
+          <p:cNvPr id="15" name="TextBox 14"/>
+          <p:cNvSpPr txBox="1"/>
+          <p:nvPr/>
+        </p:nvSpPr>
+        <p:spPr>
+          <a:xfrm>
+            <a:off x="6492240" y="2331720"/>
+            <a:ext cx="5257800" cy="274320"/>
           </a:xfrm>
           <a:prstGeom prst="rect">
             <a:avLst/>
@@ -8826,184 +11471,26 @@
           <a:p>
             <a:pPr algn="l"/>
             <a:r>
-              <a:rPr sz="1500" b="1" i="0">
-                <a:solidFill>
-                  <a:srgbClr val="FFFFFF"/>
-                </a:solidFill>
-              </a:rPr>
-              <a:t>FIX 1  —  Activate the Raffle</a:t>
-            </a:r>
-          </a:p>
-        </p:txBody>
-      </p:sp>
-      <p:sp>
-        <p:nvSpPr>
-          <p:cNvPr id="12" name="TextBox 11"/>
-          <p:cNvSpPr txBox="1"/>
-          <p:nvPr/>
-        </p:nvSpPr>
-        <p:spPr>
-          <a:xfrm>
-            <a:off x="457200" y="2880360"/>
-            <a:ext cx="5166360" cy="3474720"/>
-          </a:xfrm>
-          <a:prstGeom prst="rect">
-            <a:avLst/>
-          </a:prstGeom>
-          <a:noFill/>
-        </p:spPr>
-        <p:txBody>
-          <a:bodyPr wrap="square">
-            <a:spAutoFit/>
-          </a:bodyPr>
-          <a:lstStyle/>
-          <a:p>
-            <a:pPr>
-              <a:spcAft>
-                <a:spcPts val="400"/>
-              </a:spcAft>
-            </a:pPr>
-            <a:r>
-              <a:rPr sz="1300" b="0">
-                <a:solidFill>
-                  <a:srgbClr val="2B2B2B"/>
-                </a:solidFill>
-              </a:rPr>
-              <a:t>Make the Animal Races the event's anchor</a:t>
-            </a:r>
-          </a:p>
-          <a:p>
-            <a:pPr>
-              <a:spcAft>
-                <a:spcPts val="400"/>
-              </a:spcAft>
-            </a:pPr>
-            <a:r>
-              <a:rPr sz="1300" b="0">
-                <a:solidFill>
-                  <a:srgbClr val="2B2B2B"/>
-                </a:solidFill>
-              </a:rPr>
-              <a:t/>
-            </a:r>
-          </a:p>
-          <a:p>
-            <a:pPr>
-              <a:spcAft>
-                <a:spcPts val="400"/>
-              </a:spcAft>
-            </a:pPr>
-            <a:r>
-              <a:rPr sz="1300" b="0">
-                <a:solidFill>
-                  <a:srgbClr val="2B2B2B"/>
-                </a:solidFill>
-              </a:rPr>
-              <a:t>• Raffle tickets are already given for picking race winners</a:t>
-            </a:r>
-          </a:p>
-          <a:p>
-            <a:pPr>
-              <a:spcAft>
-                <a:spcPts val="400"/>
-              </a:spcAft>
-            </a:pPr>
-            <a:r>
-              <a:rPr sz="1300" b="0">
-                <a:solidFill>
-                  <a:srgbClr val="2B2B2B"/>
-                </a:solidFill>
-              </a:rPr>
-              <a:t>• Right now there's no announced prize drawing — tickets lack a payoff</a:t>
-            </a:r>
-          </a:p>
-          <a:p>
-            <a:pPr>
-              <a:spcAft>
-                <a:spcPts val="400"/>
-              </a:spcAft>
-            </a:pPr>
-            <a:r>
-              <a:rPr sz="1300" b="0">
-                <a:solidFill>
-                  <a:srgbClr val="2B2B2B"/>
-                </a:solidFill>
-              </a:rPr>
-              <a:t>• Add a publicized Grand Prize Drawing at 12:15 PM</a:t>
-            </a:r>
-          </a:p>
-          <a:p>
-            <a:pPr>
-              <a:spcAft>
-                <a:spcPts val="400"/>
-              </a:spcAft>
-            </a:pPr>
-            <a:r>
-              <a:rPr sz="1300" b="0">
-                <a:solidFill>
-                  <a:srgbClr val="2B2B2B"/>
-                </a:solidFill>
-              </a:rPr>
-              <a:t>• Families now have a reason to stay through every race heat</a:t>
-            </a:r>
-          </a:p>
-          <a:p>
-            <a:pPr>
-              <a:spcAft>
-                <a:spcPts val="400"/>
-              </a:spcAft>
-            </a:pPr>
-            <a:r>
-              <a:rPr sz="1300" b="0">
-                <a:solidFill>
-                  <a:srgbClr val="2B2B2B"/>
-                </a:solidFill>
-              </a:rPr>
-              <a:t>• Prizes sourced from local sponsors — zero Town cost</a:t>
-            </a:r>
-          </a:p>
-          <a:p>
-            <a:pPr>
-              <a:spcAft>
-                <a:spcPts val="400"/>
-              </a:spcAft>
-            </a:pPr>
-            <a:r>
-              <a:rPr sz="1300" b="0">
-                <a:solidFill>
-                  <a:srgbClr val="2B2B2B"/>
-                </a:solidFill>
-              </a:rPr>
-              <a:t/>
-            </a:r>
-          </a:p>
-          <a:p>
-            <a:pPr>
-              <a:spcAft>
-                <a:spcPts val="400"/>
-              </a:spcAft>
-            </a:pPr>
-            <a:r>
-              <a:rPr sz="1300" b="0">
-                <a:solidFill>
-                  <a:srgbClr val="2B2B2B"/>
-                </a:solidFill>
-              </a:rPr>
-              <a:t>The mechanic exists. We're completing the loop.</a:t>
-            </a:r>
-          </a:p>
-        </p:txBody>
-      </p:sp>
-      <p:sp>
-        <p:nvSpPr>
-          <p:cNvPr id="13" name="Rectangle 12"/>
+              <a:rPr sz="1200" b="1" i="0">
+                <a:solidFill>
+                  <a:srgbClr val="D4A017"/>
+                </a:solidFill>
+              </a:rPr>
+              <a:t>PILLAR 2</a:t>
+            </a:r>
+          </a:p>
+        </p:txBody>
+      </p:sp>
+      <p:sp>
+        <p:nvSpPr>
+          <p:cNvPr id="16" name="Rectangle 15"/>
           <p:cNvSpPr/>
           <p:nvPr/>
         </p:nvSpPr>
         <p:spPr>
           <a:xfrm>
-            <a:off x="5989320" y="2286000"/>
-            <a:ext cx="5897880" cy="4206240"/>
+            <a:off x="6355079" y="2651760"/>
+            <a:ext cx="5486400" cy="3566160"/>
           </a:xfrm>
           <a:prstGeom prst="rect">
             <a:avLst/>
@@ -9039,57 +11526,14 @@
       </p:sp>
       <p:sp>
         <p:nvSpPr>
-          <p:cNvPr id="14" name="Rectangle 13"/>
-          <p:cNvSpPr/>
-          <p:nvPr/>
-        </p:nvSpPr>
-        <p:spPr>
-          <a:xfrm>
-            <a:off x="5989320" y="2286000"/>
-            <a:ext cx="5897880" cy="457200"/>
-          </a:xfrm>
-          <a:prstGeom prst="rect">
-            <a:avLst/>
-          </a:prstGeom>
-          <a:solidFill>
-            <a:srgbClr val="1A5C38"/>
-          </a:solidFill>
-          <a:ln>
-            <a:noFill/>
-          </a:ln>
-        </p:spPr>
-        <p:style>
-          <a:lnRef idx="1">
-            <a:schemeClr val="accent1"/>
-          </a:lnRef>
-          <a:fillRef idx="3">
-            <a:schemeClr val="accent1"/>
-          </a:fillRef>
-          <a:effectRef idx="2">
-            <a:schemeClr val="accent1"/>
-          </a:effectRef>
-          <a:fontRef idx="minor">
-            <a:schemeClr val="lt1"/>
-          </a:fontRef>
-        </p:style>
-        <p:txBody>
-          <a:bodyPr rtlCol="0" anchor="ctr"/>
-          <a:lstStyle/>
-          <a:p>
-            <a:pPr algn="ctr"/>
-          </a:p>
-        </p:txBody>
-      </p:sp>
-      <p:sp>
-        <p:nvSpPr>
-          <p:cNvPr id="15" name="TextBox 14"/>
-          <p:cNvSpPr txBox="1"/>
-          <p:nvPr/>
-        </p:nvSpPr>
-        <p:spPr>
-          <a:xfrm>
-            <a:off x="6126480" y="2331720"/>
-            <a:ext cx="5623560" cy="384048"/>
+          <p:cNvPr id="17" name="TextBox 16"/>
+          <p:cNvSpPr txBox="1"/>
+          <p:nvPr/>
+        </p:nvSpPr>
+        <p:spPr>
+          <a:xfrm>
+            <a:off x="6492240" y="2788920"/>
+            <a:ext cx="5212080" cy="457200"/>
           </a:xfrm>
           <a:prstGeom prst="rect">
             <a:avLst/>
@@ -9104,185 +11548,80 @@
           <a:p>
             <a:pPr algn="l"/>
             <a:r>
-              <a:rPr sz="1500" b="1" i="0">
-                <a:solidFill>
-                  <a:srgbClr val="FFFFFF"/>
-                </a:solidFill>
-              </a:rPr>
-              <a:t>FIX 2  —  The Post-Hunt Handoff</a:t>
-            </a:r>
-          </a:p>
-        </p:txBody>
-      </p:sp>
-      <p:sp>
-        <p:nvSpPr>
-          <p:cNvPr id="16" name="TextBox 15"/>
-          <p:cNvSpPr txBox="1"/>
-          <p:nvPr/>
-        </p:nvSpPr>
-        <p:spPr>
-          <a:xfrm>
-            <a:off x="6126480" y="2880360"/>
-            <a:ext cx="5623560" cy="3474720"/>
-          </a:xfrm>
-          <a:prstGeom prst="rect">
-            <a:avLst/>
-          </a:prstGeom>
-          <a:noFill/>
-        </p:spPr>
-        <p:txBody>
-          <a:bodyPr wrap="square">
-            <a:spAutoFit/>
-          </a:bodyPr>
-          <a:lstStyle/>
-          <a:p>
-            <a:pPr>
-              <a:spcAft>
-                <a:spcPts val="400"/>
-              </a:spcAft>
-            </a:pPr>
-            <a:r>
-              <a:rPr sz="1300" b="0">
+              <a:rPr sz="1900" b="1" i="0">
                 <a:solidFill>
                   <a:srgbClr val="2B2B2B"/>
                 </a:solidFill>
               </a:rPr>
-              <a:t>Capture families at the moment they finish</a:t>
-            </a:r>
-          </a:p>
-          <a:p>
-            <a:pPr>
-              <a:spcAft>
-                <a:spcPts val="400"/>
-              </a:spcAft>
-            </a:pPr>
-            <a:r>
-              <a:rPr sz="1300" b="0">
-                <a:solidFill>
-                  <a:srgbClr val="2B2B2B"/>
-                </a:solidFill>
-              </a:rPr>
-              <a:t/>
-            </a:r>
-          </a:p>
-          <a:p>
-            <a:pPr>
-              <a:spcAft>
-                <a:spcPts val="400"/>
-              </a:spcAft>
-            </a:pPr>
-            <a:r>
-              <a:rPr sz="1300" b="0">
-                <a:solidFill>
-                  <a:srgbClr val="2B2B2B"/>
-                </a:solidFill>
-              </a:rPr>
-              <a:t>• Hunt staff transition to handoff roles as each age group finishes</a:t>
-            </a:r>
-          </a:p>
-          <a:p>
-            <a:pPr>
-              <a:spcAft>
-                <a:spcPts val="400"/>
-              </a:spcAft>
-            </a:pPr>
-            <a:r>
-              <a:rPr sz="1300" b="0">
-                <a:solidFill>
-                  <a:srgbClr val="2B2B2B"/>
-                </a:solidFill>
-              </a:rPr>
-              <a:t>• One staff member at each hunt exit with a clear next step:</a:t>
-            </a:r>
-          </a:p>
-          <a:p>
-            <a:pPr>
-              <a:spcAft>
-                <a:spcPts val="400"/>
-              </a:spcAft>
-            </a:pPr>
-            <a:r>
-              <a:rPr sz="1300" b="0">
-                <a:solidFill>
-                  <a:srgbClr val="2B2B2B"/>
-                </a:solidFill>
-              </a:rPr>
-              <a:t>  'Next race heat in 10 minutes — head that way!'</a:t>
-            </a:r>
-          </a:p>
-          <a:p>
-            <a:pPr>
-              <a:spcAft>
-                <a:spcPts val="400"/>
-              </a:spcAft>
-            </a:pPr>
-            <a:r>
-              <a:rPr sz="1300" b="0">
-                <a:solidFill>
-                  <a:srgbClr val="2B2B2B"/>
-                </a:solidFill>
-              </a:rPr>
-              <a:t>• Simple directional signage reinforces the message</a:t>
-            </a:r>
-          </a:p>
-          <a:p>
-            <a:pPr>
-              <a:spcAft>
-                <a:spcPts val="400"/>
-              </a:spcAft>
-            </a:pPr>
-            <a:r>
-              <a:rPr sz="1300" b="0">
-                <a:solidFill>
-                  <a:srgbClr val="2B2B2B"/>
-                </a:solidFill>
-              </a:rPr>
-              <a:t>• No new hires — redeployment of existing event staff</a:t>
-            </a:r>
-          </a:p>
-          <a:p>
-            <a:pPr>
-              <a:spcAft>
-                <a:spcPts val="400"/>
-              </a:spcAft>
-            </a:pPr>
-            <a:r>
-              <a:rPr sz="1300" b="0">
-                <a:solidFill>
-                  <a:srgbClr val="2B2B2B"/>
-                </a:solidFill>
-              </a:rPr>
-              <a:t/>
-            </a:r>
-          </a:p>
-          <a:p>
-            <a:pPr>
-              <a:spcAft>
-                <a:spcPts val="400"/>
-              </a:spcAft>
-            </a:pPr>
-            <a:r>
-              <a:rPr sz="1300" b="0">
-                <a:solidFill>
-                  <a:srgbClr val="2B2B2B"/>
-                </a:solidFill>
-              </a:rPr>
-              <a:t>The 30 seconds after the hunt is when families decide to stay or go.</a:t>
-            </a:r>
-          </a:p>
-          <a:p>
-            <a:pPr>
-              <a:spcAft>
-                <a:spcPts val="400"/>
-              </a:spcAft>
-            </a:pPr>
-            <a:r>
-              <a:rPr sz="1300" b="0">
-                <a:solidFill>
-                  <a:srgbClr val="2B2B2B"/>
-                </a:solidFill>
-              </a:rPr>
-              <a:t>We own that moment.</a:t>
+              <a:t>Gamify Retention</a:t>
+            </a:r>
+          </a:p>
+        </p:txBody>
+      </p:sp>
+      <p:sp>
+        <p:nvSpPr>
+          <p:cNvPr id="18" name="TextBox 17"/>
+          <p:cNvSpPr txBox="1"/>
+          <p:nvPr/>
+        </p:nvSpPr>
+        <p:spPr>
+          <a:xfrm>
+            <a:off x="6492240" y="3337560"/>
+            <a:ext cx="5212080" cy="2743200"/>
+          </a:xfrm>
+          <a:prstGeom prst="rect">
+            <a:avLst/>
+          </a:prstGeom>
+          <a:noFill/>
+        </p:spPr>
+        <p:txBody>
+          <a:bodyPr wrap="square">
+            <a:spAutoFit/>
+          </a:bodyPr>
+          <a:lstStyle/>
+          <a:p>
+            <a:pPr algn="l"/>
+            <a:r>
+              <a:rPr sz="1400" b="0" i="0">
+                <a:solidFill>
+                  <a:srgbClr val="555555"/>
+                </a:solidFill>
+              </a:rPr>
+              <a:t>Expand the existing raffle into a layered incentive system: an early-announced grand prize, a combined punch/bingo card, and hidden golden eggs.</a:t>
+            </a:r>
+          </a:p>
+        </p:txBody>
+      </p:sp>
+      <p:sp>
+        <p:nvSpPr>
+          <p:cNvPr id="19" name="TextBox 18"/>
+          <p:cNvSpPr txBox="1"/>
+          <p:nvPr/>
+        </p:nvSpPr>
+        <p:spPr>
+          <a:xfrm>
+            <a:off x="320040" y="6400800"/>
+            <a:ext cx="11521440" cy="365760"/>
+          </a:xfrm>
+          <a:prstGeom prst="rect">
+            <a:avLst/>
+          </a:prstGeom>
+          <a:noFill/>
+        </p:spPr>
+        <p:txBody>
+          <a:bodyPr wrap="square">
+            <a:spAutoFit/>
+          </a:bodyPr>
+          <a:lstStyle/>
+          <a:p>
+            <a:pPr algn="ctr"/>
+            <a:r>
+              <a:rPr sz="1100" b="1" i="0">
+                <a:solidFill>
+                  <a:srgbClr val="1A5C38"/>
+                </a:solidFill>
+              </a:rPr>
+              <a:t>Pillar 1 gets families moving through the whole site. Pillar 2 gives them a reason to keep moving.</a:t>
             </a:r>
           </a:p>
         </p:txBody>
@@ -9463,7 +11802,7 @@
                   <a:srgbClr val="FFFFFF"/>
                 </a:solidFill>
               </a:rPr>
-              <a:t>Operational Plan</a:t>
+              <a:t>The Recommendation — Pillar 1</a:t>
             </a:r>
           </a:p>
         </p:txBody>
@@ -9497,7 +11836,7 @@
                   <a:srgbClr val="D4A017"/>
                 </a:solidFill>
               </a:rPr>
-              <a:t>Pre-Event Through Day-Of Execution</a:t>
+              <a:t>Event Layout &amp; Participant Journey</a:t>
             </a:r>
           </a:p>
         </p:txBody>
@@ -9510,8 +11849,85 @@
         </p:nvSpPr>
         <p:spPr>
           <a:xfrm>
-            <a:off x="320040" y="1463040"/>
-            <a:ext cx="2697480" cy="438912"/>
+            <a:off x="320040" y="1417320"/>
+            <a:ext cx="11521440" cy="502920"/>
+          </a:xfrm>
+          <a:prstGeom prst="rect">
+            <a:avLst/>
+          </a:prstGeom>
+          <a:solidFill>
+            <a:srgbClr val="FFFFFF"/>
+          </a:solidFill>
+          <a:ln>
+            <a:noFill/>
+          </a:ln>
+        </p:spPr>
+        <p:style>
+          <a:lnRef idx="1">
+            <a:schemeClr val="accent1"/>
+          </a:lnRef>
+          <a:fillRef idx="3">
+            <a:schemeClr val="accent1"/>
+          </a:fillRef>
+          <a:effectRef idx="2">
+            <a:schemeClr val="accent1"/>
+          </a:effectRef>
+          <a:fontRef idx="minor">
+            <a:schemeClr val="lt1"/>
+          </a:fontRef>
+        </p:style>
+        <p:txBody>
+          <a:bodyPr rtlCol="0" anchor="ctr"/>
+          <a:lstStyle/>
+          <a:p>
+            <a:pPr algn="ctr"/>
+          </a:p>
+        </p:txBody>
+      </p:sp>
+      <p:sp>
+        <p:nvSpPr>
+          <p:cNvPr id="8" name="TextBox 7"/>
+          <p:cNvSpPr txBox="1"/>
+          <p:nvPr/>
+        </p:nvSpPr>
+        <p:spPr>
+          <a:xfrm>
+            <a:off x="457200" y="1463040"/>
+            <a:ext cx="11247120" cy="411480"/>
+          </a:xfrm>
+          <a:prstGeom prst="rect">
+            <a:avLst/>
+          </a:prstGeom>
+          <a:noFill/>
+        </p:spPr>
+        <p:txBody>
+          <a:bodyPr wrap="square">
+            <a:spAutoFit/>
+          </a:bodyPr>
+          <a:lstStyle/>
+          <a:p>
+            <a:pPr algn="ctr"/>
+            <a:r>
+              <a:rPr sz="1200" b="0" i="1">
+                <a:solidFill>
+                  <a:srgbClr val="1A5C38"/>
+                </a:solidFill>
+              </a:rPr>
+              <a:t>Restructure the site as a guided loop, not a series of disconnected stops — every family's path leads past every vendor and attraction before the exit.</a:t>
+            </a:r>
+          </a:p>
+        </p:txBody>
+      </p:sp>
+      <p:sp>
+        <p:nvSpPr>
+          <p:cNvPr id="9" name="Rectangle 8"/>
+          <p:cNvSpPr/>
+          <p:nvPr/>
+        </p:nvSpPr>
+        <p:spPr>
+          <a:xfrm>
+            <a:off x="320040" y="2103120"/>
+            <a:ext cx="1706879" cy="1234440"/>
           </a:xfrm>
           <a:prstGeom prst="rect">
             <a:avLst/>
@@ -9547,174 +11963,116 @@
       </p:sp>
       <p:sp>
         <p:nvSpPr>
-          <p:cNvPr id="8" name="TextBox 7"/>
-          <p:cNvSpPr txBox="1"/>
-          <p:nvPr/>
-        </p:nvSpPr>
-        <p:spPr>
-          <a:xfrm>
-            <a:off x="411479" y="1508760"/>
-            <a:ext cx="2560320" cy="347472"/>
-          </a:xfrm>
-          <a:prstGeom prst="rect">
-            <a:avLst/>
-          </a:prstGeom>
-          <a:noFill/>
-        </p:spPr>
-        <p:txBody>
-          <a:bodyPr wrap="square">
-            <a:spAutoFit/>
-          </a:bodyPr>
-          <a:lstStyle/>
-          <a:p>
-            <a:pPr algn="ctr"/>
-            <a:r>
-              <a:rPr sz="1300" b="1" i="0">
+          <p:cNvPr id="10" name="TextBox 9"/>
+          <p:cNvSpPr txBox="1"/>
+          <p:nvPr/>
+        </p:nvSpPr>
+        <p:spPr>
+          <a:xfrm>
+            <a:off x="365759" y="2194560"/>
+            <a:ext cx="1615439" cy="411480"/>
+          </a:xfrm>
+          <a:prstGeom prst="rect">
+            <a:avLst/>
+          </a:prstGeom>
+          <a:noFill/>
+        </p:spPr>
+        <p:txBody>
+          <a:bodyPr wrap="square">
+            <a:spAutoFit/>
+          </a:bodyPr>
+          <a:lstStyle/>
+          <a:p>
+            <a:pPr algn="ctr"/>
+            <a:r>
+              <a:rPr sz="1000" b="1" i="0">
                 <a:solidFill>
                   <a:srgbClr val="FFFFFF"/>
                 </a:solidFill>
               </a:rPr>
-              <a:t>8 Weeks Out</a:t>
-            </a:r>
-          </a:p>
-        </p:txBody>
-      </p:sp>
-      <p:sp>
-        <p:nvSpPr>
-          <p:cNvPr id="9" name="Rectangle 8"/>
+              <a:t>ENTRANCE A / B</a:t>
+            </a:r>
+          </a:p>
+        </p:txBody>
+      </p:sp>
+      <p:sp>
+        <p:nvSpPr>
+          <p:cNvPr id="11" name="TextBox 10"/>
+          <p:cNvSpPr txBox="1"/>
+          <p:nvPr/>
+        </p:nvSpPr>
+        <p:spPr>
+          <a:xfrm>
+            <a:off x="365759" y="2633472"/>
+            <a:ext cx="1615439" cy="640080"/>
+          </a:xfrm>
+          <a:prstGeom prst="rect">
+            <a:avLst/>
+          </a:prstGeom>
+          <a:noFill/>
+        </p:spPr>
+        <p:txBody>
+          <a:bodyPr wrap="square">
+            <a:spAutoFit/>
+          </a:bodyPr>
+          <a:lstStyle/>
+          <a:p>
+            <a:pPr algn="ctr"/>
+            <a:r>
+              <a:rPr sz="800" b="0" i="0">
+                <a:solidFill>
+                  <a:srgbClr val="F4F4F4"/>
+                </a:solidFill>
+              </a:rPr>
+              <a:t>Controlled entry — safety &amp; flow</a:t>
+            </a:r>
+          </a:p>
+        </p:txBody>
+      </p:sp>
+      <p:sp>
+        <p:nvSpPr>
+          <p:cNvPr id="12" name="TextBox 11"/>
+          <p:cNvSpPr txBox="1"/>
+          <p:nvPr/>
+        </p:nvSpPr>
+        <p:spPr>
+          <a:xfrm>
+            <a:off x="2008631" y="2450591"/>
+            <a:ext cx="292608" cy="457200"/>
+          </a:xfrm>
+          <a:prstGeom prst="rect">
+            <a:avLst/>
+          </a:prstGeom>
+          <a:noFill/>
+        </p:spPr>
+        <p:txBody>
+          <a:bodyPr wrap="square">
+            <a:spAutoFit/>
+          </a:bodyPr>
+          <a:lstStyle/>
+          <a:p>
+            <a:pPr algn="ctr"/>
+            <a:r>
+              <a:rPr sz="1600" b="1" i="0">
+                <a:solidFill>
+                  <a:srgbClr val="D4A017"/>
+                </a:solidFill>
+              </a:rPr>
+              <a:t>→</a:t>
+            </a:r>
+          </a:p>
+        </p:txBody>
+      </p:sp>
+      <p:sp>
+        <p:nvSpPr>
+          <p:cNvPr id="13" name="Rectangle 12"/>
           <p:cNvSpPr/>
           <p:nvPr/>
         </p:nvSpPr>
         <p:spPr>
           <a:xfrm>
-            <a:off x="320040" y="1901952"/>
-            <a:ext cx="2697480" cy="4572000"/>
-          </a:xfrm>
-          <a:prstGeom prst="rect">
-            <a:avLst/>
-          </a:prstGeom>
-          <a:solidFill>
-            <a:srgbClr val="FFFFFF"/>
-          </a:solidFill>
-          <a:ln>
-            <a:noFill/>
-          </a:ln>
-        </p:spPr>
-        <p:style>
-          <a:lnRef idx="1">
-            <a:schemeClr val="accent1"/>
-          </a:lnRef>
-          <a:fillRef idx="3">
-            <a:schemeClr val="accent1"/>
-          </a:fillRef>
-          <a:effectRef idx="2">
-            <a:schemeClr val="accent1"/>
-          </a:effectRef>
-          <a:fontRef idx="minor">
-            <a:schemeClr val="lt1"/>
-          </a:fontRef>
-        </p:style>
-        <p:txBody>
-          <a:bodyPr rtlCol="0" anchor="ctr"/>
-          <a:lstStyle/>
-          <a:p>
-            <a:pPr algn="ctr"/>
-          </a:p>
-        </p:txBody>
-      </p:sp>
-      <p:sp>
-        <p:nvSpPr>
-          <p:cNvPr id="10" name="TextBox 9"/>
-          <p:cNvSpPr txBox="1"/>
-          <p:nvPr/>
-        </p:nvSpPr>
-        <p:spPr>
-          <a:xfrm>
-            <a:off x="429768" y="1993392"/>
-            <a:ext cx="2514600" cy="4297680"/>
-          </a:xfrm>
-          <a:prstGeom prst="rect">
-            <a:avLst/>
-          </a:prstGeom>
-          <a:noFill/>
-        </p:spPr>
-        <p:txBody>
-          <a:bodyPr wrap="square">
-            <a:spAutoFit/>
-          </a:bodyPr>
-          <a:lstStyle/>
-          <a:p>
-            <a:pPr>
-              <a:spcAft>
-                <a:spcPts val="800"/>
-              </a:spcAft>
-            </a:pPr>
-            <a:r>
-              <a:rPr sz="1200">
-                <a:solidFill>
-                  <a:srgbClr val="2B2B2B"/>
-                </a:solidFill>
-              </a:rPr>
-              <a:t>• Confirm Grand Prize Drawing format &amp; timing (12:15 PM)</a:t>
-            </a:r>
-          </a:p>
-          <a:p>
-            <a:pPr>
-              <a:spcAft>
-                <a:spcPts val="800"/>
-              </a:spcAft>
-            </a:pPr>
-            <a:r>
-              <a:rPr sz="1200">
-                <a:solidFill>
-                  <a:srgbClr val="2B2B2B"/>
-                </a:solidFill>
-              </a:rPr>
-              <a:t>• Recruit local business sponsor for prize package</a:t>
-            </a:r>
-          </a:p>
-          <a:p>
-            <a:pPr>
-              <a:spcAft>
-                <a:spcPts val="800"/>
-              </a:spcAft>
-            </a:pPr>
-            <a:r>
-              <a:rPr sz="1200">
-                <a:solidFill>
-                  <a:srgbClr val="2B2B2B"/>
-                </a:solidFill>
-              </a:rPr>
-              <a:t>• Design &amp; print directional signage for hunt exits</a:t>
-            </a:r>
-          </a:p>
-          <a:p>
-            <a:pPr>
-              <a:spcAft>
-                <a:spcPts val="800"/>
-              </a:spcAft>
-            </a:pPr>
-            <a:r>
-              <a:rPr sz="1200">
-                <a:solidFill>
-                  <a:srgbClr val="2B2B2B"/>
-                </a:solidFill>
-              </a:rPr>
-              <a:t>• Brief vendor team on updated event flow</a:t>
-            </a:r>
-          </a:p>
-        </p:txBody>
-      </p:sp>
-      <p:sp>
-        <p:nvSpPr>
-          <p:cNvPr id="11" name="Rectangle 10"/>
-          <p:cNvSpPr/>
-          <p:nvPr/>
-        </p:nvSpPr>
-        <p:spPr>
-          <a:xfrm>
-            <a:off x="3200400" y="1463040"/>
-            <a:ext cx="2697480" cy="438912"/>
+            <a:off x="2282952" y="2103120"/>
+            <a:ext cx="1706879" cy="1234440"/>
           </a:xfrm>
           <a:prstGeom prst="rect">
             <a:avLst/>
@@ -9750,54 +12108,122 @@
       </p:sp>
       <p:sp>
         <p:nvSpPr>
-          <p:cNvPr id="12" name="TextBox 11"/>
-          <p:cNvSpPr txBox="1"/>
-          <p:nvPr/>
-        </p:nvSpPr>
-        <p:spPr>
-          <a:xfrm>
-            <a:off x="3291840" y="1508760"/>
-            <a:ext cx="2560320" cy="347472"/>
-          </a:xfrm>
-          <a:prstGeom prst="rect">
-            <a:avLst/>
-          </a:prstGeom>
-          <a:noFill/>
-        </p:spPr>
-        <p:txBody>
-          <a:bodyPr wrap="square">
-            <a:spAutoFit/>
-          </a:bodyPr>
-          <a:lstStyle/>
-          <a:p>
-            <a:pPr algn="ctr"/>
-            <a:r>
-              <a:rPr sz="1300" b="1" i="0">
+          <p:cNvPr id="14" name="TextBox 13"/>
+          <p:cNvSpPr txBox="1"/>
+          <p:nvPr/>
+        </p:nvSpPr>
+        <p:spPr>
+          <a:xfrm>
+            <a:off x="2328672" y="2194560"/>
+            <a:ext cx="1615439" cy="411480"/>
+          </a:xfrm>
+          <a:prstGeom prst="rect">
+            <a:avLst/>
+          </a:prstGeom>
+          <a:noFill/>
+        </p:spPr>
+        <p:txBody>
+          <a:bodyPr wrap="square">
+            <a:spAutoFit/>
+          </a:bodyPr>
+          <a:lstStyle/>
+          <a:p>
+            <a:pPr algn="ctr"/>
+            <a:r>
+              <a:rPr sz="1000" b="1" i="0">
                 <a:solidFill>
                   <a:srgbClr val="FFFFFF"/>
                 </a:solidFill>
               </a:rPr>
-              <a:t>2 Weeks Out</a:t>
-            </a:r>
-          </a:p>
-        </p:txBody>
-      </p:sp>
-      <p:sp>
-        <p:nvSpPr>
-          <p:cNvPr id="13" name="Rectangle 12"/>
+              <a:t>GREAT EGG WALK</a:t>
+            </a:r>
+          </a:p>
+        </p:txBody>
+      </p:sp>
+      <p:sp>
+        <p:nvSpPr>
+          <p:cNvPr id="15" name="TextBox 14"/>
+          <p:cNvSpPr txBox="1"/>
+          <p:nvPr/>
+        </p:nvSpPr>
+        <p:spPr>
+          <a:xfrm>
+            <a:off x="2328672" y="2633472"/>
+            <a:ext cx="1615439" cy="640080"/>
+          </a:xfrm>
+          <a:prstGeom prst="rect">
+            <a:avLst/>
+          </a:prstGeom>
+          <a:noFill/>
+        </p:spPr>
+        <p:txBody>
+          <a:bodyPr wrap="square">
+            <a:spAutoFit/>
+          </a:bodyPr>
+          <a:lstStyle/>
+          <a:p>
+            <a:pPr algn="ctr"/>
+            <a:r>
+              <a:rPr sz="800" b="0" i="0">
+                <a:solidFill>
+                  <a:srgbClr val="F4F4F4"/>
+                </a:solidFill>
+              </a:rPr>
+              <a:t>Story-walk kicks off the journey</a:t>
+            </a:r>
+          </a:p>
+        </p:txBody>
+      </p:sp>
+      <p:sp>
+        <p:nvSpPr>
+          <p:cNvPr id="16" name="TextBox 15"/>
+          <p:cNvSpPr txBox="1"/>
+          <p:nvPr/>
+        </p:nvSpPr>
+        <p:spPr>
+          <a:xfrm>
+            <a:off x="3971544" y="2450591"/>
+            <a:ext cx="292608" cy="457200"/>
+          </a:xfrm>
+          <a:prstGeom prst="rect">
+            <a:avLst/>
+          </a:prstGeom>
+          <a:noFill/>
+        </p:spPr>
+        <p:txBody>
+          <a:bodyPr wrap="square">
+            <a:spAutoFit/>
+          </a:bodyPr>
+          <a:lstStyle/>
+          <a:p>
+            <a:pPr algn="ctr"/>
+            <a:r>
+              <a:rPr sz="1600" b="1" i="0">
+                <a:solidFill>
+                  <a:srgbClr val="D4A017"/>
+                </a:solidFill>
+              </a:rPr>
+              <a:t>→</a:t>
+            </a:r>
+          </a:p>
+        </p:txBody>
+      </p:sp>
+      <p:sp>
+        <p:nvSpPr>
+          <p:cNvPr id="17" name="Rectangle 16"/>
           <p:cNvSpPr/>
           <p:nvPr/>
         </p:nvSpPr>
         <p:spPr>
           <a:xfrm>
-            <a:off x="3200400" y="1901952"/>
-            <a:ext cx="2697480" cy="4572000"/>
+            <a:off x="4245863" y="2103120"/>
+            <a:ext cx="1706879" cy="1234440"/>
           </a:xfrm>
           <a:prstGeom prst="rect">
             <a:avLst/>
           </a:prstGeom>
           <a:solidFill>
-            <a:srgbClr val="FFFFFF"/>
+            <a:srgbClr val="1A5C38"/>
           </a:solidFill>
           <a:ln>
             <a:noFill/>
@@ -9827,103 +12253,122 @@
       </p:sp>
       <p:sp>
         <p:nvSpPr>
-          <p:cNvPr id="14" name="TextBox 13"/>
-          <p:cNvSpPr txBox="1"/>
-          <p:nvPr/>
-        </p:nvSpPr>
-        <p:spPr>
-          <a:xfrm>
-            <a:off x="3310128" y="1993392"/>
-            <a:ext cx="2514600" cy="4297680"/>
-          </a:xfrm>
-          <a:prstGeom prst="rect">
-            <a:avLst/>
-          </a:prstGeom>
-          <a:noFill/>
-        </p:spPr>
-        <p:txBody>
-          <a:bodyPr wrap="square">
-            <a:spAutoFit/>
-          </a:bodyPr>
-          <a:lstStyle/>
-          <a:p>
-            <a:pPr>
-              <a:spcAft>
-                <a:spcPts val="800"/>
-              </a:spcAft>
-            </a:pPr>
-            <a:r>
-              <a:rPr sz="1200">
-                <a:solidFill>
-                  <a:srgbClr val="2B2B2B"/>
-                </a:solidFill>
-              </a:rPr>
-              <a:t>• Finalize prize package (experiential: rec memberships, dining, local experiences)</a:t>
-            </a:r>
-          </a:p>
-          <a:p>
-            <a:pPr>
-              <a:spcAft>
-                <a:spcPts val="800"/>
-              </a:spcAft>
-            </a:pPr>
-            <a:r>
-              <a:rPr sz="1200">
-                <a:solidFill>
-                  <a:srgbClr val="2B2B2B"/>
-                </a:solidFill>
-              </a:rPr>
-              <a:t>• Confirm staff assignments &amp; handoff role training</a:t>
-            </a:r>
-          </a:p>
-          <a:p>
-            <a:pPr>
-              <a:spcAft>
-                <a:spcPts val="800"/>
-              </a:spcAft>
-            </a:pPr>
-            <a:r>
-              <a:rPr sz="1200">
-                <a:solidFill>
-                  <a:srgbClr val="2B2B2B"/>
-                </a:solidFill>
-              </a:rPr>
-              <a:t>• Distribute updated site map to all vendors &amp; partners</a:t>
-            </a:r>
-          </a:p>
-          <a:p>
-            <a:pPr>
-              <a:spcAft>
-                <a:spcPts val="800"/>
-              </a:spcAft>
-            </a:pPr>
-            <a:r>
-              <a:rPr sz="1200">
-                <a:solidFill>
-                  <a:srgbClr val="2B2B2B"/>
-                </a:solidFill>
-              </a:rPr>
-              <a:t>• Prep race announcement script for emcee</a:t>
-            </a:r>
-          </a:p>
-        </p:txBody>
-      </p:sp>
-      <p:sp>
-        <p:nvSpPr>
-          <p:cNvPr id="15" name="Rectangle 14"/>
+          <p:cNvPr id="18" name="TextBox 17"/>
+          <p:cNvSpPr txBox="1"/>
+          <p:nvPr/>
+        </p:nvSpPr>
+        <p:spPr>
+          <a:xfrm>
+            <a:off x="4291583" y="2194560"/>
+            <a:ext cx="1615439" cy="411480"/>
+          </a:xfrm>
+          <a:prstGeom prst="rect">
+            <a:avLst/>
+          </a:prstGeom>
+          <a:noFill/>
+        </p:spPr>
+        <p:txBody>
+          <a:bodyPr wrap="square">
+            <a:spAutoFit/>
+          </a:bodyPr>
+          <a:lstStyle/>
+          <a:p>
+            <a:pPr algn="ctr"/>
+            <a:r>
+              <a:rPr sz="1000" b="1" i="0">
+                <a:solidFill>
+                  <a:srgbClr val="FFFFFF"/>
+                </a:solidFill>
+              </a:rPr>
+              <a:t>VENDOR ROW</a:t>
+            </a:r>
+          </a:p>
+        </p:txBody>
+      </p:sp>
+      <p:sp>
+        <p:nvSpPr>
+          <p:cNvPr id="19" name="TextBox 18"/>
+          <p:cNvSpPr txBox="1"/>
+          <p:nvPr/>
+        </p:nvSpPr>
+        <p:spPr>
+          <a:xfrm>
+            <a:off x="4291583" y="2633472"/>
+            <a:ext cx="1615439" cy="640080"/>
+          </a:xfrm>
+          <a:prstGeom prst="rect">
+            <a:avLst/>
+          </a:prstGeom>
+          <a:noFill/>
+        </p:spPr>
+        <p:txBody>
+          <a:bodyPr wrap="square">
+            <a:spAutoFit/>
+          </a:bodyPr>
+          <a:lstStyle/>
+          <a:p>
+            <a:pPr algn="ctr"/>
+            <a:r>
+              <a:rPr sz="800" b="0" i="0">
+                <a:solidFill>
+                  <a:srgbClr val="F4F4F4"/>
+                </a:solidFill>
+              </a:rPr>
+              <a:t>Primary vendor &amp; partner area</a:t>
+            </a:r>
+          </a:p>
+        </p:txBody>
+      </p:sp>
+      <p:sp>
+        <p:nvSpPr>
+          <p:cNvPr id="20" name="TextBox 19"/>
+          <p:cNvSpPr txBox="1"/>
+          <p:nvPr/>
+        </p:nvSpPr>
+        <p:spPr>
+          <a:xfrm>
+            <a:off x="5934455" y="2450591"/>
+            <a:ext cx="292608" cy="457200"/>
+          </a:xfrm>
+          <a:prstGeom prst="rect">
+            <a:avLst/>
+          </a:prstGeom>
+          <a:noFill/>
+        </p:spPr>
+        <p:txBody>
+          <a:bodyPr wrap="square">
+            <a:spAutoFit/>
+          </a:bodyPr>
+          <a:lstStyle/>
+          <a:p>
+            <a:pPr algn="ctr"/>
+            <a:r>
+              <a:rPr sz="1600" b="1" i="0">
+                <a:solidFill>
+                  <a:srgbClr val="D4A017"/>
+                </a:solidFill>
+              </a:rPr>
+              <a:t>→</a:t>
+            </a:r>
+          </a:p>
+        </p:txBody>
+      </p:sp>
+      <p:sp>
+        <p:nvSpPr>
+          <p:cNvPr id="21" name="Rectangle 20"/>
           <p:cNvSpPr/>
           <p:nvPr/>
         </p:nvSpPr>
         <p:spPr>
           <a:xfrm>
-            <a:off x="6080760" y="1463040"/>
-            <a:ext cx="2697480" cy="438912"/>
+            <a:off x="6208775" y="2103120"/>
+            <a:ext cx="1706879" cy="1234440"/>
           </a:xfrm>
           <a:prstGeom prst="rect">
             <a:avLst/>
           </a:prstGeom>
           <a:solidFill>
-            <a:srgbClr val="1A7048"/>
+            <a:srgbClr val="2E7D4F"/>
           </a:solidFill>
           <a:ln>
             <a:noFill/>
@@ -9953,54 +12398,122 @@
       </p:sp>
       <p:sp>
         <p:nvSpPr>
-          <p:cNvPr id="16" name="TextBox 15"/>
-          <p:cNvSpPr txBox="1"/>
-          <p:nvPr/>
-        </p:nvSpPr>
-        <p:spPr>
-          <a:xfrm>
-            <a:off x="6172200" y="1508760"/>
-            <a:ext cx="2560320" cy="347472"/>
-          </a:xfrm>
-          <a:prstGeom prst="rect">
-            <a:avLst/>
-          </a:prstGeom>
-          <a:noFill/>
-        </p:spPr>
-        <p:txBody>
-          <a:bodyPr wrap="square">
-            <a:spAutoFit/>
-          </a:bodyPr>
-          <a:lstStyle/>
-          <a:p>
-            <a:pPr algn="ctr"/>
-            <a:r>
-              <a:rPr sz="1300" b="1" i="0">
+          <p:cNvPr id="22" name="TextBox 21"/>
+          <p:cNvSpPr txBox="1"/>
+          <p:nvPr/>
+        </p:nvSpPr>
+        <p:spPr>
+          <a:xfrm>
+            <a:off x="6254495" y="2194560"/>
+            <a:ext cx="1615439" cy="411480"/>
+          </a:xfrm>
+          <a:prstGeom prst="rect">
+            <a:avLst/>
+          </a:prstGeom>
+          <a:noFill/>
+        </p:spPr>
+        <p:txBody>
+          <a:bodyPr wrap="square">
+            <a:spAutoFit/>
+          </a:bodyPr>
+          <a:lstStyle/>
+          <a:p>
+            <a:pPr algn="ctr"/>
+            <a:r>
+              <a:rPr sz="1000" b="1" i="0">
                 <a:solidFill>
                   <a:srgbClr val="FFFFFF"/>
                 </a:solidFill>
               </a:rPr>
-              <a:t>Day Of</a:t>
-            </a:r>
-          </a:p>
-        </p:txBody>
-      </p:sp>
-      <p:sp>
-        <p:nvSpPr>
-          <p:cNvPr id="17" name="Rectangle 16"/>
+              <a:t>CENTRAL EGG HUNT</a:t>
+            </a:r>
+          </a:p>
+        </p:txBody>
+      </p:sp>
+      <p:sp>
+        <p:nvSpPr>
+          <p:cNvPr id="23" name="TextBox 22"/>
+          <p:cNvSpPr txBox="1"/>
+          <p:nvPr/>
+        </p:nvSpPr>
+        <p:spPr>
+          <a:xfrm>
+            <a:off x="6254495" y="2633472"/>
+            <a:ext cx="1615439" cy="640080"/>
+          </a:xfrm>
+          <a:prstGeom prst="rect">
+            <a:avLst/>
+          </a:prstGeom>
+          <a:noFill/>
+        </p:spPr>
+        <p:txBody>
+          <a:bodyPr wrap="square">
+            <a:spAutoFit/>
+          </a:bodyPr>
+          <a:lstStyle/>
+          <a:p>
+            <a:pPr algn="ctr"/>
+            <a:r>
+              <a:rPr sz="800" b="0" i="0">
+                <a:solidFill>
+                  <a:srgbClr val="F4F4F4"/>
+                </a:solidFill>
+              </a:rPr>
+              <a:t>Anchors the site at the center</a:t>
+            </a:r>
+          </a:p>
+        </p:txBody>
+      </p:sp>
+      <p:sp>
+        <p:nvSpPr>
+          <p:cNvPr id="24" name="TextBox 23"/>
+          <p:cNvSpPr txBox="1"/>
+          <p:nvPr/>
+        </p:nvSpPr>
+        <p:spPr>
+          <a:xfrm>
+            <a:off x="7897368" y="2450591"/>
+            <a:ext cx="292608" cy="457200"/>
+          </a:xfrm>
+          <a:prstGeom prst="rect">
+            <a:avLst/>
+          </a:prstGeom>
+          <a:noFill/>
+        </p:spPr>
+        <p:txBody>
+          <a:bodyPr wrap="square">
+            <a:spAutoFit/>
+          </a:bodyPr>
+          <a:lstStyle/>
+          <a:p>
+            <a:pPr algn="ctr"/>
+            <a:r>
+              <a:rPr sz="1600" b="1" i="0">
+                <a:solidFill>
+                  <a:srgbClr val="D4A017"/>
+                </a:solidFill>
+              </a:rPr>
+              <a:t>→</a:t>
+            </a:r>
+          </a:p>
+        </p:txBody>
+      </p:sp>
+      <p:sp>
+        <p:nvSpPr>
+          <p:cNvPr id="25" name="Rectangle 24"/>
           <p:cNvSpPr/>
           <p:nvPr/>
         </p:nvSpPr>
         <p:spPr>
           <a:xfrm>
-            <a:off x="6080760" y="1901952"/>
-            <a:ext cx="2697480" cy="4572000"/>
+            <a:off x="8171687" y="2103120"/>
+            <a:ext cx="1706879" cy="1234440"/>
           </a:xfrm>
           <a:prstGeom prst="rect">
             <a:avLst/>
           </a:prstGeom>
           <a:solidFill>
-            <a:srgbClr val="FFFFFF"/>
+            <a:srgbClr val="1A5C38"/>
           </a:solidFill>
           <a:ln>
             <a:noFill/>
@@ -10030,118 +12543,122 @@
       </p:sp>
       <p:sp>
         <p:nvSpPr>
-          <p:cNvPr id="18" name="TextBox 17"/>
-          <p:cNvSpPr txBox="1"/>
-          <p:nvPr/>
-        </p:nvSpPr>
-        <p:spPr>
-          <a:xfrm>
-            <a:off x="6190488" y="1993392"/>
-            <a:ext cx="2514600" cy="4297680"/>
-          </a:xfrm>
-          <a:prstGeom prst="rect">
-            <a:avLst/>
-          </a:prstGeom>
-          <a:noFill/>
-        </p:spPr>
-        <p:txBody>
-          <a:bodyPr wrap="square">
-            <a:spAutoFit/>
-          </a:bodyPr>
-          <a:lstStyle/>
-          <a:p>
-            <a:pPr>
-              <a:spcAft>
-                <a:spcPts val="800"/>
-              </a:spcAft>
-            </a:pPr>
-            <a:r>
-              <a:rPr sz="1200">
-                <a:solidFill>
-                  <a:srgbClr val="2B2B2B"/>
-                </a:solidFill>
-              </a:rPr>
-              <a:t>• Hunt staff briefed on handoff protocol at team check-in</a:t>
-            </a:r>
-          </a:p>
-          <a:p>
-            <a:pPr>
-              <a:spcAft>
-                <a:spcPts val="800"/>
-              </a:spcAft>
-            </a:pPr>
-            <a:r>
-              <a:rPr sz="1200">
-                <a:solidFill>
-                  <a:srgbClr val="2B2B2B"/>
-                </a:solidFill>
-              </a:rPr>
-              <a:t>• Directional signs posted at all hunt exit points</a:t>
-            </a:r>
-          </a:p>
-          <a:p>
-            <a:pPr>
-              <a:spcAft>
-                <a:spcPts val="800"/>
-              </a:spcAft>
-            </a:pPr>
-            <a:r>
-              <a:rPr sz="1200">
-                <a:solidFill>
-                  <a:srgbClr val="2B2B2B"/>
-                </a:solidFill>
-              </a:rPr>
-              <a:t>• Emcee announces race schedule &amp; prize drawing at event open (9 AM)</a:t>
-            </a:r>
-          </a:p>
-          <a:p>
-            <a:pPr>
-              <a:spcAft>
-                <a:spcPts val="800"/>
-              </a:spcAft>
-            </a:pPr>
-            <a:r>
-              <a:rPr sz="1200">
-                <a:solidFill>
-                  <a:srgbClr val="2B2B2B"/>
-                </a:solidFill>
-              </a:rPr>
-              <a:t>• Hunt staff transition to handoff roles as each age group concludes</a:t>
-            </a:r>
-          </a:p>
-          <a:p>
-            <a:pPr>
-              <a:spcAft>
-                <a:spcPts val="800"/>
-              </a:spcAft>
-            </a:pPr>
-            <a:r>
-              <a:rPr sz="1200">
-                <a:solidFill>
-                  <a:srgbClr val="2B2B2B"/>
-                </a:solidFill>
-              </a:rPr>
-              <a:t>• Grand Prize Drawing announced at 12:15 PM from main stage</a:t>
-            </a:r>
-          </a:p>
-        </p:txBody>
-      </p:sp>
-      <p:sp>
-        <p:nvSpPr>
-          <p:cNvPr id="19" name="Rectangle 18"/>
+          <p:cNvPr id="26" name="TextBox 25"/>
+          <p:cNvSpPr txBox="1"/>
+          <p:nvPr/>
+        </p:nvSpPr>
+        <p:spPr>
+          <a:xfrm>
+            <a:off x="8217408" y="2194560"/>
+            <a:ext cx="1615439" cy="411480"/>
+          </a:xfrm>
+          <a:prstGeom prst="rect">
+            <a:avLst/>
+          </a:prstGeom>
+          <a:noFill/>
+        </p:spPr>
+        <p:txBody>
+          <a:bodyPr wrap="square">
+            <a:spAutoFit/>
+          </a:bodyPr>
+          <a:lstStyle/>
+          <a:p>
+            <a:pPr algn="ctr"/>
+            <a:r>
+              <a:rPr sz="1000" b="1" i="0">
+                <a:solidFill>
+                  <a:srgbClr val="FFFFFF"/>
+                </a:solidFill>
+              </a:rPr>
+              <a:t>ANIMAL RACES</a:t>
+            </a:r>
+          </a:p>
+        </p:txBody>
+      </p:sp>
+      <p:sp>
+        <p:nvSpPr>
+          <p:cNvPr id="27" name="TextBox 26"/>
+          <p:cNvSpPr txBox="1"/>
+          <p:nvPr/>
+        </p:nvSpPr>
+        <p:spPr>
+          <a:xfrm>
+            <a:off x="8217408" y="2633472"/>
+            <a:ext cx="1615439" cy="640080"/>
+          </a:xfrm>
+          <a:prstGeom prst="rect">
+            <a:avLst/>
+          </a:prstGeom>
+          <a:noFill/>
+        </p:spPr>
+        <p:txBody>
+          <a:bodyPr wrap="square">
+            <a:spAutoFit/>
+          </a:bodyPr>
+          <a:lstStyle/>
+          <a:p>
+            <a:pPr algn="ctr"/>
+            <a:r>
+              <a:rPr sz="800" b="0" i="0">
+                <a:solidFill>
+                  <a:srgbClr val="F4F4F4"/>
+                </a:solidFill>
+              </a:rPr>
+              <a:t>Flows directly from the hunt</a:t>
+            </a:r>
+          </a:p>
+        </p:txBody>
+      </p:sp>
+      <p:sp>
+        <p:nvSpPr>
+          <p:cNvPr id="28" name="TextBox 27"/>
+          <p:cNvSpPr txBox="1"/>
+          <p:nvPr/>
+        </p:nvSpPr>
+        <p:spPr>
+          <a:xfrm>
+            <a:off x="9860280" y="2450591"/>
+            <a:ext cx="292608" cy="457200"/>
+          </a:xfrm>
+          <a:prstGeom prst="rect">
+            <a:avLst/>
+          </a:prstGeom>
+          <a:noFill/>
+        </p:spPr>
+        <p:txBody>
+          <a:bodyPr wrap="square">
+            <a:spAutoFit/>
+          </a:bodyPr>
+          <a:lstStyle/>
+          <a:p>
+            <a:pPr algn="ctr"/>
+            <a:r>
+              <a:rPr sz="1600" b="1" i="0">
+                <a:solidFill>
+                  <a:srgbClr val="D4A017"/>
+                </a:solidFill>
+              </a:rPr>
+              <a:t>→</a:t>
+            </a:r>
+          </a:p>
+        </p:txBody>
+      </p:sp>
+      <p:sp>
+        <p:nvSpPr>
+          <p:cNvPr id="29" name="Rectangle 28"/>
           <p:cNvSpPr/>
           <p:nvPr/>
         </p:nvSpPr>
         <p:spPr>
           <a:xfrm>
-            <a:off x="8961120" y="1463040"/>
-            <a:ext cx="2697480" cy="438912"/>
+            <a:off x="10134599" y="2103120"/>
+            <a:ext cx="1706879" cy="1234440"/>
           </a:xfrm>
           <a:prstGeom prst="rect">
             <a:avLst/>
           </a:prstGeom>
           <a:solidFill>
-            <a:srgbClr val="4A4A4A"/>
+            <a:srgbClr val="2E7D4F"/>
           </a:solidFill>
           <a:ln>
             <a:noFill/>
@@ -10171,54 +12688,88 @@
       </p:sp>
       <p:sp>
         <p:nvSpPr>
-          <p:cNvPr id="20" name="TextBox 19"/>
-          <p:cNvSpPr txBox="1"/>
-          <p:nvPr/>
-        </p:nvSpPr>
-        <p:spPr>
-          <a:xfrm>
-            <a:off x="9052560" y="1508760"/>
-            <a:ext cx="2560320" cy="347472"/>
-          </a:xfrm>
-          <a:prstGeom prst="rect">
-            <a:avLst/>
-          </a:prstGeom>
-          <a:noFill/>
-        </p:spPr>
-        <p:txBody>
-          <a:bodyPr wrap="square">
-            <a:spAutoFit/>
-          </a:bodyPr>
-          <a:lstStyle/>
-          <a:p>
-            <a:pPr algn="ctr"/>
-            <a:r>
-              <a:rPr sz="1300" b="1" i="0">
+          <p:cNvPr id="30" name="TextBox 29"/>
+          <p:cNvSpPr txBox="1"/>
+          <p:nvPr/>
+        </p:nvSpPr>
+        <p:spPr>
+          <a:xfrm>
+            <a:off x="10180320" y="2194560"/>
+            <a:ext cx="1615439" cy="411480"/>
+          </a:xfrm>
+          <a:prstGeom prst="rect">
+            <a:avLst/>
+          </a:prstGeom>
+          <a:noFill/>
+        </p:spPr>
+        <p:txBody>
+          <a:bodyPr wrap="square">
+            <a:spAutoFit/>
+          </a:bodyPr>
+          <a:lstStyle/>
+          <a:p>
+            <a:pPr algn="ctr"/>
+            <a:r>
+              <a:rPr sz="1000" b="1" i="0">
                 <a:solidFill>
                   <a:srgbClr val="FFFFFF"/>
                 </a:solidFill>
               </a:rPr>
-              <a:t>Post-Event</a:t>
-            </a:r>
-          </a:p>
-        </p:txBody>
-      </p:sp>
-      <p:sp>
-        <p:nvSpPr>
-          <p:cNvPr id="21" name="Rectangle 20"/>
+              <a:t>PERIPHERY LOOP</a:t>
+            </a:r>
+          </a:p>
+        </p:txBody>
+      </p:sp>
+      <p:sp>
+        <p:nvSpPr>
+          <p:cNvPr id="31" name="TextBox 30"/>
+          <p:cNvSpPr txBox="1"/>
+          <p:nvPr/>
+        </p:nvSpPr>
+        <p:spPr>
+          <a:xfrm>
+            <a:off x="10180320" y="2633472"/>
+            <a:ext cx="1615439" cy="640080"/>
+          </a:xfrm>
+          <a:prstGeom prst="rect">
+            <a:avLst/>
+          </a:prstGeom>
+          <a:noFill/>
+        </p:spPr>
+        <p:txBody>
+          <a:bodyPr wrap="square">
+            <a:spAutoFit/>
+          </a:bodyPr>
+          <a:lstStyle/>
+          <a:p>
+            <a:pPr algn="ctr"/>
+            <a:r>
+              <a:rPr sz="800" b="0" i="0">
+                <a:solidFill>
+                  <a:srgbClr val="F4F4F4"/>
+                </a:solidFill>
+              </a:rPr>
+              <a:t>Play Zone, Tot Spot, Color Blast — loop to exit</a:t>
+            </a:r>
+          </a:p>
+        </p:txBody>
+      </p:sp>
+      <p:sp>
+        <p:nvSpPr>
+          <p:cNvPr id="32" name="Rectangle 31"/>
           <p:cNvSpPr/>
           <p:nvPr/>
         </p:nvSpPr>
         <p:spPr>
           <a:xfrm>
-            <a:off x="8961120" y="1901952"/>
-            <a:ext cx="2697480" cy="4572000"/>
+            <a:off x="320040" y="3611880"/>
+            <a:ext cx="5577840" cy="384048"/>
           </a:xfrm>
           <a:prstGeom prst="rect">
             <a:avLst/>
           </a:prstGeom>
           <a:solidFill>
-            <a:srgbClr val="FFFFFF"/>
+            <a:srgbClr val="1A5C38"/>
           </a:solidFill>
           <a:ln>
             <a:noFill/>
@@ -10248,14 +12799,48 @@
       </p:sp>
       <p:sp>
         <p:nvSpPr>
-          <p:cNvPr id="22" name="TextBox 21"/>
-          <p:cNvSpPr txBox="1"/>
-          <p:nvPr/>
-        </p:nvSpPr>
-        <p:spPr>
-          <a:xfrm>
-            <a:off x="9070848" y="1993392"/>
-            <a:ext cx="2514600" cy="4297680"/>
+          <p:cNvPr id="33" name="TextBox 32"/>
+          <p:cNvSpPr txBox="1"/>
+          <p:nvPr/>
+        </p:nvSpPr>
+        <p:spPr>
+          <a:xfrm>
+            <a:off x="457200" y="3666744"/>
+            <a:ext cx="5394959" cy="320040"/>
+          </a:xfrm>
+          <a:prstGeom prst="rect">
+            <a:avLst/>
+          </a:prstGeom>
+          <a:noFill/>
+        </p:spPr>
+        <p:txBody>
+          <a:bodyPr wrap="square">
+            <a:spAutoFit/>
+          </a:bodyPr>
+          <a:lstStyle/>
+          <a:p>
+            <a:pPr algn="l"/>
+            <a:r>
+              <a:rPr sz="1400" b="1" i="0">
+                <a:solidFill>
+                  <a:srgbClr val="FFFFFF"/>
+                </a:solidFill>
+              </a:rPr>
+              <a:t>Design Principles</a:t>
+            </a:r>
+          </a:p>
+        </p:txBody>
+      </p:sp>
+      <p:sp>
+        <p:nvSpPr>
+          <p:cNvPr id="34" name="TextBox 33"/>
+          <p:cNvSpPr txBox="1"/>
+          <p:nvPr/>
+        </p:nvSpPr>
+        <p:spPr>
+          <a:xfrm>
+            <a:off x="411479" y="4050791"/>
+            <a:ext cx="5394959" cy="2359152"/>
           </a:xfrm>
           <a:prstGeom prst="rect">
             <a:avLst/>
@@ -10270,61 +12855,221 @@
           <a:p>
             <a:pPr>
               <a:spcAft>
-                <a:spcPts val="800"/>
+                <a:spcPts val="500"/>
               </a:spcAft>
             </a:pPr>
             <a:r>
-              <a:rPr sz="1200">
+              <a:rPr sz="1300">
                 <a:solidFill>
                   <a:srgbClr val="2B2B2B"/>
                 </a:solidFill>
               </a:rPr>
-              <a:t>• Vendor satisfaction survey (5 questions, emailed within 48 hrs)</a:t>
+              <a:t>• Central Egg Hunt anchors the site — everything else radiates from it</a:t>
             </a:r>
           </a:p>
           <a:p>
             <a:pPr>
               <a:spcAft>
-                <a:spcPts val="800"/>
+                <a:spcPts val="500"/>
               </a:spcAft>
             </a:pPr>
             <a:r>
-              <a:rPr sz="1200">
+              <a:rPr sz="1300">
                 <a:solidFill>
                   <a:srgbClr val="2B2B2B"/>
                 </a:solidFill>
               </a:rPr>
-              <a:t>• Staff debrief — what worked, what didn't</a:t>
+              <a:t>• Entrance A &amp; B control traffic flow and improve child safety / headcount accountability</a:t>
             </a:r>
           </a:p>
           <a:p>
             <a:pPr>
               <a:spcAft>
-                <a:spcPts val="800"/>
+                <a:spcPts val="500"/>
               </a:spcAft>
             </a:pPr>
             <a:r>
-              <a:rPr sz="1200">
+              <a:rPr sz="1300">
                 <a:solidFill>
                   <a:srgbClr val="2B2B2B"/>
                 </a:solidFill>
               </a:rPr>
-              <a:t>• Document raffle ticket submission rate as retention proxy</a:t>
+              <a:t>• Great Egg Walk sets the tone and starts every family on the same guided path</a:t>
             </a:r>
           </a:p>
           <a:p>
             <a:pPr>
               <a:spcAft>
-                <a:spcPts val="800"/>
+                <a:spcPts val="500"/>
               </a:spcAft>
             </a:pPr>
             <a:r>
-              <a:rPr sz="1200">
+              <a:rPr sz="1300">
                 <a:solidFill>
                   <a:srgbClr val="2B2B2B"/>
                 </a:solidFill>
               </a:rPr>
-              <a:t>• Present findings to leadership ahead of next year's planning</a:t>
+              <a:t>• Periphery attractions (bouncy houses, Tot Spot) sit along the return route — not off to the side</a:t>
+            </a:r>
+          </a:p>
+        </p:txBody>
+      </p:sp>
+      <p:sp>
+        <p:nvSpPr>
+          <p:cNvPr id="35" name="Rectangle 34"/>
+          <p:cNvSpPr/>
+          <p:nvPr/>
+        </p:nvSpPr>
+        <p:spPr>
+          <a:xfrm>
+            <a:off x="6080760" y="3611880"/>
+            <a:ext cx="5806440" cy="384048"/>
+          </a:xfrm>
+          <a:prstGeom prst="rect">
+            <a:avLst/>
+          </a:prstGeom>
+          <a:solidFill>
+            <a:srgbClr val="B03A2E"/>
+          </a:solidFill>
+          <a:ln>
+            <a:noFill/>
+          </a:ln>
+        </p:spPr>
+        <p:style>
+          <a:lnRef idx="1">
+            <a:schemeClr val="accent1"/>
+          </a:lnRef>
+          <a:fillRef idx="3">
+            <a:schemeClr val="accent1"/>
+          </a:fillRef>
+          <a:effectRef idx="2">
+            <a:schemeClr val="accent1"/>
+          </a:effectRef>
+          <a:fontRef idx="minor">
+            <a:schemeClr val="lt1"/>
+          </a:fontRef>
+        </p:style>
+        <p:txBody>
+          <a:bodyPr rtlCol="0" anchor="ctr"/>
+          <a:lstStyle/>
+          <a:p>
+            <a:pPr algn="ctr"/>
+          </a:p>
+        </p:txBody>
+      </p:sp>
+      <p:sp>
+        <p:nvSpPr>
+          <p:cNvPr id="36" name="TextBox 35"/>
+          <p:cNvSpPr txBox="1"/>
+          <p:nvPr/>
+        </p:nvSpPr>
+        <p:spPr>
+          <a:xfrm>
+            <a:off x="6217920" y="3666744"/>
+            <a:ext cx="5623559" cy="320040"/>
+          </a:xfrm>
+          <a:prstGeom prst="rect">
+            <a:avLst/>
+          </a:prstGeom>
+          <a:noFill/>
+        </p:spPr>
+        <p:txBody>
+          <a:bodyPr wrap="square">
+            <a:spAutoFit/>
+          </a:bodyPr>
+          <a:lstStyle/>
+          <a:p>
+            <a:pPr algn="l"/>
+            <a:r>
+              <a:rPr sz="1400" b="1" i="0">
+                <a:solidFill>
+                  <a:srgbClr val="FFFFFF"/>
+                </a:solidFill>
+              </a:rPr>
+              <a:t>Why It Works</a:t>
+            </a:r>
+          </a:p>
+        </p:txBody>
+      </p:sp>
+      <p:sp>
+        <p:nvSpPr>
+          <p:cNvPr id="37" name="TextBox 36"/>
+          <p:cNvSpPr txBox="1"/>
+          <p:nvPr/>
+        </p:nvSpPr>
+        <p:spPr>
+          <a:xfrm>
+            <a:off x="6172200" y="4050791"/>
+            <a:ext cx="5623559" cy="2359152"/>
+          </a:xfrm>
+          <a:prstGeom prst="rect">
+            <a:avLst/>
+          </a:prstGeom>
+          <a:noFill/>
+        </p:spPr>
+        <p:txBody>
+          <a:bodyPr wrap="square">
+            <a:spAutoFit/>
+          </a:bodyPr>
+          <a:lstStyle/>
+          <a:p>
+            <a:pPr>
+              <a:spcAft>
+                <a:spcPts val="500"/>
+              </a:spcAft>
+            </a:pPr>
+            <a:r>
+              <a:rPr sz="1300">
+                <a:solidFill>
+                  <a:srgbClr val="2B2B2B"/>
+                </a:solidFill>
+              </a:rPr>
+              <a:t>• Directly solves Finding 2 — activities stop being silos and become one connected path</a:t>
+            </a:r>
+          </a:p>
+          <a:p>
+            <a:pPr>
+              <a:spcAft>
+                <a:spcPts val="500"/>
+              </a:spcAft>
+            </a:pPr>
+            <a:r>
+              <a:rPr sz="1300">
+                <a:solidFill>
+                  <a:srgbClr val="2B2B2B"/>
+                </a:solidFill>
+              </a:rPr>
+              <a:t>• Families physically pass every vendor and attraction before reaching the exit</a:t>
+            </a:r>
+          </a:p>
+          <a:p>
+            <a:pPr>
+              <a:spcAft>
+                <a:spcPts val="500"/>
+              </a:spcAft>
+            </a:pPr>
+            <a:r>
+              <a:rPr sz="1300">
+                <a:solidFill>
+                  <a:srgbClr val="2B2B2B"/>
+                </a:solidFill>
+              </a:rPr>
+              <a:t>• No new attractions needed — this is a resequencing of the existing footprint</a:t>
+            </a:r>
+          </a:p>
+          <a:p>
+            <a:pPr>
+              <a:spcAft>
+                <a:spcPts val="500"/>
+              </a:spcAft>
+            </a:pPr>
+            <a:r>
+              <a:rPr sz="1300">
+                <a:solidFill>
+                  <a:srgbClr val="2B2B2B"/>
+                </a:solidFill>
+              </a:rPr>
+              <a:t>• Sets up Pillar 2: the punch/bingo card gives families a reason to complete the loop, not just walk it</a:t>
             </a:r>
           </a:p>
         </p:txBody>
@@ -10505,7 +13250,7 @@
                   <a:srgbClr val="FFFFFF"/>
                 </a:solidFill>
               </a:rPr>
-              <a:t>Staffing &amp; Budget</a:t>
+              <a:t>The Recommendation — Pillar 2</a:t>
             </a:r>
           </a:p>
         </p:txBody>
@@ -10539,7 +13284,7 @@
                   <a:srgbClr val="D4A017"/>
                 </a:solidFill>
               </a:rPr>
-              <a:t>Minimal New Investment — Maximum Leverage of Existing Resources</a:t>
+              <a:t>Gamification &amp; Retention Incentives</a:t>
             </a:r>
           </a:p>
         </p:txBody>
@@ -10552,8 +13297,85 @@
         </p:nvSpPr>
         <p:spPr>
           <a:xfrm>
-            <a:off x="320040" y="1463040"/>
-            <a:ext cx="5486400" cy="384048"/>
+            <a:off x="320040" y="1417320"/>
+            <a:ext cx="11521440" cy="502920"/>
+          </a:xfrm>
+          <a:prstGeom prst="rect">
+            <a:avLst/>
+          </a:prstGeom>
+          <a:solidFill>
+            <a:srgbClr val="FFFFFF"/>
+          </a:solidFill>
+          <a:ln>
+            <a:noFill/>
+          </a:ln>
+        </p:spPr>
+        <p:style>
+          <a:lnRef idx="1">
+            <a:schemeClr val="accent1"/>
+          </a:lnRef>
+          <a:fillRef idx="3">
+            <a:schemeClr val="accent1"/>
+          </a:fillRef>
+          <a:effectRef idx="2">
+            <a:schemeClr val="accent1"/>
+          </a:effectRef>
+          <a:fontRef idx="minor">
+            <a:schemeClr val="lt1"/>
+          </a:fontRef>
+        </p:style>
+        <p:txBody>
+          <a:bodyPr rtlCol="0" anchor="ctr"/>
+          <a:lstStyle/>
+          <a:p>
+            <a:pPr algn="ctr"/>
+          </a:p>
+        </p:txBody>
+      </p:sp>
+      <p:sp>
+        <p:nvSpPr>
+          <p:cNvPr id="8" name="TextBox 7"/>
+          <p:cNvSpPr txBox="1"/>
+          <p:nvPr/>
+        </p:nvSpPr>
+        <p:spPr>
+          <a:xfrm>
+            <a:off x="457200" y="1463040"/>
+            <a:ext cx="11247120" cy="411480"/>
+          </a:xfrm>
+          <a:prstGeom prst="rect">
+            <a:avLst/>
+          </a:prstGeom>
+          <a:noFill/>
+        </p:spPr>
+        <p:txBody>
+          <a:bodyPr wrap="square">
+            <a:spAutoFit/>
+          </a:bodyPr>
+          <a:lstStyle/>
+          <a:p>
+            <a:pPr algn="ctr"/>
+            <a:r>
+              <a:rPr sz="1200" b="0" i="1">
+                <a:solidFill>
+                  <a:srgbClr val="1A5C38"/>
+                </a:solidFill>
+              </a:rPr>
+              <a:t>The raffle ticket mechanic already exists. We expand it into a layered system that rewards families for completing the full journey — not just picking a race winner.</a:t>
+            </a:r>
+          </a:p>
+        </p:txBody>
+      </p:sp>
+      <p:sp>
+        <p:nvSpPr>
+          <p:cNvPr id="9" name="Rectangle 8"/>
+          <p:cNvSpPr/>
+          <p:nvPr/>
+        </p:nvSpPr>
+        <p:spPr>
+          <a:xfrm>
+            <a:off x="320040" y="2103120"/>
+            <a:ext cx="5577840" cy="384048"/>
           </a:xfrm>
           <a:prstGeom prst="rect">
             <a:avLst/>
@@ -10589,14 +13411,14 @@
       </p:sp>
       <p:sp>
         <p:nvSpPr>
-          <p:cNvPr id="8" name="TextBox 7"/>
-          <p:cNvSpPr txBox="1"/>
-          <p:nvPr/>
-        </p:nvSpPr>
-        <p:spPr>
-          <a:xfrm>
-            <a:off x="457200" y="1517904"/>
-            <a:ext cx="5303520" cy="320040"/>
+          <p:cNvPr id="10" name="TextBox 9"/>
+          <p:cNvSpPr txBox="1"/>
+          <p:nvPr/>
+        </p:nvSpPr>
+        <p:spPr>
+          <a:xfrm>
+            <a:off x="457200" y="2157984"/>
+            <a:ext cx="5394959" cy="320040"/>
           </a:xfrm>
           <a:prstGeom prst="rect">
             <a:avLst/>
@@ -10616,21 +13438,21 @@
                   <a:srgbClr val="FFFFFF"/>
                 </a:solidFill>
               </a:rPr>
-              <a:t>Staffing — Redeployment Model</a:t>
-            </a:r>
-          </a:p>
-        </p:txBody>
-      </p:sp>
-      <p:sp>
-        <p:nvSpPr>
-          <p:cNvPr id="9" name="TextBox 8"/>
-          <p:cNvSpPr txBox="1"/>
-          <p:nvPr/>
-        </p:nvSpPr>
-        <p:spPr>
-          <a:xfrm>
-            <a:off x="411479" y="1901952"/>
-            <a:ext cx="5303520" cy="3639312"/>
+              <a:t>Grand Prize Drawing</a:t>
+            </a:r>
+          </a:p>
+        </p:txBody>
+      </p:sp>
+      <p:sp>
+        <p:nvSpPr>
+          <p:cNvPr id="11" name="TextBox 10"/>
+          <p:cNvSpPr txBox="1"/>
+          <p:nvPr/>
+        </p:nvSpPr>
+        <p:spPr>
+          <a:xfrm>
+            <a:off x="411479" y="2542032"/>
+            <a:ext cx="5394959" cy="1490472"/>
           </a:xfrm>
           <a:prstGeom prst="rect">
             <a:avLst/>
@@ -10654,7 +13476,7 @@
                   <a:srgbClr val="2B2B2B"/>
                 </a:solidFill>
               </a:rPr>
-              <a:t>• No new hires required</a:t>
+              <a:t>• Announced at event open (9 AM) — families know upfront it's worth staying for</a:t>
             </a:r>
           </a:p>
           <a:p>
@@ -10669,7 +13491,7 @@
                   <a:srgbClr val="2B2B2B"/>
                 </a:solidFill>
               </a:rPr>
-              <a:t>• Egg hunt staff (already scheduled) transition to handoff roles as each age group finishes</a:t>
+              <a:t>• High-value prize sourced via local business sponsorship — zero cost to Town</a:t>
             </a:r>
           </a:p>
           <a:p>
@@ -10684,7 +13506,7 @@
                   <a:srgbClr val="2B2B2B"/>
                 </a:solidFill>
               </a:rPr>
-              <a:t>• 1 staff per hunt exit point — stationed for 15 min post-hunt</a:t>
+              <a:t>• Drawing held at 12:15 PM from main stage</a:t>
             </a:r>
           </a:p>
           <a:p>
@@ -10699,9 +13521,109 @@
                   <a:srgbClr val="2B2B2B"/>
                 </a:solidFill>
               </a:rPr>
-              <a:t>• Emcee incorporates race schedule &amp; prize drawing into existing script</a:t>
-            </a:r>
-          </a:p>
+              <a:t>• Anchors the whole incentive system</a:t>
+            </a:r>
+          </a:p>
+        </p:txBody>
+      </p:sp>
+      <p:sp>
+        <p:nvSpPr>
+          <p:cNvPr id="12" name="Rectangle 11"/>
+          <p:cNvSpPr/>
+          <p:nvPr/>
+        </p:nvSpPr>
+        <p:spPr>
+          <a:xfrm>
+            <a:off x="6080759" y="2103120"/>
+            <a:ext cx="5577840" cy="384048"/>
+          </a:xfrm>
+          <a:prstGeom prst="rect">
+            <a:avLst/>
+          </a:prstGeom>
+          <a:solidFill>
+            <a:srgbClr val="2E7D4F"/>
+          </a:solidFill>
+          <a:ln>
+            <a:noFill/>
+          </a:ln>
+        </p:spPr>
+        <p:style>
+          <a:lnRef idx="1">
+            <a:schemeClr val="accent1"/>
+          </a:lnRef>
+          <a:fillRef idx="3">
+            <a:schemeClr val="accent1"/>
+          </a:fillRef>
+          <a:effectRef idx="2">
+            <a:schemeClr val="accent1"/>
+          </a:effectRef>
+          <a:fontRef idx="minor">
+            <a:schemeClr val="lt1"/>
+          </a:fontRef>
+        </p:style>
+        <p:txBody>
+          <a:bodyPr rtlCol="0" anchor="ctr"/>
+          <a:lstStyle/>
+          <a:p>
+            <a:pPr algn="ctr"/>
+          </a:p>
+        </p:txBody>
+      </p:sp>
+      <p:sp>
+        <p:nvSpPr>
+          <p:cNvPr id="13" name="TextBox 12"/>
+          <p:cNvSpPr txBox="1"/>
+          <p:nvPr/>
+        </p:nvSpPr>
+        <p:spPr>
+          <a:xfrm>
+            <a:off x="6217920" y="2157984"/>
+            <a:ext cx="5394959" cy="320040"/>
+          </a:xfrm>
+          <a:prstGeom prst="rect">
+            <a:avLst/>
+          </a:prstGeom>
+          <a:noFill/>
+        </p:spPr>
+        <p:txBody>
+          <a:bodyPr wrap="square">
+            <a:spAutoFit/>
+          </a:bodyPr>
+          <a:lstStyle/>
+          <a:p>
+            <a:pPr algn="l"/>
+            <a:r>
+              <a:rPr sz="1400" b="1" i="0">
+                <a:solidFill>
+                  <a:srgbClr val="FFFFFF"/>
+                </a:solidFill>
+              </a:rPr>
+              <a:t>Punch + Bingo Card</a:t>
+            </a:r>
+          </a:p>
+        </p:txBody>
+      </p:sp>
+      <p:sp>
+        <p:nvSpPr>
+          <p:cNvPr id="14" name="TextBox 13"/>
+          <p:cNvSpPr txBox="1"/>
+          <p:nvPr/>
+        </p:nvSpPr>
+        <p:spPr>
+          <a:xfrm>
+            <a:off x="6172199" y="2542032"/>
+            <a:ext cx="5394959" cy="1490472"/>
+          </a:xfrm>
+          <a:prstGeom prst="rect">
+            <a:avLst/>
+          </a:prstGeom>
+          <a:noFill/>
+        </p:spPr>
+        <p:txBody>
+          <a:bodyPr wrap="square">
+            <a:spAutoFit/>
+          </a:bodyPr>
+          <a:lstStyle/>
           <a:p>
             <a:pPr>
               <a:spcAft>
@@ -10714,7 +13636,7 @@
                   <a:srgbClr val="2B2B2B"/>
                 </a:solidFill>
               </a:rPr>
-              <a:t>• Event supervisor oversees handoff timing and race announcement coordination</a:t>
+              <a:t>• One combined card, handed out at Entrance A / B</a:t>
             </a:r>
           </a:p>
           <a:p>
@@ -10729,27 +13651,57 @@
                   <a:srgbClr val="2B2B2B"/>
                 </a:solidFill>
               </a:rPr>
-              <a:t>• Assumption: Current staffing levels cover existing hunt operations</a:t>
-            </a:r>
-          </a:p>
-        </p:txBody>
-      </p:sp>
-      <p:sp>
-        <p:nvSpPr>
-          <p:cNvPr id="10" name="Rectangle 9"/>
+              <a:t>• Punches for periphery attractions (Play Zone, Tot Spot, Color Blast)</a:t>
+            </a:r>
+          </a:p>
+          <a:p>
+            <a:pPr>
+              <a:spcAft>
+                <a:spcPts val="500"/>
+              </a:spcAft>
+            </a:pPr>
+            <a:r>
+              <a:rPr sz="1300">
+                <a:solidFill>
+                  <a:srgbClr val="2B2B2B"/>
+                </a:solidFill>
+              </a:rPr>
+              <a:t>• Bingo squares for vendor &amp; Town partner interactions</a:t>
+            </a:r>
+          </a:p>
+          <a:p>
+            <a:pPr>
+              <a:spcAft>
+                <a:spcPts val="500"/>
+              </a:spcAft>
+            </a:pPr>
+            <a:r>
+              <a:rPr sz="1300">
+                <a:solidFill>
+                  <a:srgbClr val="2B2B2B"/>
+                </a:solidFill>
+              </a:rPr>
+              <a:t>• Completed card = bonus raffle ticket at the drawing table</a:t>
+            </a:r>
+          </a:p>
+        </p:txBody>
+      </p:sp>
+      <p:sp>
+        <p:nvSpPr>
+          <p:cNvPr id="15" name="Rectangle 14"/>
           <p:cNvSpPr/>
           <p:nvPr/>
         </p:nvSpPr>
         <p:spPr>
           <a:xfrm>
-            <a:off x="5989320" y="1463040"/>
-            <a:ext cx="5897880" cy="4114800"/>
+            <a:off x="320040" y="4206240"/>
+            <a:ext cx="5577840" cy="384048"/>
           </a:xfrm>
           <a:prstGeom prst="rect">
             <a:avLst/>
           </a:prstGeom>
           <a:solidFill>
-            <a:srgbClr val="FFFFFF"/>
+            <a:srgbClr val="B03A2E"/>
           </a:solidFill>
           <a:ln>
             <a:noFill/>
@@ -10779,20 +13731,137 @@
       </p:sp>
       <p:sp>
         <p:nvSpPr>
-          <p:cNvPr id="11" name="Rectangle 10"/>
+          <p:cNvPr id="16" name="TextBox 15"/>
+          <p:cNvSpPr txBox="1"/>
+          <p:nvPr/>
+        </p:nvSpPr>
+        <p:spPr>
+          <a:xfrm>
+            <a:off x="457200" y="4261103"/>
+            <a:ext cx="5394959" cy="320040"/>
+          </a:xfrm>
+          <a:prstGeom prst="rect">
+            <a:avLst/>
+          </a:prstGeom>
+          <a:noFill/>
+        </p:spPr>
+        <p:txBody>
+          <a:bodyPr wrap="square">
+            <a:spAutoFit/>
+          </a:bodyPr>
+          <a:lstStyle/>
+          <a:p>
+            <a:pPr algn="l"/>
+            <a:r>
+              <a:rPr sz="1400" b="1" i="0">
+                <a:solidFill>
+                  <a:srgbClr val="FFFFFF"/>
+                </a:solidFill>
+              </a:rPr>
+              <a:t>Hidden Golden Eggs</a:t>
+            </a:r>
+          </a:p>
+        </p:txBody>
+      </p:sp>
+      <p:sp>
+        <p:nvSpPr>
+          <p:cNvPr id="17" name="TextBox 16"/>
+          <p:cNvSpPr txBox="1"/>
+          <p:nvPr/>
+        </p:nvSpPr>
+        <p:spPr>
+          <a:xfrm>
+            <a:off x="411479" y="4645152"/>
+            <a:ext cx="5394959" cy="1490472"/>
+          </a:xfrm>
+          <a:prstGeom prst="rect">
+            <a:avLst/>
+          </a:prstGeom>
+          <a:noFill/>
+        </p:spPr>
+        <p:txBody>
+          <a:bodyPr wrap="square">
+            <a:spAutoFit/>
+          </a:bodyPr>
+          <a:lstStyle/>
+          <a:p>
+            <a:pPr>
+              <a:spcAft>
+                <a:spcPts val="500"/>
+              </a:spcAft>
+            </a:pPr>
+            <a:r>
+              <a:rPr sz="1300">
+                <a:solidFill>
+                  <a:srgbClr val="2B2B2B"/>
+                </a:solidFill>
+              </a:rPr>
+              <a:t>• Limited golden eggs hidden across the full venue footprint</a:t>
+            </a:r>
+          </a:p>
+          <a:p>
+            <a:pPr>
+              <a:spcAft>
+                <a:spcPts val="500"/>
+              </a:spcAft>
+            </a:pPr>
+            <a:r>
+              <a:rPr sz="1300">
+                <a:solidFill>
+                  <a:srgbClr val="2B2B2B"/>
+                </a:solidFill>
+              </a:rPr>
+              <a:t>• Separate from the timed age-group hunts — findable all morning</a:t>
+            </a:r>
+          </a:p>
+          <a:p>
+            <a:pPr>
+              <a:spcAft>
+                <a:spcPts val="500"/>
+              </a:spcAft>
+            </a:pPr>
+            <a:r>
+              <a:rPr sz="1300">
+                <a:solidFill>
+                  <a:srgbClr val="2B2B2B"/>
+                </a:solidFill>
+              </a:rPr>
+              <a:t>• Each egg redeems for bonus raffle tickets</a:t>
+            </a:r>
+          </a:p>
+          <a:p>
+            <a:pPr>
+              <a:spcAft>
+                <a:spcPts val="500"/>
+              </a:spcAft>
+            </a:pPr>
+            <a:r>
+              <a:rPr sz="1300">
+                <a:solidFill>
+                  <a:srgbClr val="2B2B2B"/>
+                </a:solidFill>
+              </a:rPr>
+              <a:t>• Pulls families into every corner of the site, not just the center</a:t>
+            </a:r>
+          </a:p>
+        </p:txBody>
+      </p:sp>
+      <p:sp>
+        <p:nvSpPr>
+          <p:cNvPr id="18" name="Rectangle 17"/>
           <p:cNvSpPr/>
           <p:nvPr/>
         </p:nvSpPr>
         <p:spPr>
           <a:xfrm>
-            <a:off x="5989320" y="1463040"/>
-            <a:ext cx="5897880" cy="384048"/>
+            <a:off x="6080759" y="4206240"/>
+            <a:ext cx="5577840" cy="384048"/>
           </a:xfrm>
           <a:prstGeom prst="rect">
             <a:avLst/>
           </a:prstGeom>
           <a:solidFill>
-            <a:srgbClr val="1A5C38"/>
+            <a:srgbClr val="5D4E00"/>
           </a:solidFill>
           <a:ln>
             <a:noFill/>
@@ -10822,14 +13891,14 @@
       </p:sp>
       <p:sp>
         <p:nvSpPr>
-          <p:cNvPr id="12" name="TextBox 11"/>
-          <p:cNvSpPr txBox="1"/>
-          <p:nvPr/>
-        </p:nvSpPr>
-        <p:spPr>
-          <a:xfrm>
-            <a:off x="6126480" y="1508760"/>
-            <a:ext cx="5669280" cy="320040"/>
+          <p:cNvPr id="19" name="TextBox 18"/>
+          <p:cNvSpPr txBox="1"/>
+          <p:nvPr/>
+        </p:nvSpPr>
+        <p:spPr>
+          <a:xfrm>
+            <a:off x="6217920" y="4261103"/>
+            <a:ext cx="5394959" cy="320040"/>
           </a:xfrm>
           <a:prstGeom prst="rect">
             <a:avLst/>
@@ -10849,306 +13918,90 @@
                   <a:srgbClr val="FFFFFF"/>
                 </a:solidFill>
               </a:rPr>
-              <a:t>Budget — Enhancement Cost</a:t>
-            </a:r>
-          </a:p>
-        </p:txBody>
-      </p:sp>
-      <p:sp>
-        <p:nvSpPr>
-          <p:cNvPr id="13" name="Rectangle 12"/>
-          <p:cNvSpPr/>
-          <p:nvPr/>
-        </p:nvSpPr>
-        <p:spPr>
-          <a:xfrm>
-            <a:off x="5989320" y="1965960"/>
-            <a:ext cx="5897880" cy="384048"/>
-          </a:xfrm>
-          <a:prstGeom prst="rect">
-            <a:avLst/>
-          </a:prstGeom>
-          <a:solidFill>
-            <a:srgbClr val="FFFFFF"/>
-          </a:solidFill>
-          <a:ln>
-            <a:noFill/>
-          </a:ln>
-        </p:spPr>
-        <p:style>
-          <a:lnRef idx="1">
-            <a:schemeClr val="accent1"/>
-          </a:lnRef>
-          <a:fillRef idx="3">
-            <a:schemeClr val="accent1"/>
-          </a:fillRef>
-          <a:effectRef idx="2">
-            <a:schemeClr val="accent1"/>
-          </a:effectRef>
-          <a:fontRef idx="minor">
-            <a:schemeClr val="lt1"/>
-          </a:fontRef>
-        </p:style>
-        <p:txBody>
-          <a:bodyPr rtlCol="0" anchor="ctr"/>
-          <a:lstStyle/>
-          <a:p>
-            <a:pPr algn="ctr"/>
-          </a:p>
-        </p:txBody>
-      </p:sp>
-      <p:sp>
-        <p:nvSpPr>
-          <p:cNvPr id="14" name="TextBox 13"/>
-          <p:cNvSpPr txBox="1"/>
-          <p:nvPr/>
-        </p:nvSpPr>
-        <p:spPr>
-          <a:xfrm>
-            <a:off x="6126480" y="2029967"/>
-            <a:ext cx="4114800" cy="292608"/>
-          </a:xfrm>
-          <a:prstGeom prst="rect">
-            <a:avLst/>
-          </a:prstGeom>
-          <a:noFill/>
-        </p:spPr>
-        <p:txBody>
-          <a:bodyPr wrap="square">
-            <a:spAutoFit/>
-          </a:bodyPr>
-          <a:lstStyle/>
-          <a:p>
-            <a:pPr algn="l"/>
-            <a:r>
-              <a:rPr sz="1200" b="0" i="0">
+              <a:t>Race Winning Mechanic</a:t>
+            </a:r>
+          </a:p>
+        </p:txBody>
+      </p:sp>
+      <p:sp>
+        <p:nvSpPr>
+          <p:cNvPr id="20" name="TextBox 19"/>
+          <p:cNvSpPr txBox="1"/>
+          <p:nvPr/>
+        </p:nvSpPr>
+        <p:spPr>
+          <a:xfrm>
+            <a:off x="6172199" y="4645152"/>
+            <a:ext cx="5394959" cy="1490472"/>
+          </a:xfrm>
+          <a:prstGeom prst="rect">
+            <a:avLst/>
+          </a:prstGeom>
+          <a:noFill/>
+        </p:spPr>
+        <p:txBody>
+          <a:bodyPr wrap="square">
+            <a:spAutoFit/>
+          </a:bodyPr>
+          <a:lstStyle/>
+          <a:p>
+            <a:pPr>
+              <a:spcAft>
+                <a:spcPts val="500"/>
+              </a:spcAft>
+            </a:pPr>
+            <a:r>
+              <a:rPr sz="1300">
                 <a:solidFill>
                   <a:srgbClr val="2B2B2B"/>
                 </a:solidFill>
               </a:rPr>
-              <a:t>Directional signage (4–6 signs)</a:t>
-            </a:r>
-          </a:p>
-        </p:txBody>
-      </p:sp>
-      <p:sp>
-        <p:nvSpPr>
-          <p:cNvPr id="15" name="TextBox 14"/>
-          <p:cNvSpPr txBox="1"/>
-          <p:nvPr/>
-        </p:nvSpPr>
-        <p:spPr>
-          <a:xfrm>
-            <a:off x="9921240" y="2029967"/>
-            <a:ext cx="1828800" cy="292608"/>
-          </a:xfrm>
-          <a:prstGeom prst="rect">
-            <a:avLst/>
-          </a:prstGeom>
-          <a:noFill/>
-        </p:spPr>
-        <p:txBody>
-          <a:bodyPr wrap="square">
-            <a:spAutoFit/>
-          </a:bodyPr>
-          <a:lstStyle/>
-          <a:p>
-            <a:pPr algn="r"/>
-            <a:r>
-              <a:rPr sz="1200" b="0" i="0">
+              <a:t>• Existing mechanic: correct race picks earn raffle tickets</a:t>
+            </a:r>
+          </a:p>
+          <a:p>
+            <a:pPr>
+              <a:spcAft>
+                <a:spcPts val="500"/>
+              </a:spcAft>
+            </a:pPr>
+            <a:r>
+              <a:rPr sz="1300">
                 <a:solidFill>
                   <a:srgbClr val="2B2B2B"/>
                 </a:solidFill>
               </a:rPr>
-              <a:t>$150 – $300</a:t>
-            </a:r>
-          </a:p>
-        </p:txBody>
-      </p:sp>
-      <p:sp>
-        <p:nvSpPr>
-          <p:cNvPr id="16" name="Rectangle 15"/>
-          <p:cNvSpPr/>
-          <p:nvPr/>
-        </p:nvSpPr>
-        <p:spPr>
-          <a:xfrm>
-            <a:off x="5989320" y="2350008"/>
-            <a:ext cx="5897880" cy="384048"/>
-          </a:xfrm>
-          <a:prstGeom prst="rect">
-            <a:avLst/>
-          </a:prstGeom>
-          <a:solidFill>
-            <a:srgbClr val="F4F4F4"/>
-          </a:solidFill>
-          <a:ln>
-            <a:noFill/>
-          </a:ln>
-        </p:spPr>
-        <p:style>
-          <a:lnRef idx="1">
-            <a:schemeClr val="accent1"/>
-          </a:lnRef>
-          <a:fillRef idx="3">
-            <a:schemeClr val="accent1"/>
-          </a:fillRef>
-          <a:effectRef idx="2">
-            <a:schemeClr val="accent1"/>
-          </a:effectRef>
-          <a:fontRef idx="minor">
-            <a:schemeClr val="lt1"/>
-          </a:fontRef>
-        </p:style>
-        <p:txBody>
-          <a:bodyPr rtlCol="0" anchor="ctr"/>
-          <a:lstStyle/>
-          <a:p>
-            <a:pPr algn="ctr"/>
-          </a:p>
-        </p:txBody>
-      </p:sp>
-      <p:sp>
-        <p:nvSpPr>
-          <p:cNvPr id="17" name="TextBox 16"/>
-          <p:cNvSpPr txBox="1"/>
-          <p:nvPr/>
-        </p:nvSpPr>
-        <p:spPr>
-          <a:xfrm>
-            <a:off x="6126480" y="2414015"/>
-            <a:ext cx="4114800" cy="292608"/>
-          </a:xfrm>
-          <a:prstGeom prst="rect">
-            <a:avLst/>
-          </a:prstGeom>
-          <a:noFill/>
-        </p:spPr>
-        <p:txBody>
-          <a:bodyPr wrap="square">
-            <a:spAutoFit/>
-          </a:bodyPr>
-          <a:lstStyle/>
-          <a:p>
-            <a:pPr algn="l"/>
-            <a:r>
-              <a:rPr sz="1200" b="0" i="0">
+              <a:t>• Add a bracket-champion bonus tied to the Grand Prize pool</a:t>
+            </a:r>
+          </a:p>
+          <a:p>
+            <a:pPr>
+              <a:spcAft>
+                <a:spcPts val="500"/>
+              </a:spcAft>
+            </a:pPr>
+            <a:r>
+              <a:rPr sz="1300">
                 <a:solidFill>
                   <a:srgbClr val="2B2B2B"/>
                 </a:solidFill>
               </a:rPr>
-              <a:t>Prize package — sponsor-funded (assumption)</a:t>
-            </a:r>
-          </a:p>
-        </p:txBody>
-      </p:sp>
-      <p:sp>
-        <p:nvSpPr>
-          <p:cNvPr id="18" name="TextBox 17"/>
-          <p:cNvSpPr txBox="1"/>
-          <p:nvPr/>
-        </p:nvSpPr>
-        <p:spPr>
-          <a:xfrm>
-            <a:off x="9921240" y="2414015"/>
-            <a:ext cx="1828800" cy="292608"/>
-          </a:xfrm>
-          <a:prstGeom prst="rect">
-            <a:avLst/>
-          </a:prstGeom>
-          <a:noFill/>
-        </p:spPr>
-        <p:txBody>
-          <a:bodyPr wrap="square">
-            <a:spAutoFit/>
-          </a:bodyPr>
-          <a:lstStyle/>
-          <a:p>
-            <a:pPr algn="r"/>
-            <a:r>
-              <a:rPr sz="1200" b="0" i="0">
+              <a:t>• Reinforces the raffle as the event's central storyline</a:t>
+            </a:r>
+          </a:p>
+          <a:p>
+            <a:pPr>
+              <a:spcAft>
+                <a:spcPts val="500"/>
+              </a:spcAft>
+            </a:pPr>
+            <a:r>
+              <a:rPr sz="1300">
                 <a:solidFill>
                   <a:srgbClr val="2B2B2B"/>
                 </a:solidFill>
               </a:rPr>
-              <a:t>$0</a:t>
-            </a:r>
-          </a:p>
-        </p:txBody>
-      </p:sp>
-      <p:sp>
-        <p:nvSpPr>
-          <p:cNvPr id="19" name="Rectangle 18"/>
-          <p:cNvSpPr/>
-          <p:nvPr/>
-        </p:nvSpPr>
-        <p:spPr>
-          <a:xfrm>
-            <a:off x="5989320" y="2734056"/>
-            <a:ext cx="5897880" cy="384048"/>
-          </a:xfrm>
-          <a:prstGeom prst="rect">
-            <a:avLst/>
-          </a:prstGeom>
-          <a:solidFill>
-            <a:srgbClr val="FFFFFF"/>
-          </a:solidFill>
-          <a:ln>
-            <a:noFill/>
-          </a:ln>
-        </p:spPr>
-        <p:style>
-          <a:lnRef idx="1">
-            <a:schemeClr val="accent1"/>
-          </a:lnRef>
-          <a:fillRef idx="3">
-            <a:schemeClr val="accent1"/>
-          </a:fillRef>
-          <a:effectRef idx="2">
-            <a:schemeClr val="accent1"/>
-          </a:effectRef>
-          <a:fontRef idx="minor">
-            <a:schemeClr val="lt1"/>
-          </a:fontRef>
-        </p:style>
-        <p:txBody>
-          <a:bodyPr rtlCol="0" anchor="ctr"/>
-          <a:lstStyle/>
-          <a:p>
-            <a:pPr algn="ctr"/>
-          </a:p>
-        </p:txBody>
-      </p:sp>
-      <p:sp>
-        <p:nvSpPr>
-          <p:cNvPr id="20" name="TextBox 19"/>
-          <p:cNvSpPr txBox="1"/>
-          <p:nvPr/>
-        </p:nvSpPr>
-        <p:spPr>
-          <a:xfrm>
-            <a:off x="6126480" y="2798063"/>
-            <a:ext cx="4114800" cy="292608"/>
-          </a:xfrm>
-          <a:prstGeom prst="rect">
-            <a:avLst/>
-          </a:prstGeom>
-          <a:noFill/>
-        </p:spPr>
-        <p:txBody>
-          <a:bodyPr wrap="square">
-            <a:spAutoFit/>
-          </a:bodyPr>
-          <a:lstStyle/>
-          <a:p>
-            <a:pPr algn="l"/>
-            <a:r>
-              <a:rPr sz="1200" b="0" i="0">
-                <a:solidFill>
-                  <a:srgbClr val="2B2B2B"/>
-                </a:solidFill>
-              </a:rPr>
-              <a:t>Emcee script update</a:t>
+              <a:t>• No new operational lift — enhancement to what's already running</a:t>
             </a:r>
           </a:p>
         </p:txBody>
@@ -11161,472 +14014,28 @@
         </p:nvSpPr>
         <p:spPr>
           <a:xfrm>
-            <a:off x="9921240" y="2798063"/>
-            <a:ext cx="1828800" cy="292608"/>
-          </a:xfrm>
-          <a:prstGeom prst="rect">
-            <a:avLst/>
-          </a:prstGeom>
-          <a:noFill/>
-        </p:spPr>
-        <p:txBody>
-          <a:bodyPr wrap="square">
-            <a:spAutoFit/>
-          </a:bodyPr>
-          <a:lstStyle/>
-          <a:p>
-            <a:pPr algn="r"/>
-            <a:r>
-              <a:rPr sz="1200" b="0" i="0">
-                <a:solidFill>
-                  <a:srgbClr val="2B2B2B"/>
-                </a:solidFill>
-              </a:rPr>
-              <a:t>$0</a:t>
-            </a:r>
-          </a:p>
-        </p:txBody>
-      </p:sp>
-      <p:sp>
-        <p:nvSpPr>
-          <p:cNvPr id="22" name="Rectangle 21"/>
-          <p:cNvSpPr/>
-          <p:nvPr/>
-        </p:nvSpPr>
-        <p:spPr>
-          <a:xfrm>
-            <a:off x="5989320" y="3118104"/>
-            <a:ext cx="5897880" cy="384048"/>
-          </a:xfrm>
-          <a:prstGeom prst="rect">
-            <a:avLst/>
-          </a:prstGeom>
-          <a:solidFill>
-            <a:srgbClr val="F4F4F4"/>
-          </a:solidFill>
-          <a:ln>
-            <a:noFill/>
-          </a:ln>
-        </p:spPr>
-        <p:style>
-          <a:lnRef idx="1">
-            <a:schemeClr val="accent1"/>
-          </a:lnRef>
-          <a:fillRef idx="3">
-            <a:schemeClr val="accent1"/>
-          </a:fillRef>
-          <a:effectRef idx="2">
-            <a:schemeClr val="accent1"/>
-          </a:effectRef>
-          <a:fontRef idx="minor">
-            <a:schemeClr val="lt1"/>
-          </a:fontRef>
-        </p:style>
-        <p:txBody>
-          <a:bodyPr rtlCol="0" anchor="ctr"/>
-          <a:lstStyle/>
-          <a:p>
-            <a:pPr algn="ctr"/>
-          </a:p>
-        </p:txBody>
-      </p:sp>
-      <p:sp>
-        <p:nvSpPr>
-          <p:cNvPr id="23" name="TextBox 22"/>
-          <p:cNvSpPr txBox="1"/>
-          <p:nvPr/>
-        </p:nvSpPr>
-        <p:spPr>
-          <a:xfrm>
-            <a:off x="6126480" y="3182112"/>
-            <a:ext cx="4114800" cy="292608"/>
-          </a:xfrm>
-          <a:prstGeom prst="rect">
-            <a:avLst/>
-          </a:prstGeom>
-          <a:noFill/>
-        </p:spPr>
-        <p:txBody>
-          <a:bodyPr wrap="square">
-            <a:spAutoFit/>
-          </a:bodyPr>
-          <a:lstStyle/>
-          <a:p>
-            <a:pPr algn="l"/>
-            <a:r>
-              <a:rPr sz="1200" b="0" i="0">
-                <a:solidFill>
-                  <a:srgbClr val="2B2B2B"/>
-                </a:solidFill>
-              </a:rPr>
-              <a:t>Staff overtime (if applicable)</a:t>
-            </a:r>
-          </a:p>
-        </p:txBody>
-      </p:sp>
-      <p:sp>
-        <p:nvSpPr>
-          <p:cNvPr id="24" name="TextBox 23"/>
-          <p:cNvSpPr txBox="1"/>
-          <p:nvPr/>
-        </p:nvSpPr>
-        <p:spPr>
-          <a:xfrm>
-            <a:off x="9921240" y="3182112"/>
-            <a:ext cx="1828800" cy="292608"/>
-          </a:xfrm>
-          <a:prstGeom prst="rect">
-            <a:avLst/>
-          </a:prstGeom>
-          <a:noFill/>
-        </p:spPr>
-        <p:txBody>
-          <a:bodyPr wrap="square">
-            <a:spAutoFit/>
-          </a:bodyPr>
-          <a:lstStyle/>
-          <a:p>
-            <a:pPr algn="r"/>
-            <a:r>
-              <a:rPr sz="1200" b="0" i="0">
-                <a:solidFill>
-                  <a:srgbClr val="2B2B2B"/>
-                </a:solidFill>
-              </a:rPr>
-              <a:t>$0 – $420*</a:t>
-            </a:r>
-          </a:p>
-        </p:txBody>
-      </p:sp>
-      <p:sp>
-        <p:nvSpPr>
-          <p:cNvPr id="25" name="Rectangle 24"/>
-          <p:cNvSpPr/>
-          <p:nvPr/>
-        </p:nvSpPr>
-        <p:spPr>
-          <a:xfrm>
-            <a:off x="5989320" y="3502152"/>
-            <a:ext cx="5897880" cy="384048"/>
-          </a:xfrm>
-          <a:prstGeom prst="rect">
-            <a:avLst/>
-          </a:prstGeom>
-          <a:solidFill>
-            <a:srgbClr val="FFFFFF"/>
-          </a:solidFill>
-          <a:ln>
-            <a:noFill/>
-          </a:ln>
-        </p:spPr>
-        <p:style>
-          <a:lnRef idx="1">
-            <a:schemeClr val="accent1"/>
-          </a:lnRef>
-          <a:fillRef idx="3">
-            <a:schemeClr val="accent1"/>
-          </a:fillRef>
-          <a:effectRef idx="2">
-            <a:schemeClr val="accent1"/>
-          </a:effectRef>
-          <a:fontRef idx="minor">
-            <a:schemeClr val="lt1"/>
-          </a:fontRef>
-        </p:style>
-        <p:txBody>
-          <a:bodyPr rtlCol="0" anchor="ctr"/>
-          <a:lstStyle/>
-          <a:p>
-            <a:pPr algn="ctr"/>
-          </a:p>
-        </p:txBody>
-      </p:sp>
-      <p:sp>
-        <p:nvSpPr>
-          <p:cNvPr id="26" name="TextBox 25"/>
-          <p:cNvSpPr txBox="1"/>
-          <p:nvPr/>
-        </p:nvSpPr>
-        <p:spPr>
-          <a:xfrm>
-            <a:off x="6126480" y="3566160"/>
-            <a:ext cx="4114800" cy="292608"/>
-          </a:xfrm>
-          <a:prstGeom prst="rect">
-            <a:avLst/>
-          </a:prstGeom>
-          <a:noFill/>
-        </p:spPr>
-        <p:txBody>
-          <a:bodyPr wrap="square">
-            <a:spAutoFit/>
-          </a:bodyPr>
-          <a:lstStyle/>
-          <a:p>
-            <a:pPr algn="l"/>
-            <a:r>
-              <a:rPr sz="1200" b="0" i="0">
-                <a:solidFill>
-                  <a:srgbClr val="2B2B2B"/>
-                </a:solidFill>
-              </a:rPr>
-              <a:t/>
-            </a:r>
-          </a:p>
-        </p:txBody>
-      </p:sp>
-      <p:sp>
-        <p:nvSpPr>
-          <p:cNvPr id="27" name="TextBox 26"/>
-          <p:cNvSpPr txBox="1"/>
-          <p:nvPr/>
-        </p:nvSpPr>
-        <p:spPr>
-          <a:xfrm>
-            <a:off x="9921240" y="3566160"/>
-            <a:ext cx="1828800" cy="292608"/>
-          </a:xfrm>
-          <a:prstGeom prst="rect">
-            <a:avLst/>
-          </a:prstGeom>
-          <a:noFill/>
-        </p:spPr>
-        <p:txBody>
-          <a:bodyPr wrap="square">
-            <a:spAutoFit/>
-          </a:bodyPr>
-          <a:lstStyle/>
-          <a:p>
-            <a:pPr algn="r"/>
-            <a:r>
-              <a:rPr sz="1200" b="0" i="0">
-                <a:solidFill>
-                  <a:srgbClr val="2B2B2B"/>
-                </a:solidFill>
-              </a:rPr>
-              <a:t/>
-            </a:r>
-          </a:p>
-        </p:txBody>
-      </p:sp>
-      <p:sp>
-        <p:nvSpPr>
-          <p:cNvPr id="28" name="Rectangle 27"/>
-          <p:cNvSpPr/>
-          <p:nvPr/>
-        </p:nvSpPr>
-        <p:spPr>
-          <a:xfrm>
-            <a:off x="5989320" y="3886200"/>
-            <a:ext cx="5897880" cy="384048"/>
-          </a:xfrm>
-          <a:prstGeom prst="rect">
-            <a:avLst/>
-          </a:prstGeom>
-          <a:solidFill>
-            <a:srgbClr val="E8F5E9"/>
-          </a:solidFill>
-          <a:ln>
-            <a:noFill/>
-          </a:ln>
-        </p:spPr>
-        <p:style>
-          <a:lnRef idx="1">
-            <a:schemeClr val="accent1"/>
-          </a:lnRef>
-          <a:fillRef idx="3">
-            <a:schemeClr val="accent1"/>
-          </a:fillRef>
-          <a:effectRef idx="2">
-            <a:schemeClr val="accent1"/>
-          </a:effectRef>
-          <a:fontRef idx="minor">
-            <a:schemeClr val="lt1"/>
-          </a:fontRef>
-        </p:style>
-        <p:txBody>
-          <a:bodyPr rtlCol="0" anchor="ctr"/>
-          <a:lstStyle/>
-          <a:p>
-            <a:pPr algn="ctr"/>
-          </a:p>
-        </p:txBody>
-      </p:sp>
-      <p:sp>
-        <p:nvSpPr>
-          <p:cNvPr id="29" name="TextBox 28"/>
-          <p:cNvSpPr txBox="1"/>
-          <p:nvPr/>
-        </p:nvSpPr>
-        <p:spPr>
-          <a:xfrm>
-            <a:off x="6126480" y="3950208"/>
-            <a:ext cx="4114800" cy="292608"/>
-          </a:xfrm>
-          <a:prstGeom prst="rect">
-            <a:avLst/>
-          </a:prstGeom>
-          <a:noFill/>
-        </p:spPr>
-        <p:txBody>
-          <a:bodyPr wrap="square">
-            <a:spAutoFit/>
-          </a:bodyPr>
-          <a:lstStyle/>
-          <a:p>
-            <a:pPr algn="l"/>
-            <a:r>
-              <a:rPr sz="1300" b="1" i="0">
+            <a:off x="320040" y="6355080"/>
+            <a:ext cx="11521440" cy="365760"/>
+          </a:xfrm>
+          <a:prstGeom prst="rect">
+            <a:avLst/>
+          </a:prstGeom>
+          <a:noFill/>
+        </p:spPr>
+        <p:txBody>
+          <a:bodyPr wrap="square">
+            <a:spAutoFit/>
+          </a:bodyPr>
+          <a:lstStyle/>
+          <a:p>
+            <a:pPr algn="ctr"/>
+            <a:r>
+              <a:rPr sz="1100" b="1" i="0">
                 <a:solidFill>
                   <a:srgbClr val="1A5C38"/>
                 </a:solidFill>
               </a:rPr>
-              <a:t>TOTAL ESTIMATED COST</a:t>
-            </a:r>
-          </a:p>
-        </p:txBody>
-      </p:sp>
-      <p:sp>
-        <p:nvSpPr>
-          <p:cNvPr id="30" name="TextBox 29"/>
-          <p:cNvSpPr txBox="1"/>
-          <p:nvPr/>
-        </p:nvSpPr>
-        <p:spPr>
-          <a:xfrm>
-            <a:off x="9921240" y="3950208"/>
-            <a:ext cx="1828800" cy="292608"/>
-          </a:xfrm>
-          <a:prstGeom prst="rect">
-            <a:avLst/>
-          </a:prstGeom>
-          <a:noFill/>
-        </p:spPr>
-        <p:txBody>
-          <a:bodyPr wrap="square">
-            <a:spAutoFit/>
-          </a:bodyPr>
-          <a:lstStyle/>
-          <a:p>
-            <a:pPr algn="r"/>
-            <a:r>
-              <a:rPr sz="1300" b="1" i="0">
-                <a:solidFill>
-                  <a:srgbClr val="1A5C38"/>
-                </a:solidFill>
-              </a:rPr>
-              <a:t>$150 – $720</a:t>
-            </a:r>
-          </a:p>
-        </p:txBody>
-      </p:sp>
-      <p:sp>
-        <p:nvSpPr>
-          <p:cNvPr id="31" name="TextBox 30"/>
-          <p:cNvSpPr txBox="1"/>
-          <p:nvPr/>
-        </p:nvSpPr>
-        <p:spPr>
-          <a:xfrm>
-            <a:off x="5989320" y="4315968"/>
-            <a:ext cx="5852160" cy="347472"/>
-          </a:xfrm>
-          <a:prstGeom prst="rect">
-            <a:avLst/>
-          </a:prstGeom>
-          <a:noFill/>
-        </p:spPr>
-        <p:txBody>
-          <a:bodyPr wrap="square">
-            <a:spAutoFit/>
-          </a:bodyPr>
-          <a:lstStyle/>
-          <a:p>
-            <a:pPr algn="l"/>
-            <a:r>
-              <a:rPr sz="1000" b="0" i="1">
-                <a:solidFill>
-                  <a:srgbClr val="555555"/>
-                </a:solidFill>
-              </a:rPr>
-              <a:t>* Hunt staff transitioning to handoff roles = no additional hours if within scheduled shift</a:t>
-            </a:r>
-          </a:p>
-        </p:txBody>
-      </p:sp>
-      <p:sp>
-        <p:nvSpPr>
-          <p:cNvPr id="32" name="Rectangle 31"/>
-          <p:cNvSpPr/>
-          <p:nvPr/>
-        </p:nvSpPr>
-        <p:spPr>
-          <a:xfrm>
-            <a:off x="320040" y="5715000"/>
-            <a:ext cx="11521440" cy="777240"/>
-          </a:xfrm>
-          <a:prstGeom prst="rect">
-            <a:avLst/>
-          </a:prstGeom>
-          <a:solidFill>
-            <a:srgbClr val="E8F5E9"/>
-          </a:solidFill>
-          <a:ln>
-            <a:noFill/>
-          </a:ln>
-        </p:spPr>
-        <p:style>
-          <a:lnRef idx="1">
-            <a:schemeClr val="accent1"/>
-          </a:lnRef>
-          <a:fillRef idx="3">
-            <a:schemeClr val="accent1"/>
-          </a:fillRef>
-          <a:effectRef idx="2">
-            <a:schemeClr val="accent1"/>
-          </a:effectRef>
-          <a:fontRef idx="minor">
-            <a:schemeClr val="lt1"/>
-          </a:fontRef>
-        </p:style>
-        <p:txBody>
-          <a:bodyPr rtlCol="0" anchor="ctr"/>
-          <a:lstStyle/>
-          <a:p>
-            <a:pPr algn="ctr"/>
-          </a:p>
-        </p:txBody>
-      </p:sp>
-      <p:sp>
-        <p:nvSpPr>
-          <p:cNvPr id="33" name="TextBox 32"/>
-          <p:cNvSpPr txBox="1"/>
-          <p:nvPr/>
-        </p:nvSpPr>
-        <p:spPr>
-          <a:xfrm>
-            <a:off x="502920" y="5779008"/>
-            <a:ext cx="11155680" cy="594360"/>
-          </a:xfrm>
-          <a:prstGeom prst="rect">
-            <a:avLst/>
-          </a:prstGeom>
-          <a:noFill/>
-        </p:spPr>
-        <p:txBody>
-          <a:bodyPr wrap="square">
-            <a:spAutoFit/>
-          </a:bodyPr>
-          <a:lstStyle/>
-          <a:p>
-            <a:pPr algn="ctr"/>
-            <a:r>
-              <a:rPr sz="1200" b="0" i="0">
-                <a:solidFill>
-                  <a:srgbClr val="1A5C38"/>
-                </a:solidFill>
-              </a:rPr>
-              <a:t>Revenue Opportunity: Sponsor branding on prize package &amp; event signage valued at $500–$1,500. Enhancement is potentially cost-neutral or better.</a:t>
+              <a:t>Together, these four layers turn a single raffle mechanic into an event-wide incentive to explore, participate, and stay through the Grand Prize Drawing.</a:t>
             </a:r>
           </a:p>
         </p:txBody>
@@ -11664,6 +14073,49 @@
             <a:avLst/>
           </a:prstGeom>
           <a:solidFill>
+            <a:srgbClr val="F4F4F4"/>
+          </a:solidFill>
+          <a:ln>
+            <a:noFill/>
+          </a:ln>
+        </p:spPr>
+        <p:style>
+          <a:lnRef idx="1">
+            <a:schemeClr val="accent1"/>
+          </a:lnRef>
+          <a:fillRef idx="3">
+            <a:schemeClr val="accent1"/>
+          </a:fillRef>
+          <a:effectRef idx="2">
+            <a:schemeClr val="accent1"/>
+          </a:effectRef>
+          <a:fontRef idx="minor">
+            <a:schemeClr val="lt1"/>
+          </a:fontRef>
+        </p:style>
+        <p:txBody>
+          <a:bodyPr rtlCol="0" anchor="ctr"/>
+          <a:lstStyle/>
+          <a:p>
+            <a:pPr algn="ctr"/>
+          </a:p>
+        </p:txBody>
+      </p:sp>
+      <p:sp>
+        <p:nvSpPr>
+          <p:cNvPr id="3" name="Rectangle 2"/>
+          <p:cNvSpPr/>
+          <p:nvPr/>
+        </p:nvSpPr>
+        <p:spPr>
+          <a:xfrm>
+            <a:off x="0" y="0"/>
+            <a:ext cx="12188952" cy="1234440"/>
+          </a:xfrm>
+          <a:prstGeom prst="rect">
+            <a:avLst/>
+          </a:prstGeom>
+          <a:solidFill>
             <a:srgbClr val="1A5C38"/>
           </a:solidFill>
           <a:ln>
@@ -11694,14 +14146,14 @@
       </p:sp>
       <p:sp>
         <p:nvSpPr>
-          <p:cNvPr id="3" name="Rectangle 2"/>
+          <p:cNvPr id="4" name="Rectangle 3"/>
           <p:cNvSpPr/>
           <p:nvPr/>
         </p:nvSpPr>
         <p:spPr>
           <a:xfrm>
-            <a:off x="0" y="1325880"/>
-            <a:ext cx="12188952" cy="64008"/>
+            <a:off x="0" y="1234440"/>
+            <a:ext cx="12188952" cy="73152"/>
           </a:xfrm>
           <a:prstGeom prst="rect">
             <a:avLst/>
@@ -11737,20 +14189,88 @@
       </p:sp>
       <p:sp>
         <p:nvSpPr>
-          <p:cNvPr id="4" name="Rectangle 3"/>
+          <p:cNvPr id="5" name="TextBox 4"/>
+          <p:cNvSpPr txBox="1"/>
+          <p:nvPr/>
+        </p:nvSpPr>
+        <p:spPr>
+          <a:xfrm>
+            <a:off x="320040" y="137160"/>
+            <a:ext cx="10972800" cy="777240"/>
+          </a:xfrm>
+          <a:prstGeom prst="rect">
+            <a:avLst/>
+          </a:prstGeom>
+          <a:noFill/>
+        </p:spPr>
+        <p:txBody>
+          <a:bodyPr wrap="square">
+            <a:spAutoFit/>
+          </a:bodyPr>
+          <a:lstStyle/>
+          <a:p>
+            <a:pPr algn="l"/>
+            <a:r>
+              <a:rPr sz="2800" b="1" i="0">
+                <a:solidFill>
+                  <a:srgbClr val="FFFFFF"/>
+                </a:solidFill>
+              </a:rPr>
+              <a:t>Operational Plan</a:t>
+            </a:r>
+          </a:p>
+        </p:txBody>
+      </p:sp>
+      <p:sp>
+        <p:nvSpPr>
+          <p:cNvPr id="6" name="TextBox 5"/>
+          <p:cNvSpPr txBox="1"/>
+          <p:nvPr/>
+        </p:nvSpPr>
+        <p:spPr>
+          <a:xfrm>
+            <a:off x="320040" y="822960"/>
+            <a:ext cx="10972800" cy="411480"/>
+          </a:xfrm>
+          <a:prstGeom prst="rect">
+            <a:avLst/>
+          </a:prstGeom>
+          <a:noFill/>
+        </p:spPr>
+        <p:txBody>
+          <a:bodyPr wrap="square">
+            <a:spAutoFit/>
+          </a:bodyPr>
+          <a:lstStyle/>
+          <a:p>
+            <a:pPr algn="l"/>
+            <a:r>
+              <a:rPr sz="1400" b="0" i="0">
+                <a:solidFill>
+                  <a:srgbClr val="D4A017"/>
+                </a:solidFill>
+              </a:rPr>
+              <a:t>Pre-Event Through Day-Of Execution</a:t>
+            </a:r>
+          </a:p>
+        </p:txBody>
+      </p:sp>
+      <p:sp>
+        <p:nvSpPr>
+          <p:cNvPr id="7" name="Rectangle 6"/>
           <p:cNvSpPr/>
           <p:nvPr/>
         </p:nvSpPr>
         <p:spPr>
           <a:xfrm>
-            <a:off x="0" y="5486400"/>
-            <a:ext cx="12188952" cy="64008"/>
+            <a:off x="320040" y="1463040"/>
+            <a:ext cx="2200046" cy="438912"/>
           </a:xfrm>
           <a:prstGeom prst="rect">
             <a:avLst/>
           </a:prstGeom>
           <a:solidFill>
-            <a:srgbClr val="D4A017"/>
+            <a:srgbClr val="1A5C38"/>
           </a:solidFill>
           <a:ln>
             <a:noFill/>
@@ -11780,88 +14300,54 @@
       </p:sp>
       <p:sp>
         <p:nvSpPr>
-          <p:cNvPr id="5" name="TextBox 4"/>
-          <p:cNvSpPr txBox="1"/>
-          <p:nvPr/>
-        </p:nvSpPr>
-        <p:spPr>
-          <a:xfrm>
-            <a:off x="457200" y="182880"/>
-            <a:ext cx="11247120" cy="1005840"/>
-          </a:xfrm>
-          <a:prstGeom prst="rect">
-            <a:avLst/>
-          </a:prstGeom>
-          <a:noFill/>
-        </p:spPr>
-        <p:txBody>
-          <a:bodyPr wrap="square">
-            <a:spAutoFit/>
-          </a:bodyPr>
-          <a:lstStyle/>
-          <a:p>
-            <a:pPr algn="ctr"/>
-            <a:r>
-              <a:rPr sz="3200" b="1" i="0">
+          <p:cNvPr id="8" name="TextBox 7"/>
+          <p:cNvSpPr txBox="1"/>
+          <p:nvPr/>
+        </p:nvSpPr>
+        <p:spPr>
+          <a:xfrm>
+            <a:off x="393192" y="1508760"/>
+            <a:ext cx="2090318" cy="347472"/>
+          </a:xfrm>
+          <a:prstGeom prst="rect">
+            <a:avLst/>
+          </a:prstGeom>
+          <a:noFill/>
+        </p:spPr>
+        <p:txBody>
+          <a:bodyPr wrap="square">
+            <a:spAutoFit/>
+          </a:bodyPr>
+          <a:lstStyle/>
+          <a:p>
+            <a:pPr algn="ctr"/>
+            <a:r>
+              <a:rPr sz="1200" b="1" i="0">
                 <a:solidFill>
                   <a:srgbClr val="FFFFFF"/>
                 </a:solidFill>
               </a:rPr>
-              <a:t>Final Recommendation</a:t>
-            </a:r>
-          </a:p>
-        </p:txBody>
-      </p:sp>
-      <p:sp>
-        <p:nvSpPr>
-          <p:cNvPr id="6" name="TextBox 5"/>
-          <p:cNvSpPr txBox="1"/>
-          <p:nvPr/>
-        </p:nvSpPr>
-        <p:spPr>
-          <a:xfrm>
-            <a:off x="457200" y="1554480"/>
-            <a:ext cx="11247120" cy="548640"/>
-          </a:xfrm>
-          <a:prstGeom prst="rect">
-            <a:avLst/>
-          </a:prstGeom>
-          <a:noFill/>
-        </p:spPr>
-        <p:txBody>
-          <a:bodyPr wrap="square">
-            <a:spAutoFit/>
-          </a:bodyPr>
-          <a:lstStyle/>
-          <a:p>
-            <a:pPr algn="ctr"/>
-            <a:r>
-              <a:rPr sz="1600" b="0" i="1">
-                <a:solidFill>
-                  <a:srgbClr val="D4A017"/>
-                </a:solidFill>
-              </a:rPr>
-              <a:t>Implement two targeted, low-cost enhancements for Spring Into QC 2027:</a:t>
-            </a:r>
-          </a:p>
-        </p:txBody>
-      </p:sp>
-      <p:sp>
-        <p:nvSpPr>
-          <p:cNvPr id="7" name="Rectangle 6"/>
+              <a:t>8 Weeks Out</a:t>
+            </a:r>
+          </a:p>
+        </p:txBody>
+      </p:sp>
+      <p:sp>
+        <p:nvSpPr>
+          <p:cNvPr id="9" name="Rectangle 8"/>
           <p:cNvSpPr/>
           <p:nvPr/>
         </p:nvSpPr>
         <p:spPr>
           <a:xfrm>
-            <a:off x="365760" y="2240280"/>
-            <a:ext cx="5577840" cy="3017520"/>
+            <a:off x="320040" y="1901952"/>
+            <a:ext cx="2200046" cy="4572000"/>
           </a:xfrm>
           <a:prstGeom prst="rect">
             <a:avLst/>
           </a:prstGeom>
           <a:solidFill>
-            <a:srgbClr val="226B45"/>
+            <a:srgbClr val="FFFFFF"/>
           </a:solidFill>
           <a:ln>
             <a:noFill/>
@@ -11891,102 +14377,98 @@
       </p:sp>
       <p:sp>
         <p:nvSpPr>
-          <p:cNvPr id="8" name="TextBox 7"/>
-          <p:cNvSpPr txBox="1"/>
-          <p:nvPr/>
-        </p:nvSpPr>
-        <p:spPr>
-          <a:xfrm>
-            <a:off x="502920" y="2331720"/>
-            <a:ext cx="502920" cy="548640"/>
-          </a:xfrm>
-          <a:prstGeom prst="rect">
-            <a:avLst/>
-          </a:prstGeom>
-          <a:noFill/>
-        </p:spPr>
-        <p:txBody>
-          <a:bodyPr wrap="square">
-            <a:spAutoFit/>
-          </a:bodyPr>
-          <a:lstStyle/>
-          <a:p>
-            <a:pPr algn="ctr"/>
-            <a:r>
-              <a:rPr sz="2800" b="1" i="0">
-                <a:solidFill>
-                  <a:srgbClr val="D4A017"/>
-                </a:solidFill>
-              </a:rPr>
-              <a:t>1</a:t>
-            </a:r>
-          </a:p>
-        </p:txBody>
-      </p:sp>
-      <p:sp>
-        <p:nvSpPr>
-          <p:cNvPr id="9" name="TextBox 8"/>
-          <p:cNvSpPr txBox="1"/>
-          <p:nvPr/>
-        </p:nvSpPr>
-        <p:spPr>
-          <a:xfrm>
-            <a:off x="1051560" y="2395728"/>
-            <a:ext cx="4754880" cy="457200"/>
-          </a:xfrm>
-          <a:prstGeom prst="rect">
-            <a:avLst/>
-          </a:prstGeom>
-          <a:noFill/>
-        </p:spPr>
-        <p:txBody>
-          <a:bodyPr wrap="square">
-            <a:spAutoFit/>
-          </a:bodyPr>
-          <a:lstStyle/>
-          <a:p>
-            <a:pPr algn="l"/>
-            <a:r>
-              <a:rPr sz="1700" b="1" i="0">
-                <a:solidFill>
-                  <a:srgbClr val="FFFFFF"/>
-                </a:solidFill>
-              </a:rPr>
-              <a:t>Activate the Raffle</a:t>
-            </a:r>
-          </a:p>
-        </p:txBody>
-      </p:sp>
-      <p:sp>
-        <p:nvSpPr>
           <p:cNvPr id="10" name="TextBox 9"/>
           <p:cNvSpPr txBox="1"/>
           <p:nvPr/>
         </p:nvSpPr>
         <p:spPr>
           <a:xfrm>
-            <a:off x="548640" y="2926080"/>
-            <a:ext cx="5257800" cy="2194560"/>
-          </a:xfrm>
-          <a:prstGeom prst="rect">
-            <a:avLst/>
-          </a:prstGeom>
-          <a:noFill/>
-        </p:spPr>
-        <p:txBody>
-          <a:bodyPr wrap="square">
-            <a:spAutoFit/>
-          </a:bodyPr>
-          <a:lstStyle/>
-          <a:p>
-            <a:pPr algn="l"/>
-            <a:r>
-              <a:rPr sz="1300" b="0" i="0">
-                <a:solidFill>
-                  <a:srgbClr val="F4F4F4"/>
-                </a:solidFill>
-              </a:rPr>
-              <a:t>Announce a Grand Prize Drawing at 12:15 PM. Leverage the existing raffle ticket mechanic from the animal races to give families a scheduled reason to stay through the final hour. Source prizes through local business sponsorship at no cost to the Town.</a:t>
+            <a:off x="411479" y="1975104"/>
+            <a:ext cx="2053742" cy="4389120"/>
+          </a:xfrm>
+          <a:prstGeom prst="rect">
+            <a:avLst/>
+          </a:prstGeom>
+          <a:noFill/>
+        </p:spPr>
+        <p:txBody>
+          <a:bodyPr wrap="square">
+            <a:spAutoFit/>
+          </a:bodyPr>
+          <a:lstStyle/>
+          <a:p>
+            <a:pPr>
+              <a:spcAft>
+                <a:spcPts val="700"/>
+              </a:spcAft>
+            </a:pPr>
+            <a:r>
+              <a:rPr sz="1050">
+                <a:solidFill>
+                  <a:srgbClr val="2B2B2B"/>
+                </a:solidFill>
+              </a:rPr>
+              <a:t>• Confirm Grand Prize Drawing format &amp; timing (12:15 PM)</a:t>
+            </a:r>
+          </a:p>
+          <a:p>
+            <a:pPr>
+              <a:spcAft>
+                <a:spcPts val="700"/>
+              </a:spcAft>
+            </a:pPr>
+            <a:r>
+              <a:rPr sz="1050">
+                <a:solidFill>
+                  <a:srgbClr val="2B2B2B"/>
+                </a:solidFill>
+              </a:rPr>
+              <a:t>• Recruit local business sponsor for prize package</a:t>
+            </a:r>
+          </a:p>
+          <a:p>
+            <a:pPr>
+              <a:spcAft>
+                <a:spcPts val="700"/>
+              </a:spcAft>
+            </a:pPr>
+            <a:r>
+              <a:rPr sz="1050">
+                <a:solidFill>
+                  <a:srgbClr val="2B2B2B"/>
+                </a:solidFill>
+              </a:rPr>
+              <a:t>• Finalize circular site layout (entrances, vendor row, hunt, loop)</a:t>
+            </a:r>
+          </a:p>
+          <a:p>
+            <a:pPr>
+              <a:spcAft>
+                <a:spcPts val="700"/>
+              </a:spcAft>
+            </a:pPr>
+            <a:r>
+              <a:rPr sz="1050">
+                <a:solidFill>
+                  <a:srgbClr val="2B2B2B"/>
+                </a:solidFill>
+              </a:rPr>
+              <a:t>• Design punch + bingo card artwork</a:t>
+            </a:r>
+          </a:p>
+          <a:p>
+            <a:pPr>
+              <a:spcAft>
+                <a:spcPts val="700"/>
+              </a:spcAft>
+            </a:pPr>
+            <a:r>
+              <a:rPr sz="1050">
+                <a:solidFill>
+                  <a:srgbClr val="2B2B2B"/>
+                </a:solidFill>
+              </a:rPr>
+              <a:t>• Brief vendor team on updated flow</a:t>
             </a:r>
           </a:p>
         </p:txBody>
@@ -11999,14 +14481,14 @@
         </p:nvSpPr>
         <p:spPr>
           <a:xfrm>
-            <a:off x="6172200" y="2240280"/>
-            <a:ext cx="5577840" cy="3017520"/>
+            <a:off x="2657246" y="1463040"/>
+            <a:ext cx="2200046" cy="438912"/>
           </a:xfrm>
           <a:prstGeom prst="rect">
             <a:avLst/>
           </a:prstGeom>
           <a:solidFill>
-            <a:srgbClr val="226B45"/>
+            <a:srgbClr val="3E8E5C"/>
           </a:solidFill>
           <a:ln>
             <a:noFill/>
@@ -12042,116 +14524,48 @@
         </p:nvSpPr>
         <p:spPr>
           <a:xfrm>
-            <a:off x="6309360" y="2331720"/>
-            <a:ext cx="502920" cy="548640"/>
-          </a:xfrm>
-          <a:prstGeom prst="rect">
-            <a:avLst/>
-          </a:prstGeom>
-          <a:noFill/>
-        </p:spPr>
-        <p:txBody>
-          <a:bodyPr wrap="square">
-            <a:spAutoFit/>
-          </a:bodyPr>
-          <a:lstStyle/>
-          <a:p>
-            <a:pPr algn="ctr"/>
-            <a:r>
-              <a:rPr sz="2800" b="1" i="0">
-                <a:solidFill>
-                  <a:srgbClr val="D4A017"/>
-                </a:solidFill>
-              </a:rPr>
-              <a:t>2</a:t>
-            </a:r>
-          </a:p>
-        </p:txBody>
-      </p:sp>
-      <p:sp>
-        <p:nvSpPr>
-          <p:cNvPr id="13" name="TextBox 12"/>
-          <p:cNvSpPr txBox="1"/>
-          <p:nvPr/>
-        </p:nvSpPr>
-        <p:spPr>
-          <a:xfrm>
-            <a:off x="6858000" y="2395728"/>
-            <a:ext cx="4754880" cy="457200"/>
-          </a:xfrm>
-          <a:prstGeom prst="rect">
-            <a:avLst/>
-          </a:prstGeom>
-          <a:noFill/>
-        </p:spPr>
-        <p:txBody>
-          <a:bodyPr wrap="square">
-            <a:spAutoFit/>
-          </a:bodyPr>
-          <a:lstStyle/>
-          <a:p>
-            <a:pPr algn="l"/>
-            <a:r>
-              <a:rPr sz="1700" b="1" i="0">
+            <a:off x="2730398" y="1508760"/>
+            <a:ext cx="2090318" cy="347472"/>
+          </a:xfrm>
+          <a:prstGeom prst="rect">
+            <a:avLst/>
+          </a:prstGeom>
+          <a:noFill/>
+        </p:spPr>
+        <p:txBody>
+          <a:bodyPr wrap="square">
+            <a:spAutoFit/>
+          </a:bodyPr>
+          <a:lstStyle/>
+          <a:p>
+            <a:pPr algn="ctr"/>
+            <a:r>
+              <a:rPr sz="1200" b="1" i="0">
                 <a:solidFill>
                   <a:srgbClr val="FFFFFF"/>
                 </a:solidFill>
               </a:rPr>
-              <a:t>The Post-Hunt Handoff</a:t>
-            </a:r>
-          </a:p>
-        </p:txBody>
-      </p:sp>
-      <p:sp>
-        <p:nvSpPr>
-          <p:cNvPr id="14" name="TextBox 13"/>
-          <p:cNvSpPr txBox="1"/>
-          <p:nvPr/>
-        </p:nvSpPr>
-        <p:spPr>
-          <a:xfrm>
-            <a:off x="6355080" y="2926080"/>
-            <a:ext cx="5257800" cy="2194560"/>
-          </a:xfrm>
-          <a:prstGeom prst="rect">
-            <a:avLst/>
-          </a:prstGeom>
-          <a:noFill/>
-        </p:spPr>
-        <p:txBody>
-          <a:bodyPr wrap="square">
-            <a:spAutoFit/>
-          </a:bodyPr>
-          <a:lstStyle/>
-          <a:p>
-            <a:pPr algn="l"/>
-            <a:r>
-              <a:rPr sz="1300" b="0" i="0">
-                <a:solidFill>
-                  <a:srgbClr val="F4F4F4"/>
-                </a:solidFill>
-              </a:rPr>
-              <a:t>Deploy hunt staff as handoff ambassadors the moment each age group's hunt concludes. Direct families immediately toward the next race heat. Own the 30-second window before the decision to leave is made.</a:t>
-            </a:r>
-          </a:p>
-        </p:txBody>
-      </p:sp>
-      <p:sp>
-        <p:nvSpPr>
-          <p:cNvPr id="15" name="Rectangle 14"/>
+              <a:t>5 Weeks Out</a:t>
+            </a:r>
+          </a:p>
+        </p:txBody>
+      </p:sp>
+      <p:sp>
+        <p:nvSpPr>
+          <p:cNvPr id="13" name="Rectangle 12"/>
           <p:cNvSpPr/>
           <p:nvPr/>
         </p:nvSpPr>
         <p:spPr>
           <a:xfrm>
-            <a:off x="365760" y="5394960"/>
-            <a:ext cx="11430000" cy="73152"/>
+            <a:off x="2657246" y="1901952"/>
+            <a:ext cx="2200046" cy="4572000"/>
           </a:xfrm>
           <a:prstGeom prst="rect">
             <a:avLst/>
           </a:prstGeom>
           <a:solidFill>
-            <a:srgbClr val="226B45"/>
+            <a:srgbClr val="FFFFFF"/>
           </a:solidFill>
           <a:ln>
             <a:noFill/>
@@ -12181,70 +14595,219 @@
       </p:sp>
       <p:sp>
         <p:nvSpPr>
+          <p:cNvPr id="14" name="TextBox 13"/>
+          <p:cNvSpPr txBox="1"/>
+          <p:nvPr/>
+        </p:nvSpPr>
+        <p:spPr>
+          <a:xfrm>
+            <a:off x="2748686" y="1975104"/>
+            <a:ext cx="2053742" cy="4389120"/>
+          </a:xfrm>
+          <a:prstGeom prst="rect">
+            <a:avLst/>
+          </a:prstGeom>
+          <a:noFill/>
+        </p:spPr>
+        <p:txBody>
+          <a:bodyPr wrap="square">
+            <a:spAutoFit/>
+          </a:bodyPr>
+          <a:lstStyle/>
+          <a:p>
+            <a:pPr>
+              <a:spcAft>
+                <a:spcPts val="700"/>
+              </a:spcAft>
+            </a:pPr>
+            <a:r>
+              <a:rPr sz="1050">
+                <a:solidFill>
+                  <a:srgbClr val="2B2B2B"/>
+                </a:solidFill>
+              </a:rPr>
+              <a:t>• Launch event promotion (social + newsletter)</a:t>
+            </a:r>
+          </a:p>
+          <a:p>
+            <a:pPr>
+              <a:spcAft>
+                <a:spcPts val="700"/>
+              </a:spcAft>
+            </a:pPr>
+            <a:r>
+              <a:rPr sz="1050">
+                <a:solidFill>
+                  <a:srgbClr val="2B2B2B"/>
+                </a:solidFill>
+              </a:rPr>
+              <a:t>• Announce participating vendors &amp; what they're offering</a:t>
+            </a:r>
+          </a:p>
+          <a:p>
+            <a:pPr>
+              <a:spcAft>
+                <a:spcPts val="700"/>
+              </a:spcAft>
+            </a:pPr>
+            <a:r>
+              <a:rPr sz="1050">
+                <a:solidFill>
+                  <a:srgbClr val="2B2B2B"/>
+                </a:solidFill>
+              </a:rPr>
+              <a:t>• Tease the Grand Prize — build anticipation, don't reveal it</a:t>
+            </a:r>
+          </a:p>
+          <a:p>
+            <a:pPr>
+              <a:spcAft>
+                <a:spcPts val="700"/>
+              </a:spcAft>
+            </a:pPr>
+            <a:r>
+              <a:rPr sz="1050">
+                <a:solidFill>
+                  <a:srgbClr val="2B2B2B"/>
+                </a:solidFill>
+              </a:rPr>
+              <a:t>• Highlight new layout, races &amp; golden eggs in messaging</a:t>
+            </a:r>
+          </a:p>
+          <a:p>
+            <a:pPr>
+              <a:spcAft>
+                <a:spcPts val="700"/>
+              </a:spcAft>
+            </a:pPr>
+            <a:r>
+              <a:rPr sz="1050">
+                <a:solidFill>
+                  <a:srgbClr val="2B2B2B"/>
+                </a:solidFill>
+              </a:rPr>
+              <a:t>• Ask vendors to cross-promote on their own channels</a:t>
+            </a:r>
+          </a:p>
+        </p:txBody>
+      </p:sp>
+      <p:sp>
+        <p:nvSpPr>
+          <p:cNvPr id="15" name="Rectangle 14"/>
+          <p:cNvSpPr/>
+          <p:nvPr/>
+        </p:nvSpPr>
+        <p:spPr>
+          <a:xfrm>
+            <a:off x="4994452" y="1463040"/>
+            <a:ext cx="2200046" cy="438912"/>
+          </a:xfrm>
+          <a:prstGeom prst="rect">
+            <a:avLst/>
+          </a:prstGeom>
+          <a:solidFill>
+            <a:srgbClr val="2E7D4F"/>
+          </a:solidFill>
+          <a:ln>
+            <a:noFill/>
+          </a:ln>
+        </p:spPr>
+        <p:style>
+          <a:lnRef idx="1">
+            <a:schemeClr val="accent1"/>
+          </a:lnRef>
+          <a:fillRef idx="3">
+            <a:schemeClr val="accent1"/>
+          </a:fillRef>
+          <a:effectRef idx="2">
+            <a:schemeClr val="accent1"/>
+          </a:effectRef>
+          <a:fontRef idx="minor">
+            <a:schemeClr val="lt1"/>
+          </a:fontRef>
+        </p:style>
+        <p:txBody>
+          <a:bodyPr rtlCol="0" anchor="ctr"/>
+          <a:lstStyle/>
+          <a:p>
+            <a:pPr algn="ctr"/>
+          </a:p>
+        </p:txBody>
+      </p:sp>
+      <p:sp>
+        <p:nvSpPr>
           <p:cNvPr id="16" name="TextBox 15"/>
           <p:cNvSpPr txBox="1"/>
           <p:nvPr/>
         </p:nvSpPr>
         <p:spPr>
           <a:xfrm>
-            <a:off x="365760" y="5577840"/>
-            <a:ext cx="2011680" cy="411480"/>
-          </a:xfrm>
-          <a:prstGeom prst="rect">
-            <a:avLst/>
-          </a:prstGeom>
-          <a:noFill/>
-        </p:spPr>
-        <p:txBody>
-          <a:bodyPr wrap="square">
-            <a:spAutoFit/>
-          </a:bodyPr>
-          <a:lstStyle/>
-          <a:p>
-            <a:pPr algn="l"/>
-            <a:r>
-              <a:rPr sz="1100" b="1" i="0">
-                <a:solidFill>
-                  <a:srgbClr val="D4A017"/>
-                </a:solidFill>
-              </a:rPr>
-              <a:t>SUCCESS METRICS</a:t>
-            </a:r>
-          </a:p>
-        </p:txBody>
-      </p:sp>
-      <p:sp>
-        <p:nvSpPr>
-          <p:cNvPr id="17" name="TextBox 16"/>
-          <p:cNvSpPr txBox="1"/>
-          <p:nvPr/>
-        </p:nvSpPr>
-        <p:spPr>
-          <a:xfrm>
-            <a:off x="2468880" y="5559552"/>
-            <a:ext cx="2194560" cy="566928"/>
-          </a:xfrm>
-          <a:prstGeom prst="rect">
-            <a:avLst/>
-          </a:prstGeom>
-          <a:noFill/>
-        </p:spPr>
-        <p:txBody>
-          <a:bodyPr wrap="square">
-            <a:spAutoFit/>
-          </a:bodyPr>
-          <a:lstStyle/>
-          <a:p>
-            <a:pPr algn="ctr"/>
-            <a:r>
-              <a:rPr sz="1100" b="0" i="0">
+            <a:off x="5067604" y="1508760"/>
+            <a:ext cx="2090318" cy="347472"/>
+          </a:xfrm>
+          <a:prstGeom prst="rect">
+            <a:avLst/>
+          </a:prstGeom>
+          <a:noFill/>
+        </p:spPr>
+        <p:txBody>
+          <a:bodyPr wrap="square">
+            <a:spAutoFit/>
+          </a:bodyPr>
+          <a:lstStyle/>
+          <a:p>
+            <a:pPr algn="ctr"/>
+            <a:r>
+              <a:rPr sz="1200" b="1" i="0">
                 <a:solidFill>
                   <a:srgbClr val="FFFFFF"/>
                 </a:solidFill>
               </a:rPr>
-              <a:t>Dwell time
-(target: +45 min)</a:t>
-            </a:r>
+              <a:t>2 Weeks Out</a:t>
+            </a:r>
+          </a:p>
+        </p:txBody>
+      </p:sp>
+      <p:sp>
+        <p:nvSpPr>
+          <p:cNvPr id="17" name="Rectangle 16"/>
+          <p:cNvSpPr/>
+          <p:nvPr/>
+        </p:nvSpPr>
+        <p:spPr>
+          <a:xfrm>
+            <a:off x="4994452" y="1901952"/>
+            <a:ext cx="2200046" cy="4572000"/>
+          </a:xfrm>
+          <a:prstGeom prst="rect">
+            <a:avLst/>
+          </a:prstGeom>
+          <a:solidFill>
+            <a:srgbClr val="FFFFFF"/>
+          </a:solidFill>
+          <a:ln>
+            <a:noFill/>
+          </a:ln>
+        </p:spPr>
+        <p:style>
+          <a:lnRef idx="1">
+            <a:schemeClr val="accent1"/>
+          </a:lnRef>
+          <a:fillRef idx="3">
+            <a:schemeClr val="accent1"/>
+          </a:fillRef>
+          <a:effectRef idx="2">
+            <a:schemeClr val="accent1"/>
+          </a:effectRef>
+          <a:fontRef idx="minor">
+            <a:schemeClr val="lt1"/>
+          </a:fontRef>
+        </p:style>
+        <p:txBody>
+          <a:bodyPr rtlCol="0" anchor="ctr"/>
+          <a:lstStyle/>
+          <a:p>
+            <a:pPr algn="ctr"/>
           </a:p>
         </p:txBody>
       </p:sp>
@@ -12256,99 +14819,528 @@
         </p:nvSpPr>
         <p:spPr>
           <a:xfrm>
-            <a:off x="4800600" y="5559552"/>
-            <a:ext cx="2194560" cy="566928"/>
-          </a:xfrm>
-          <a:prstGeom prst="rect">
-            <a:avLst/>
-          </a:prstGeom>
-          <a:noFill/>
-        </p:spPr>
-        <p:txBody>
-          <a:bodyPr wrap="square">
-            <a:spAutoFit/>
-          </a:bodyPr>
-          <a:lstStyle/>
-          <a:p>
-            <a:pPr algn="ctr"/>
-            <a:r>
-              <a:rPr sz="1100" b="0" i="0">
+            <a:off x="5085892" y="1975104"/>
+            <a:ext cx="2053742" cy="4389120"/>
+          </a:xfrm>
+          <a:prstGeom prst="rect">
+            <a:avLst/>
+          </a:prstGeom>
+          <a:noFill/>
+        </p:spPr>
+        <p:txBody>
+          <a:bodyPr wrap="square">
+            <a:spAutoFit/>
+          </a:bodyPr>
+          <a:lstStyle/>
+          <a:p>
+            <a:pPr>
+              <a:spcAft>
+                <a:spcPts val="700"/>
+              </a:spcAft>
+            </a:pPr>
+            <a:r>
+              <a:rPr sz="1050">
+                <a:solidFill>
+                  <a:srgbClr val="2B2B2B"/>
+                </a:solidFill>
+              </a:rPr>
+              <a:t>• Finalize prize package (rec memberships, dining, local experiences)</a:t>
+            </a:r>
+          </a:p>
+          <a:p>
+            <a:pPr>
+              <a:spcAft>
+                <a:spcPts val="700"/>
+              </a:spcAft>
+            </a:pPr>
+            <a:r>
+              <a:rPr sz="1050">
+                <a:solidFill>
+                  <a:srgbClr val="2B2B2B"/>
+                </a:solidFill>
+              </a:rPr>
+              <a:t>• Print punch/bingo cards &amp; golden egg tokens</a:t>
+            </a:r>
+          </a:p>
+          <a:p>
+            <a:pPr>
+              <a:spcAft>
+                <a:spcPts val="700"/>
+              </a:spcAft>
+            </a:pPr>
+            <a:r>
+              <a:rPr sz="1050">
+                <a:solidFill>
+                  <a:srgbClr val="2B2B2B"/>
+                </a:solidFill>
+              </a:rPr>
+              <a:t>• Confirm staff assignments &amp; golden-egg hide plan</a:t>
+            </a:r>
+          </a:p>
+          <a:p>
+            <a:pPr>
+              <a:spcAft>
+                <a:spcPts val="700"/>
+              </a:spcAft>
+            </a:pPr>
+            <a:r>
+              <a:rPr sz="1050">
+                <a:solidFill>
+                  <a:srgbClr val="2B2B2B"/>
+                </a:solidFill>
+              </a:rPr>
+              <a:t>• Distribute updated site map to vendors &amp; partners</a:t>
+            </a:r>
+          </a:p>
+          <a:p>
+            <a:pPr>
+              <a:spcAft>
+                <a:spcPts val="700"/>
+              </a:spcAft>
+            </a:pPr>
+            <a:r>
+              <a:rPr sz="1050">
+                <a:solidFill>
+                  <a:srgbClr val="2B2B2B"/>
+                </a:solidFill>
+              </a:rPr>
+              <a:t>• Prep race announcement script for emcee</a:t>
+            </a:r>
+          </a:p>
+        </p:txBody>
+      </p:sp>
+      <p:sp>
+        <p:nvSpPr>
+          <p:cNvPr id="19" name="Rectangle 18"/>
+          <p:cNvSpPr/>
+          <p:nvPr/>
+        </p:nvSpPr>
+        <p:spPr>
+          <a:xfrm>
+            <a:off x="7331659" y="1463040"/>
+            <a:ext cx="2200046" cy="438912"/>
+          </a:xfrm>
+          <a:prstGeom prst="rect">
+            <a:avLst/>
+          </a:prstGeom>
+          <a:solidFill>
+            <a:srgbClr val="1A7048"/>
+          </a:solidFill>
+          <a:ln>
+            <a:noFill/>
+          </a:ln>
+        </p:spPr>
+        <p:style>
+          <a:lnRef idx="1">
+            <a:schemeClr val="accent1"/>
+          </a:lnRef>
+          <a:fillRef idx="3">
+            <a:schemeClr val="accent1"/>
+          </a:fillRef>
+          <a:effectRef idx="2">
+            <a:schemeClr val="accent1"/>
+          </a:effectRef>
+          <a:fontRef idx="minor">
+            <a:schemeClr val="lt1"/>
+          </a:fontRef>
+        </p:style>
+        <p:txBody>
+          <a:bodyPr rtlCol="0" anchor="ctr"/>
+          <a:lstStyle/>
+          <a:p>
+            <a:pPr algn="ctr"/>
+          </a:p>
+        </p:txBody>
+      </p:sp>
+      <p:sp>
+        <p:nvSpPr>
+          <p:cNvPr id="20" name="TextBox 19"/>
+          <p:cNvSpPr txBox="1"/>
+          <p:nvPr/>
+        </p:nvSpPr>
+        <p:spPr>
+          <a:xfrm>
+            <a:off x="7404811" y="1508760"/>
+            <a:ext cx="2090318" cy="347472"/>
+          </a:xfrm>
+          <a:prstGeom prst="rect">
+            <a:avLst/>
+          </a:prstGeom>
+          <a:noFill/>
+        </p:spPr>
+        <p:txBody>
+          <a:bodyPr wrap="square">
+            <a:spAutoFit/>
+          </a:bodyPr>
+          <a:lstStyle/>
+          <a:p>
+            <a:pPr algn="ctr"/>
+            <a:r>
+              <a:rPr sz="1200" b="1" i="0">
                 <a:solidFill>
                   <a:srgbClr val="FFFFFF"/>
                 </a:solidFill>
               </a:rPr>
-              <a:t>Raffle ticket
-submission rate</a:t>
-            </a:r>
-          </a:p>
-        </p:txBody>
-      </p:sp>
-      <p:sp>
-        <p:nvSpPr>
-          <p:cNvPr id="19" name="TextBox 18"/>
-          <p:cNvSpPr txBox="1"/>
-          <p:nvPr/>
-        </p:nvSpPr>
-        <p:spPr>
-          <a:xfrm>
-            <a:off x="7132320" y="5559552"/>
-            <a:ext cx="2194560" cy="566928"/>
-          </a:xfrm>
-          <a:prstGeom prst="rect">
-            <a:avLst/>
-          </a:prstGeom>
-          <a:noFill/>
-        </p:spPr>
-        <p:txBody>
-          <a:bodyPr wrap="square">
-            <a:spAutoFit/>
-          </a:bodyPr>
-          <a:lstStyle/>
-          <a:p>
-            <a:pPr algn="ctr"/>
-            <a:r>
-              <a:rPr sz="1100" b="0" i="0">
+              <a:t>Day Of</a:t>
+            </a:r>
+          </a:p>
+        </p:txBody>
+      </p:sp>
+      <p:sp>
+        <p:nvSpPr>
+          <p:cNvPr id="21" name="Rectangle 20"/>
+          <p:cNvSpPr/>
+          <p:nvPr/>
+        </p:nvSpPr>
+        <p:spPr>
+          <a:xfrm>
+            <a:off x="7331659" y="1901952"/>
+            <a:ext cx="2200046" cy="4572000"/>
+          </a:xfrm>
+          <a:prstGeom prst="rect">
+            <a:avLst/>
+          </a:prstGeom>
+          <a:solidFill>
+            <a:srgbClr val="FFFFFF"/>
+          </a:solidFill>
+          <a:ln>
+            <a:noFill/>
+          </a:ln>
+        </p:spPr>
+        <p:style>
+          <a:lnRef idx="1">
+            <a:schemeClr val="accent1"/>
+          </a:lnRef>
+          <a:fillRef idx="3">
+            <a:schemeClr val="accent1"/>
+          </a:fillRef>
+          <a:effectRef idx="2">
+            <a:schemeClr val="accent1"/>
+          </a:effectRef>
+          <a:fontRef idx="minor">
+            <a:schemeClr val="lt1"/>
+          </a:fontRef>
+        </p:style>
+        <p:txBody>
+          <a:bodyPr rtlCol="0" anchor="ctr"/>
+          <a:lstStyle/>
+          <a:p>
+            <a:pPr algn="ctr"/>
+          </a:p>
+        </p:txBody>
+      </p:sp>
+      <p:sp>
+        <p:nvSpPr>
+          <p:cNvPr id="22" name="TextBox 21"/>
+          <p:cNvSpPr txBox="1"/>
+          <p:nvPr/>
+        </p:nvSpPr>
+        <p:spPr>
+          <a:xfrm>
+            <a:off x="7423099" y="1975104"/>
+            <a:ext cx="2053742" cy="4389120"/>
+          </a:xfrm>
+          <a:prstGeom prst="rect">
+            <a:avLst/>
+          </a:prstGeom>
+          <a:noFill/>
+        </p:spPr>
+        <p:txBody>
+          <a:bodyPr wrap="square">
+            <a:spAutoFit/>
+          </a:bodyPr>
+          <a:lstStyle/>
+          <a:p>
+            <a:pPr>
+              <a:spcAft>
+                <a:spcPts val="700"/>
+              </a:spcAft>
+            </a:pPr>
+            <a:r>
+              <a:rPr sz="1050">
+                <a:solidFill>
+                  <a:srgbClr val="2B2B2B"/>
+                </a:solidFill>
+              </a:rPr>
+              <a:t>• Hunt staff briefed on handoff protocol at check-in</a:t>
+            </a:r>
+          </a:p>
+          <a:p>
+            <a:pPr>
+              <a:spcAft>
+                <a:spcPts val="700"/>
+              </a:spcAft>
+            </a:pPr>
+            <a:r>
+              <a:rPr sz="1050">
+                <a:solidFill>
+                  <a:srgbClr val="2B2B2B"/>
+                </a:solidFill>
+              </a:rPr>
+              <a:t>• Entrance staff distribute cards; hide golden eggs before gates open</a:t>
+            </a:r>
+          </a:p>
+          <a:p>
+            <a:pPr>
+              <a:spcAft>
+                <a:spcPts val="700"/>
+              </a:spcAft>
+            </a:pPr>
+            <a:r>
+              <a:rPr sz="1050">
+                <a:solidFill>
+                  <a:srgbClr val="2B2B2B"/>
+                </a:solidFill>
+              </a:rPr>
+              <a:t>• Directional signs posted at exits &amp; periphery loop</a:t>
+            </a:r>
+          </a:p>
+          <a:p>
+            <a:pPr>
+              <a:spcAft>
+                <a:spcPts val="700"/>
+              </a:spcAft>
+            </a:pPr>
+            <a:r>
+              <a:rPr sz="1050">
+                <a:solidFill>
+                  <a:srgbClr val="2B2B2B"/>
+                </a:solidFill>
+              </a:rPr>
+              <a:t>• Emcee announces race schedule &amp; prize drawing at open (9 AM)</a:t>
+            </a:r>
+          </a:p>
+          <a:p>
+            <a:pPr>
+              <a:spcAft>
+                <a:spcPts val="700"/>
+              </a:spcAft>
+            </a:pPr>
+            <a:r>
+              <a:rPr sz="1050">
+                <a:solidFill>
+                  <a:srgbClr val="2B2B2B"/>
+                </a:solidFill>
+              </a:rPr>
+              <a:t>• Grand Prize Drawing announced at 12:15 PM from main stage</a:t>
+            </a:r>
+          </a:p>
+        </p:txBody>
+      </p:sp>
+      <p:sp>
+        <p:nvSpPr>
+          <p:cNvPr id="23" name="Rectangle 22"/>
+          <p:cNvSpPr/>
+          <p:nvPr/>
+        </p:nvSpPr>
+        <p:spPr>
+          <a:xfrm>
+            <a:off x="9668865" y="1463040"/>
+            <a:ext cx="2200046" cy="438912"/>
+          </a:xfrm>
+          <a:prstGeom prst="rect">
+            <a:avLst/>
+          </a:prstGeom>
+          <a:solidFill>
+            <a:srgbClr val="4A4A4A"/>
+          </a:solidFill>
+          <a:ln>
+            <a:noFill/>
+          </a:ln>
+        </p:spPr>
+        <p:style>
+          <a:lnRef idx="1">
+            <a:schemeClr val="accent1"/>
+          </a:lnRef>
+          <a:fillRef idx="3">
+            <a:schemeClr val="accent1"/>
+          </a:fillRef>
+          <a:effectRef idx="2">
+            <a:schemeClr val="accent1"/>
+          </a:effectRef>
+          <a:fontRef idx="minor">
+            <a:schemeClr val="lt1"/>
+          </a:fontRef>
+        </p:style>
+        <p:txBody>
+          <a:bodyPr rtlCol="0" anchor="ctr"/>
+          <a:lstStyle/>
+          <a:p>
+            <a:pPr algn="ctr"/>
+          </a:p>
+        </p:txBody>
+      </p:sp>
+      <p:sp>
+        <p:nvSpPr>
+          <p:cNvPr id="24" name="TextBox 23"/>
+          <p:cNvSpPr txBox="1"/>
+          <p:nvPr/>
+        </p:nvSpPr>
+        <p:spPr>
+          <a:xfrm>
+            <a:off x="9742017" y="1508760"/>
+            <a:ext cx="2090318" cy="347472"/>
+          </a:xfrm>
+          <a:prstGeom prst="rect">
+            <a:avLst/>
+          </a:prstGeom>
+          <a:noFill/>
+        </p:spPr>
+        <p:txBody>
+          <a:bodyPr wrap="square">
+            <a:spAutoFit/>
+          </a:bodyPr>
+          <a:lstStyle/>
+          <a:p>
+            <a:pPr algn="ctr"/>
+            <a:r>
+              <a:rPr sz="1200" b="1" i="0">
                 <a:solidFill>
                   <a:srgbClr val="FFFFFF"/>
                 </a:solidFill>
               </a:rPr>
-              <a:t>Vendor satisfaction
-survey scores</a:t>
-            </a:r>
-          </a:p>
-        </p:txBody>
-      </p:sp>
-      <p:sp>
-        <p:nvSpPr>
-          <p:cNvPr id="20" name="TextBox 19"/>
-          <p:cNvSpPr txBox="1"/>
-          <p:nvPr/>
-        </p:nvSpPr>
-        <p:spPr>
-          <a:xfrm>
-            <a:off x="9464040" y="5559552"/>
-            <a:ext cx="2194560" cy="566928"/>
-          </a:xfrm>
-          <a:prstGeom prst="rect">
-            <a:avLst/>
-          </a:prstGeom>
-          <a:noFill/>
-        </p:spPr>
-        <p:txBody>
-          <a:bodyPr wrap="square">
-            <a:spAutoFit/>
-          </a:bodyPr>
-          <a:lstStyle/>
-          <a:p>
-            <a:pPr algn="ctr"/>
-            <a:r>
-              <a:rPr sz="1100" b="0" i="0">
-                <a:solidFill>
-                  <a:srgbClr val="FFFFFF"/>
-                </a:solidFill>
-              </a:rPr>
-              <a:t>Sponsor revenue
-generated</a:t>
+              <a:t>Post-Event</a:t>
+            </a:r>
+          </a:p>
+        </p:txBody>
+      </p:sp>
+      <p:sp>
+        <p:nvSpPr>
+          <p:cNvPr id="25" name="Rectangle 24"/>
+          <p:cNvSpPr/>
+          <p:nvPr/>
+        </p:nvSpPr>
+        <p:spPr>
+          <a:xfrm>
+            <a:off x="9668865" y="1901952"/>
+            <a:ext cx="2200046" cy="4572000"/>
+          </a:xfrm>
+          <a:prstGeom prst="rect">
+            <a:avLst/>
+          </a:prstGeom>
+          <a:solidFill>
+            <a:srgbClr val="FFFFFF"/>
+          </a:solidFill>
+          <a:ln>
+            <a:noFill/>
+          </a:ln>
+        </p:spPr>
+        <p:style>
+          <a:lnRef idx="1">
+            <a:schemeClr val="accent1"/>
+          </a:lnRef>
+          <a:fillRef idx="3">
+            <a:schemeClr val="accent1"/>
+          </a:fillRef>
+          <a:effectRef idx="2">
+            <a:schemeClr val="accent1"/>
+          </a:effectRef>
+          <a:fontRef idx="minor">
+            <a:schemeClr val="lt1"/>
+          </a:fontRef>
+        </p:style>
+        <p:txBody>
+          <a:bodyPr rtlCol="0" anchor="ctr"/>
+          <a:lstStyle/>
+          <a:p>
+            <a:pPr algn="ctr"/>
+          </a:p>
+        </p:txBody>
+      </p:sp>
+      <p:sp>
+        <p:nvSpPr>
+          <p:cNvPr id="26" name="TextBox 25"/>
+          <p:cNvSpPr txBox="1"/>
+          <p:nvPr/>
+        </p:nvSpPr>
+        <p:spPr>
+          <a:xfrm>
+            <a:off x="9760305" y="1975104"/>
+            <a:ext cx="2053742" cy="4389120"/>
+          </a:xfrm>
+          <a:prstGeom prst="rect">
+            <a:avLst/>
+          </a:prstGeom>
+          <a:noFill/>
+        </p:spPr>
+        <p:txBody>
+          <a:bodyPr wrap="square">
+            <a:spAutoFit/>
+          </a:bodyPr>
+          <a:lstStyle/>
+          <a:p>
+            <a:pPr>
+              <a:spcAft>
+                <a:spcPts val="700"/>
+              </a:spcAft>
+            </a:pPr>
+            <a:r>
+              <a:rPr sz="1050">
+                <a:solidFill>
+                  <a:srgbClr val="2B2B2B"/>
+                </a:solidFill>
+              </a:rPr>
+              <a:t>• Vendor satisfaction survey (5 Q's, emailed within 48 hrs)</a:t>
+            </a:r>
+          </a:p>
+          <a:p>
+            <a:pPr>
+              <a:spcAft>
+                <a:spcPts val="700"/>
+              </a:spcAft>
+            </a:pPr>
+            <a:r>
+              <a:rPr sz="1050">
+                <a:solidFill>
+                  <a:srgbClr val="2B2B2B"/>
+                </a:solidFill>
+              </a:rPr>
+              <a:t>• Staff debrief — what worked, what didn't</a:t>
+            </a:r>
+          </a:p>
+          <a:p>
+            <a:pPr>
+              <a:spcAft>
+                <a:spcPts val="700"/>
+              </a:spcAft>
+            </a:pPr>
+            <a:r>
+              <a:rPr sz="1050">
+                <a:solidFill>
+                  <a:srgbClr val="2B2B2B"/>
+                </a:solidFill>
+              </a:rPr>
+              <a:t>• Document raffle &amp; card submission rate as retention proxy</a:t>
+            </a:r>
+          </a:p>
+          <a:p>
+            <a:pPr>
+              <a:spcAft>
+                <a:spcPts val="700"/>
+              </a:spcAft>
+            </a:pPr>
+            <a:r>
+              <a:rPr sz="1050">
+                <a:solidFill>
+                  <a:srgbClr val="2B2B2B"/>
+                </a:solidFill>
+              </a:rPr>
+              <a:t>• Present findings to leadership for next year's planning</a:t>
+            </a:r>
+          </a:p>
+          <a:p>
+            <a:pPr>
+              <a:spcAft>
+                <a:spcPts val="700"/>
+              </a:spcAft>
+            </a:pPr>
+            <a:r>
+              <a:rPr sz="1050">
+                <a:solidFill>
+                  <a:srgbClr val="2B2B2B"/>
+                </a:solidFill>
+              </a:rPr>
+              <a:t>• Future idea: explore a family feedback loop next season</a:t>
             </a:r>
           </a:p>
         </p:txBody>

--- a/SpringIntoQC_Presentation.pptx
+++ b/SpringIntoQC_Presentation.pptx
@@ -8932,7 +8932,7 @@
                   <a:srgbClr val="555555"/>
                 </a:solidFill>
               </a:rPr>
-              <a:t>AZ's largest organic peach grower</a:t>
+              <a:t>the largest peach grower in the State</a:t>
             </a:r>
           </a:p>
         </p:txBody>
